--- a/Science_Teesside/Teaching_Packs/GROW/lessons/W7B/GROW_Science_Autumn1_W7B_The_Moon.pptx
+++ b/Science_Teesside/Teaching_Packs/GROW/lessons/W7B/GROW_Science_Autumn1_W7B_The_Moon.pptx
@@ -2,25 +2,25 @@
 <file path=ppt/presentation.xml><?xml version="1.0" encoding="utf-8"?>
 <p:presentation xmlns:p="http://schemas.openxmlformats.org/presentationml/2006/main">
   <p:sldMasterIdLst>
-    <p:sldMasterId xmlns:r="http://schemas.openxmlformats.org/officeDocument/2006/relationships" id="2147483648" r:id="R9fb0e34234124d24"/>
+    <p:sldMasterId xmlns:r="http://schemas.openxmlformats.org/officeDocument/2006/relationships" id="2147483648" r:id="R421830ab485546a6"/>
   </p:sldMasterIdLst>
   <p:notesMasterIdLst>
-    <p:notesMasterId xmlns:r="http://schemas.openxmlformats.org/officeDocument/2006/relationships" r:id="Redf886ec9b8f406a"/>
+    <p:notesMasterId xmlns:r="http://schemas.openxmlformats.org/officeDocument/2006/relationships" r:id="R381782598b244b47"/>
   </p:notesMasterIdLst>
   <p:sldIdLst>
-    <p:sldId xmlns:r="http://schemas.openxmlformats.org/officeDocument/2006/relationships" id="256" r:id="Rb2a8b9aefce14f75"/>
-    <p:sldId xmlns:r="http://schemas.openxmlformats.org/officeDocument/2006/relationships" id="257" r:id="R17c49c57ed97480e"/>
-    <p:sldId xmlns:r="http://schemas.openxmlformats.org/officeDocument/2006/relationships" id="258" r:id="Re52dac6cb6f747c7"/>
-    <p:sldId xmlns:r="http://schemas.openxmlformats.org/officeDocument/2006/relationships" id="259" r:id="R2554597ac1404418"/>
-    <p:sldId xmlns:r="http://schemas.openxmlformats.org/officeDocument/2006/relationships" id="260" r:id="Rec14577d0f06441c"/>
-    <p:sldId xmlns:r="http://schemas.openxmlformats.org/officeDocument/2006/relationships" id="261" r:id="R73f465371f4c4b75"/>
-    <p:sldId xmlns:r="http://schemas.openxmlformats.org/officeDocument/2006/relationships" id="262" r:id="Rcee7ed8f984e47ba"/>
-    <p:sldId xmlns:r="http://schemas.openxmlformats.org/officeDocument/2006/relationships" id="263" r:id="Rc6f491db21bc4a4a"/>
-    <p:sldId xmlns:r="http://schemas.openxmlformats.org/officeDocument/2006/relationships" id="264" r:id="R69b282193e544d2b"/>
-    <p:sldId xmlns:r="http://schemas.openxmlformats.org/officeDocument/2006/relationships" id="265" r:id="R1eaf924b11754d0a"/>
-    <p:sldId xmlns:r="http://schemas.openxmlformats.org/officeDocument/2006/relationships" id="266" r:id="Rc74cfec90c3442e2"/>
-    <p:sldId xmlns:r="http://schemas.openxmlformats.org/officeDocument/2006/relationships" id="267" r:id="R5d226a1e7d4f4d04"/>
-    <p:sldId xmlns:r="http://schemas.openxmlformats.org/officeDocument/2006/relationships" id="268" r:id="R18927ac2a26c41d1"/>
+    <p:sldId xmlns:r="http://schemas.openxmlformats.org/officeDocument/2006/relationships" id="256" r:id="Rc387c1f020ce4d50"/>
+    <p:sldId xmlns:r="http://schemas.openxmlformats.org/officeDocument/2006/relationships" id="257" r:id="R69d45993980d452a"/>
+    <p:sldId xmlns:r="http://schemas.openxmlformats.org/officeDocument/2006/relationships" id="258" r:id="Rcbf2659aa65c4d0d"/>
+    <p:sldId xmlns:r="http://schemas.openxmlformats.org/officeDocument/2006/relationships" id="259" r:id="Rb9b6ae1fc5f244b2"/>
+    <p:sldId xmlns:r="http://schemas.openxmlformats.org/officeDocument/2006/relationships" id="260" r:id="Rfd594f3878a840aa"/>
+    <p:sldId xmlns:r="http://schemas.openxmlformats.org/officeDocument/2006/relationships" id="261" r:id="Rc2ce860e102140f0"/>
+    <p:sldId xmlns:r="http://schemas.openxmlformats.org/officeDocument/2006/relationships" id="262" r:id="Rb7095d108cec4ff1"/>
+    <p:sldId xmlns:r="http://schemas.openxmlformats.org/officeDocument/2006/relationships" id="263" r:id="R94135075c0ec4905"/>
+    <p:sldId xmlns:r="http://schemas.openxmlformats.org/officeDocument/2006/relationships" id="264" r:id="Rb767206189cc401c"/>
+    <p:sldId xmlns:r="http://schemas.openxmlformats.org/officeDocument/2006/relationships" id="265" r:id="R48b1ffd4634c4054"/>
+    <p:sldId xmlns:r="http://schemas.openxmlformats.org/officeDocument/2006/relationships" id="266" r:id="Re0d6df62899a4a6c"/>
+    <p:sldId xmlns:r="http://schemas.openxmlformats.org/officeDocument/2006/relationships" id="267" r:id="R931c2a671ff640b4"/>
+    <p:sldId xmlns:r="http://schemas.openxmlformats.org/officeDocument/2006/relationships" id="268" r:id="R542558926b914eca"/>
   </p:sldIdLst>
   <p:sldSz cx="12192000" cy="6858000"/>
   <p:notesSz cx="6858000" cy="9144000"/>
@@ -492,6 +492,14 @@
               <a:t>[/Sources]</a:t>
             </a:r>
           </a:p>
+          <a:p xmlns:a="http://schemas.openxmlformats.org/drawingml/2006/main">
+            <a:r>
+              <a:t>
+[Sources]
+NASA, Moon Phases. https://science.nasa.gov/moon/moon-phases/
+[/Sources]</a:t>
+            </a:r>
+          </a:p>
         </p:txBody>
       </p:sp>
       <p:sp>
@@ -1817,7 +1825,7 @@
   </p:cSld>
   <p:clrMap bg1="lt1" tx1="dk1" bg2="lt2" tx2="dk2" accent1="accent1" accent2="accent2" accent3="accent3" accent4="accent4" accent5="accent5" accent6="accent6" hlink="hlink" folHlink="folHlink"/>
   <p:sldLayoutIdLst>
-    <p:sldLayoutId xmlns:r="http://schemas.openxmlformats.org/officeDocument/2006/relationships" id="2147483649" r:id="R971b5726a807407a"/>
+    <p:sldLayoutId xmlns:r="http://schemas.openxmlformats.org/officeDocument/2006/relationships" id="2147483649" r:id="R0848fa9ea843464a"/>
   </p:sldLayoutIdLst>
   <p:txStyles>
     <p:titleStyle>
@@ -2350,7 +2358,7 @@
     <p:bg>
       <p:bgPr>
         <a:solidFill xmlns:a="http://schemas.openxmlformats.org/drawingml/2006/main">
-          <a:srgbClr val="F5F1E8"/>
+          <a:srgbClr val="FAF9F5"/>
         </a:solidFill>
       </p:bgPr>
     </p:bg>
@@ -2379,8 +2387,8 @@
         </p:nvSpPr>
         <p:spPr>
           <a:xfrm xmlns:a="http://schemas.openxmlformats.org/drawingml/2006/main">
-            <a:off x="609600" y="552450"/>
-            <a:ext cx="781050" cy="57150"/>
+            <a:off x="609600" y="733425"/>
+            <a:ext cx="781050" cy="38100"/>
           </a:xfrm>
           <a:prstGeom xmlns:a="http://schemas.openxmlformats.org/drawingml/2006/main" prst="rect">
             <a:avLst/>
@@ -2410,8 +2418,8 @@
         </p:nvSpPr>
         <p:spPr>
           <a:xfrm xmlns:a="http://schemas.openxmlformats.org/drawingml/2006/main">
-            <a:off x="609600" y="762000"/>
-            <a:ext cx="8572500" cy="285750"/>
+            <a:off x="609600" y="342900"/>
+            <a:ext cx="9334500" cy="304800"/>
           </a:xfrm>
           <a:prstGeom xmlns:a="http://schemas.openxmlformats.org/drawingml/2006/main" prst="rect">
             <a:avLst/>
@@ -2423,21 +2431,30 @@
           </a:ln>
         </p:spPr>
         <p:txBody>
-          <a:bodyPr xmlns:a="http://schemas.openxmlformats.org/drawingml/2006/main" lIns="0" tIns="0" rIns="0" bIns="0" anchor="ctr"/>
-          <a:lstStyle xmlns:a="http://schemas.openxmlformats.org/drawingml/2006/main"/>
-          <a:p xmlns:a="http://schemas.openxmlformats.org/drawingml/2006/main">
-            <a:pPr>
-              <a:defRPr sz="1500" b="1">
-                <a:solidFill>
-                  <a:srgbClr val="28685E"/>
-                </a:solidFill>
-              </a:defRPr>
-            </a:pPr>
-            <a:r>
-              <a:rPr sz="1500" b="1">
-                <a:solidFill>
-                  <a:srgbClr val="28685E"/>
-                </a:solidFill>
+          <a:bodyPr xmlns:a="http://schemas.openxmlformats.org/drawingml/2006/main" lIns="0" tIns="0" rIns="0" bIns="0" anchor="ctr">
+            <a:noAutofit/>
+          </a:bodyPr>
+          <a:lstStyle xmlns:a="http://schemas.openxmlformats.org/drawingml/2006/main"/>
+          <a:p xmlns:a="http://schemas.openxmlformats.org/drawingml/2006/main">
+            <a:pPr algn="l">
+              <a:buNone/>
+              <a:defRPr sz="1350" b="1">
+                <a:solidFill>
+                  <a:srgbClr val="28685E"/>
+                </a:solidFill>
+                <a:latin typeface="Calibri"/>
+                <a:ea typeface="Calibri"/>
+                <a:cs typeface="Calibri"/>
+              </a:defRPr>
+            </a:pPr>
+            <a:r>
+              <a:rPr sz="1350" b="1">
+                <a:solidFill>
+                  <a:srgbClr val="28685E"/>
+                </a:solidFill>
+                <a:latin typeface="Calibri"/>
+                <a:ea typeface="Calibri"/>
+                <a:cs typeface="Calibri"/>
               </a:rPr>
               <a:t>MADE BY MATT  /  GROW SCIENCE</a:t>
             </a:r>
@@ -2460,8 +2477,8 @@
         </p:nvSpPr>
         <p:spPr>
           <a:xfrm xmlns:a="http://schemas.openxmlformats.org/drawingml/2006/main">
-            <a:off x="609600" y="1352550"/>
-            <a:ext cx="10972800" cy="952500"/>
+            <a:off x="609600" y="990600"/>
+            <a:ext cx="10972800" cy="1000125"/>
           </a:xfrm>
           <a:prstGeom xmlns:a="http://schemas.openxmlformats.org/drawingml/2006/main" prst="rect">
             <a:avLst/>
@@ -2473,21 +2490,30 @@
           </a:ln>
         </p:spPr>
         <p:txBody>
-          <a:bodyPr xmlns:a="http://schemas.openxmlformats.org/drawingml/2006/main" lIns="0" tIns="0" rIns="0" bIns="0" anchor="ctr"/>
-          <a:lstStyle xmlns:a="http://schemas.openxmlformats.org/drawingml/2006/main"/>
-          <a:p xmlns:a="http://schemas.openxmlformats.org/drawingml/2006/main">
-            <a:pPr>
-              <a:defRPr sz="3750" b="1">
+          <a:bodyPr xmlns:a="http://schemas.openxmlformats.org/drawingml/2006/main" lIns="0" tIns="0" rIns="0" bIns="0" anchor="ctr">
+            <a:noAutofit/>
+          </a:bodyPr>
+          <a:lstStyle xmlns:a="http://schemas.openxmlformats.org/drawingml/2006/main"/>
+          <a:p xmlns:a="http://schemas.openxmlformats.org/drawingml/2006/main">
+            <a:pPr algn="l">
+              <a:buNone/>
+              <a:defRPr sz="3675" b="1">
                 <a:solidFill>
                   <a:srgbClr val="152B3A"/>
                 </a:solidFill>
-              </a:defRPr>
-            </a:pPr>
-            <a:r>
-              <a:rPr sz="3750" b="1">
+                <a:latin typeface="Calibri"/>
+                <a:ea typeface="Calibri"/>
+                <a:cs typeface="Calibri"/>
+              </a:defRPr>
+            </a:pPr>
+            <a:r>
+              <a:rPr sz="3675" b="1">
                 <a:solidFill>
                   <a:srgbClr val="152B3A"/>
                 </a:solidFill>
+                <a:latin typeface="Calibri"/>
+                <a:ea typeface="Calibri"/>
+                <a:cs typeface="Calibri"/>
               </a:rPr>
               <a:t>Test a phase-wheel model</a:t>
             </a:r>
@@ -2510,14 +2536,14 @@
         </p:nvSpPr>
         <p:spPr>
           <a:xfrm xmlns:a="http://schemas.openxmlformats.org/drawingml/2006/main">
-            <a:off x="609600" y="6219825"/>
+            <a:off x="609600" y="6191250"/>
             <a:ext cx="10972800" cy="9525"/>
           </a:xfrm>
           <a:prstGeom xmlns:a="http://schemas.openxmlformats.org/drawingml/2006/main" prst="rect">
             <a:avLst/>
           </a:prstGeom>
           <a:solidFill xmlns:a="http://schemas.openxmlformats.org/drawingml/2006/main">
-            <a:srgbClr val="DCE7DD"/>
+            <a:srgbClr val="CEDBD3"/>
           </a:solidFill>
           <a:ln xmlns:a="http://schemas.openxmlformats.org/drawingml/2006/main" w="0">
             <a:noFill/>
@@ -2541,8 +2567,8 @@
         </p:nvSpPr>
         <p:spPr>
           <a:xfrm xmlns:a="http://schemas.openxmlformats.org/drawingml/2006/main">
-            <a:off x="609600" y="6381750"/>
-            <a:ext cx="9906000" cy="228600"/>
+            <a:off x="609600" y="6419850"/>
+            <a:ext cx="9525000" cy="219075"/>
           </a:xfrm>
           <a:prstGeom xmlns:a="http://schemas.openxmlformats.org/drawingml/2006/main" prst="rect">
             <a:avLst/>
@@ -2554,21 +2580,30 @@
           </a:ln>
         </p:spPr>
         <p:txBody>
-          <a:bodyPr xmlns:a="http://schemas.openxmlformats.org/drawingml/2006/main" lIns="0" tIns="0" rIns="0" bIns="0" anchor="ctr"/>
-          <a:lstStyle xmlns:a="http://schemas.openxmlformats.org/drawingml/2006/main"/>
-          <a:p xmlns:a="http://schemas.openxmlformats.org/drawingml/2006/main">
-            <a:pPr>
-              <a:defRPr sz="1275" b="0">
+          <a:bodyPr xmlns:a="http://schemas.openxmlformats.org/drawingml/2006/main" lIns="0" tIns="0" rIns="0" bIns="0" anchor="ctr">
+            <a:noAutofit/>
+          </a:bodyPr>
+          <a:lstStyle xmlns:a="http://schemas.openxmlformats.org/drawingml/2006/main"/>
+          <a:p xmlns:a="http://schemas.openxmlformats.org/drawingml/2006/main">
+            <a:pPr algn="l">
+              <a:buNone/>
+              <a:defRPr sz="1200" b="0">
                 <a:solidFill>
                   <a:srgbClr val="50616B"/>
                 </a:solidFill>
-              </a:defRPr>
-            </a:pPr>
-            <a:r>
-              <a:rPr sz="1275" b="0">
+                <a:latin typeface="Calibri"/>
+                <a:ea typeface="Calibri"/>
+                <a:cs typeface="Calibri"/>
+              </a:defRPr>
+            </a:pPr>
+            <a:r>
+              <a:rPr sz="1200" b="0">
                 <a:solidFill>
                   <a:srgbClr val="50616B"/>
                 </a:solidFill>
+                <a:latin typeface="Calibri"/>
+                <a:ea typeface="Calibri"/>
+                <a:cs typeface="Calibri"/>
               </a:rPr>
               <a:t>AUTUMN 1  ·  WEEK 7  ·  LESSON B</a:t>
             </a:r>
@@ -2591,8 +2626,8 @@
         </p:nvSpPr>
         <p:spPr>
           <a:xfrm xmlns:a="http://schemas.openxmlformats.org/drawingml/2006/main">
-            <a:off x="11106150" y="6362700"/>
-            <a:ext cx="476250" cy="238125"/>
+            <a:off x="11106150" y="6400800"/>
+            <a:ext cx="476250" cy="247650"/>
           </a:xfrm>
           <a:prstGeom xmlns:a="http://schemas.openxmlformats.org/drawingml/2006/main" prst="rect">
             <a:avLst/>
@@ -2604,14 +2639,20 @@
           </a:ln>
         </p:spPr>
         <p:txBody>
-          <a:bodyPr xmlns:a="http://schemas.openxmlformats.org/drawingml/2006/main" lIns="0" tIns="0" rIns="0" bIns="0" anchor="ctr"/>
-          <a:lstStyle xmlns:a="http://schemas.openxmlformats.org/drawingml/2006/main"/>
-          <a:p xmlns:a="http://schemas.openxmlformats.org/drawingml/2006/main">
-            <a:pPr>
+          <a:bodyPr xmlns:a="http://schemas.openxmlformats.org/drawingml/2006/main" lIns="0" tIns="0" rIns="0" bIns="0" anchor="ctr">
+            <a:noAutofit/>
+          </a:bodyPr>
+          <a:lstStyle xmlns:a="http://schemas.openxmlformats.org/drawingml/2006/main"/>
+          <a:p xmlns:a="http://schemas.openxmlformats.org/drawingml/2006/main">
+            <a:pPr algn="l">
+              <a:buNone/>
               <a:defRPr sz="1350" b="1">
                 <a:solidFill>
                   <a:srgbClr val="28685E"/>
                 </a:solidFill>
+                <a:latin typeface="Calibri"/>
+                <a:ea typeface="Calibri"/>
+                <a:cs typeface="Calibri"/>
               </a:defRPr>
             </a:pPr>
             <a:r>
@@ -2619,6 +2660,9 @@
                 <a:solidFill>
                   <a:srgbClr val="28685E"/>
                 </a:solidFill>
+                <a:latin typeface="Calibri"/>
+                <a:ea typeface="Calibri"/>
+                <a:cs typeface="Calibri"/>
               </a:rPr>
               <a:t>01</a:t>
             </a:r>
@@ -2641,8 +2685,8 @@
         </p:nvSpPr>
         <p:spPr>
           <a:xfrm xmlns:a="http://schemas.openxmlformats.org/drawingml/2006/main">
-            <a:off x="609600" y="2809875"/>
-            <a:ext cx="10668000" cy="1000125"/>
+            <a:off x="609600" y="2447925"/>
+            <a:ext cx="5429250" cy="1638300"/>
           </a:xfrm>
           <a:prstGeom xmlns:a="http://schemas.openxmlformats.org/drawingml/2006/main" prst="rect">
             <a:avLst/>
@@ -2654,23 +2698,56 @@
           </a:ln>
         </p:spPr>
         <p:txBody>
-          <a:bodyPr xmlns:a="http://schemas.openxmlformats.org/drawingml/2006/main" lIns="0" tIns="0" rIns="0" bIns="0" anchor="ctr"/>
-          <a:lstStyle xmlns:a="http://schemas.openxmlformats.org/drawingml/2006/main"/>
-          <a:p xmlns:a="http://schemas.openxmlformats.org/drawingml/2006/main">
-            <a:pPr>
-              <a:defRPr sz="3900" b="1">
-                <a:solidFill>
-                  <a:srgbClr val="28685E"/>
-                </a:solidFill>
-              </a:defRPr>
-            </a:pPr>
-            <a:r>
-              <a:rPr sz="3900" b="1">
-                <a:solidFill>
-                  <a:srgbClr val="28685E"/>
-                </a:solidFill>
-              </a:rPr>
-              <a:t>Same Moon. Three checked views.</a:t>
+          <a:bodyPr xmlns:a="http://schemas.openxmlformats.org/drawingml/2006/main" lIns="0" tIns="0" rIns="0" bIns="0" anchor="ctr">
+            <a:noAutofit/>
+          </a:bodyPr>
+          <a:lstStyle xmlns:a="http://schemas.openxmlformats.org/drawingml/2006/main"/>
+          <a:p xmlns:a="http://schemas.openxmlformats.org/drawingml/2006/main">
+            <a:pPr algn="l">
+              <a:buNone/>
+              <a:defRPr sz="3600" b="1">
+                <a:solidFill>
+                  <a:srgbClr val="28685E"/>
+                </a:solidFill>
+                <a:latin typeface="Calibri"/>
+                <a:ea typeface="Calibri"/>
+                <a:cs typeface="Calibri"/>
+              </a:defRPr>
+            </a:pPr>
+            <a:r>
+              <a:rPr sz="3600" b="1">
+                <a:solidFill>
+                  <a:srgbClr val="28685E"/>
+                </a:solidFill>
+                <a:latin typeface="Calibri"/>
+                <a:ea typeface="Calibri"/>
+                <a:cs typeface="Calibri"/>
+              </a:rPr>
+              <a:t>Same Moon.</a:t>
+            </a:r>
+          </a:p>
+          <a:p xmlns:a="http://schemas.openxmlformats.org/drawingml/2006/main">
+            <a:pPr algn="l">
+              <a:buNone/>
+              <a:defRPr sz="3600" b="1">
+                <a:solidFill>
+                  <a:srgbClr val="28685E"/>
+                </a:solidFill>
+                <a:latin typeface="Calibri"/>
+                <a:ea typeface="Calibri"/>
+                <a:cs typeface="Calibri"/>
+              </a:defRPr>
+            </a:pPr>
+            <a:r>
+              <a:rPr sz="3600" b="1">
+                <a:solidFill>
+                  <a:srgbClr val="28685E"/>
+                </a:solidFill>
+                <a:latin typeface="Calibri"/>
+                <a:ea typeface="Calibri"/>
+                <a:cs typeface="Calibri"/>
+              </a:rPr>
+              <a:t>Three checked views.</a:t>
             </a:r>
           </a:p>
         </p:txBody>
@@ -2691,8 +2768,8 @@
         </p:nvSpPr>
         <p:spPr>
           <a:xfrm xmlns:a="http://schemas.openxmlformats.org/drawingml/2006/main">
-            <a:off x="609600" y="4143375"/>
-            <a:ext cx="10668000" cy="1143000"/>
+            <a:off x="609600" y="4286250"/>
+            <a:ext cx="5314950" cy="1466850"/>
           </a:xfrm>
           <a:prstGeom xmlns:a="http://schemas.openxmlformats.org/drawingml/2006/main" prst="rect">
             <a:avLst/>
@@ -2704,27 +2781,82 @@
           </a:ln>
         </p:spPr>
         <p:txBody>
-          <a:bodyPr xmlns:a="http://schemas.openxmlformats.org/drawingml/2006/main" lIns="0" tIns="0" rIns="0" bIns="0" anchor="ctr"/>
-          <a:lstStyle xmlns:a="http://schemas.openxmlformats.org/drawingml/2006/main"/>
-          <a:p xmlns:a="http://schemas.openxmlformats.org/drawingml/2006/main">
-            <a:pPr>
-              <a:defRPr sz="2550" b="0">
+          <a:bodyPr xmlns:a="http://schemas.openxmlformats.org/drawingml/2006/main" lIns="0" tIns="0" rIns="0" bIns="0" anchor="ctr">
+            <a:noAutofit/>
+          </a:bodyPr>
+          <a:lstStyle xmlns:a="http://schemas.openxmlformats.org/drawingml/2006/main"/>
+          <a:p xmlns:a="http://schemas.openxmlformats.org/drawingml/2006/main">
+            <a:pPr algn="l">
+              <a:buNone/>
+              <a:defRPr sz="2400" b="0">
                 <a:solidFill>
                   <a:srgbClr val="152B3A"/>
                 </a:solidFill>
-              </a:defRPr>
-            </a:pPr>
-            <a:r>
-              <a:rPr sz="2550" b="0">
+                <a:latin typeface="Calibri"/>
+                <a:ea typeface="Calibri"/>
+                <a:cs typeface="Calibri"/>
+              </a:defRPr>
+            </a:pPr>
+            <a:r>
+              <a:rPr sz="2400" b="0">
                 <a:solidFill>
                   <a:srgbClr val="152B3A"/>
                 </a:solidFill>
-              </a:rPr>
-              <a:t>Use evidence to explain new, half and full Moon.</a:t>
-            </a:r>
-          </a:p>
-        </p:txBody>
-      </p:sp>
+                <a:latin typeface="Calibri"/>
+                <a:ea typeface="Calibri"/>
+                <a:cs typeface="Calibri"/>
+              </a:rPr>
+              <a:t>Use evidence to explain</a:t>
+            </a:r>
+          </a:p>
+          <a:p xmlns:a="http://schemas.openxmlformats.org/drawingml/2006/main">
+            <a:pPr algn="l">
+              <a:buNone/>
+              <a:defRPr sz="2400" b="0">
+                <a:solidFill>
+                  <a:srgbClr val="152B3A"/>
+                </a:solidFill>
+                <a:latin typeface="Calibri"/>
+                <a:ea typeface="Calibri"/>
+                <a:cs typeface="Calibri"/>
+              </a:defRPr>
+            </a:pPr>
+            <a:r>
+              <a:rPr sz="2400" b="0">
+                <a:solidFill>
+                  <a:srgbClr val="152B3A"/>
+                </a:solidFill>
+                <a:latin typeface="Calibri"/>
+                <a:ea typeface="Calibri"/>
+                <a:cs typeface="Calibri"/>
+              </a:rPr>
+              <a:t>new, half and full Moon.</a:t>
+            </a:r>
+          </a:p>
+        </p:txBody>
+      </p:sp>
+      <p:pic>
+        <p:nvPicPr>
+          <p:cNvPr id="19" name=""/>
+          <p:cNvPicPr>
+            <a:picLocks xmlns:a="http://schemas.openxmlformats.org/drawingml/2006/main" noChangeAspect="1"/>
+          </p:cNvPicPr>
+          <p:nvPr/>
+        </p:nvPicPr>
+        <p:blipFill>
+          <a:blip xmlns:r="http://schemas.openxmlformats.org/officeDocument/2006/relationships" xmlns:a="http://schemas.openxmlformats.org/drawingml/2006/main" r:embed="R48e30b9127174d97"/>
+          <a:stretch xmlns:a="http://schemas.openxmlformats.org/drawingml/2006/main"/>
+        </p:blipFill>
+        <p:spPr>
+          <a:xfrm xmlns:a="http://schemas.openxmlformats.org/drawingml/2006/main">
+            <a:off x="7052416" y="2200275"/>
+            <a:ext cx="3878369" cy="3714750"/>
+          </a:xfrm>
+          <a:prstGeom xmlns:a="http://schemas.openxmlformats.org/drawingml/2006/main" prst="rect">
+            <a:avLst/>
+          </a:prstGeom>
+        </p:spPr>
+      </p:pic>
     </p:spTree>
     <p:extLst>
       <p:ext uri="{BB962C8B-B14F-4D97-AF65-F5344CB8AC3E}">
@@ -2741,7 +2873,7 @@
     <p:bg>
       <p:bgPr>
         <a:solidFill xmlns:a="http://schemas.openxmlformats.org/drawingml/2006/main">
-          <a:srgbClr val="F5F1E8"/>
+          <a:srgbClr val="FAF9F5"/>
         </a:solidFill>
       </p:bgPr>
     </p:bg>
@@ -2770,8 +2902,8 @@
         </p:nvSpPr>
         <p:spPr>
           <a:xfrm xmlns:a="http://schemas.openxmlformats.org/drawingml/2006/main">
-            <a:off x="609600" y="552450"/>
-            <a:ext cx="781050" cy="57150"/>
+            <a:off x="609600" y="733425"/>
+            <a:ext cx="781050" cy="38100"/>
           </a:xfrm>
           <a:prstGeom xmlns:a="http://schemas.openxmlformats.org/drawingml/2006/main" prst="rect">
             <a:avLst/>
@@ -2801,8 +2933,8 @@
         </p:nvSpPr>
         <p:spPr>
           <a:xfrm xmlns:a="http://schemas.openxmlformats.org/drawingml/2006/main">
-            <a:off x="609600" y="762000"/>
-            <a:ext cx="8572500" cy="285750"/>
+            <a:off x="609600" y="342900"/>
+            <a:ext cx="9334500" cy="304800"/>
           </a:xfrm>
           <a:prstGeom xmlns:a="http://schemas.openxmlformats.org/drawingml/2006/main" prst="rect">
             <a:avLst/>
@@ -2814,21 +2946,30 @@
           </a:ln>
         </p:spPr>
         <p:txBody>
-          <a:bodyPr xmlns:a="http://schemas.openxmlformats.org/drawingml/2006/main" lIns="0" tIns="0" rIns="0" bIns="0" anchor="ctr"/>
-          <a:lstStyle xmlns:a="http://schemas.openxmlformats.org/drawingml/2006/main"/>
-          <a:p xmlns:a="http://schemas.openxmlformats.org/drawingml/2006/main">
-            <a:pPr>
-              <a:defRPr sz="1500" b="1">
-                <a:solidFill>
-                  <a:srgbClr val="28685E"/>
-                </a:solidFill>
-              </a:defRPr>
-            </a:pPr>
-            <a:r>
-              <a:rPr sz="1500" b="1">
-                <a:solidFill>
-                  <a:srgbClr val="28685E"/>
-                </a:solidFill>
+          <a:bodyPr xmlns:a="http://schemas.openxmlformats.org/drawingml/2006/main" lIns="0" tIns="0" rIns="0" bIns="0" anchor="ctr">
+            <a:noAutofit/>
+          </a:bodyPr>
+          <a:lstStyle xmlns:a="http://schemas.openxmlformats.org/drawingml/2006/main"/>
+          <a:p xmlns:a="http://schemas.openxmlformats.org/drawingml/2006/main">
+            <a:pPr algn="l">
+              <a:buNone/>
+              <a:defRPr sz="1350" b="1">
+                <a:solidFill>
+                  <a:srgbClr val="28685E"/>
+                </a:solidFill>
+                <a:latin typeface="Calibri"/>
+                <a:ea typeface="Calibri"/>
+                <a:cs typeface="Calibri"/>
+              </a:defRPr>
+            </a:pPr>
+            <a:r>
+              <a:rPr sz="1350" b="1">
+                <a:solidFill>
+                  <a:srgbClr val="28685E"/>
+                </a:solidFill>
+                <a:latin typeface="Calibri"/>
+                <a:ea typeface="Calibri"/>
+                <a:cs typeface="Calibri"/>
               </a:rPr>
               <a:t>MADE BY MATT  /  GROW SCIENCE</a:t>
             </a:r>
@@ -2851,8 +2992,8 @@
         </p:nvSpPr>
         <p:spPr>
           <a:xfrm xmlns:a="http://schemas.openxmlformats.org/drawingml/2006/main">
-            <a:off x="609600" y="1352550"/>
-            <a:ext cx="10972800" cy="952500"/>
+            <a:off x="609600" y="990600"/>
+            <a:ext cx="10972800" cy="1000125"/>
           </a:xfrm>
           <a:prstGeom xmlns:a="http://schemas.openxmlformats.org/drawingml/2006/main" prst="rect">
             <a:avLst/>
@@ -2864,21 +3005,30 @@
           </a:ln>
         </p:spPr>
         <p:txBody>
-          <a:bodyPr xmlns:a="http://schemas.openxmlformats.org/drawingml/2006/main" lIns="0" tIns="0" rIns="0" bIns="0" anchor="ctr"/>
-          <a:lstStyle xmlns:a="http://schemas.openxmlformats.org/drawingml/2006/main"/>
-          <a:p xmlns:a="http://schemas.openxmlformats.org/drawingml/2006/main">
-            <a:pPr>
-              <a:defRPr sz="3750" b="1">
+          <a:bodyPr xmlns:a="http://schemas.openxmlformats.org/drawingml/2006/main" lIns="0" tIns="0" rIns="0" bIns="0" anchor="ctr">
+            <a:noAutofit/>
+          </a:bodyPr>
+          <a:lstStyle xmlns:a="http://schemas.openxmlformats.org/drawingml/2006/main"/>
+          <a:p xmlns:a="http://schemas.openxmlformats.org/drawingml/2006/main">
+            <a:pPr algn="l">
+              <a:buNone/>
+              <a:defRPr sz="3675" b="1">
                 <a:solidFill>
                   <a:srgbClr val="152B3A"/>
                 </a:solidFill>
-              </a:defRPr>
-            </a:pPr>
-            <a:r>
-              <a:rPr sz="3750" b="1">
+                <a:latin typeface="Calibri"/>
+                <a:ea typeface="Calibri"/>
+                <a:cs typeface="Calibri"/>
+              </a:defRPr>
+            </a:pPr>
+            <a:r>
+              <a:rPr sz="3675" b="1">
                 <a:solidFill>
                   <a:srgbClr val="152B3A"/>
                 </a:solidFill>
+                <a:latin typeface="Calibri"/>
+                <a:ea typeface="Calibri"/>
+                <a:cs typeface="Calibri"/>
               </a:rPr>
               <a:t>Say what helped or hindered</a:t>
             </a:r>
@@ -2901,14 +3051,14 @@
         </p:nvSpPr>
         <p:spPr>
           <a:xfrm xmlns:a="http://schemas.openxmlformats.org/drawingml/2006/main">
-            <a:off x="609600" y="6219825"/>
+            <a:off x="609600" y="6191250"/>
             <a:ext cx="10972800" cy="9525"/>
           </a:xfrm>
           <a:prstGeom xmlns:a="http://schemas.openxmlformats.org/drawingml/2006/main" prst="rect">
             <a:avLst/>
           </a:prstGeom>
           <a:solidFill xmlns:a="http://schemas.openxmlformats.org/drawingml/2006/main">
-            <a:srgbClr val="DCE7DD"/>
+            <a:srgbClr val="CEDBD3"/>
           </a:solidFill>
           <a:ln xmlns:a="http://schemas.openxmlformats.org/drawingml/2006/main" w="0">
             <a:noFill/>
@@ -2932,8 +3082,8 @@
         </p:nvSpPr>
         <p:spPr>
           <a:xfrm xmlns:a="http://schemas.openxmlformats.org/drawingml/2006/main">
-            <a:off x="609600" y="6381750"/>
-            <a:ext cx="9906000" cy="228600"/>
+            <a:off x="609600" y="6419850"/>
+            <a:ext cx="9525000" cy="219075"/>
           </a:xfrm>
           <a:prstGeom xmlns:a="http://schemas.openxmlformats.org/drawingml/2006/main" prst="rect">
             <a:avLst/>
@@ -2945,21 +3095,30 @@
           </a:ln>
         </p:spPr>
         <p:txBody>
-          <a:bodyPr xmlns:a="http://schemas.openxmlformats.org/drawingml/2006/main" lIns="0" tIns="0" rIns="0" bIns="0" anchor="ctr"/>
-          <a:lstStyle xmlns:a="http://schemas.openxmlformats.org/drawingml/2006/main"/>
-          <a:p xmlns:a="http://schemas.openxmlformats.org/drawingml/2006/main">
-            <a:pPr>
-              <a:defRPr sz="1275" b="0">
+          <a:bodyPr xmlns:a="http://schemas.openxmlformats.org/drawingml/2006/main" lIns="0" tIns="0" rIns="0" bIns="0" anchor="ctr">
+            <a:noAutofit/>
+          </a:bodyPr>
+          <a:lstStyle xmlns:a="http://schemas.openxmlformats.org/drawingml/2006/main"/>
+          <a:p xmlns:a="http://schemas.openxmlformats.org/drawingml/2006/main">
+            <a:pPr algn="l">
+              <a:buNone/>
+              <a:defRPr sz="1200" b="0">
                 <a:solidFill>
                   <a:srgbClr val="50616B"/>
                 </a:solidFill>
-              </a:defRPr>
-            </a:pPr>
-            <a:r>
-              <a:rPr sz="1275" b="0">
+                <a:latin typeface="Calibri"/>
+                <a:ea typeface="Calibri"/>
+                <a:cs typeface="Calibri"/>
+              </a:defRPr>
+            </a:pPr>
+            <a:r>
+              <a:rPr sz="1200" b="0">
                 <a:solidFill>
                   <a:srgbClr val="50616B"/>
                 </a:solidFill>
+                <a:latin typeface="Calibri"/>
+                <a:ea typeface="Calibri"/>
+                <a:cs typeface="Calibri"/>
               </a:rPr>
               <a:t>AUTUMN 1  ·  WEEK 7  ·  LESSON B</a:t>
             </a:r>
@@ -2982,8 +3141,8 @@
         </p:nvSpPr>
         <p:spPr>
           <a:xfrm xmlns:a="http://schemas.openxmlformats.org/drawingml/2006/main">
-            <a:off x="11106150" y="6362700"/>
-            <a:ext cx="476250" cy="238125"/>
+            <a:off x="11106150" y="6400800"/>
+            <a:ext cx="476250" cy="247650"/>
           </a:xfrm>
           <a:prstGeom xmlns:a="http://schemas.openxmlformats.org/drawingml/2006/main" prst="rect">
             <a:avLst/>
@@ -2995,14 +3154,20 @@
           </a:ln>
         </p:spPr>
         <p:txBody>
-          <a:bodyPr xmlns:a="http://schemas.openxmlformats.org/drawingml/2006/main" lIns="0" tIns="0" rIns="0" bIns="0" anchor="ctr"/>
-          <a:lstStyle xmlns:a="http://schemas.openxmlformats.org/drawingml/2006/main"/>
-          <a:p xmlns:a="http://schemas.openxmlformats.org/drawingml/2006/main">
-            <a:pPr>
+          <a:bodyPr xmlns:a="http://schemas.openxmlformats.org/drawingml/2006/main" lIns="0" tIns="0" rIns="0" bIns="0" anchor="ctr">
+            <a:noAutofit/>
+          </a:bodyPr>
+          <a:lstStyle xmlns:a="http://schemas.openxmlformats.org/drawingml/2006/main"/>
+          <a:p xmlns:a="http://schemas.openxmlformats.org/drawingml/2006/main">
+            <a:pPr algn="l">
+              <a:buNone/>
               <a:defRPr sz="1350" b="1">
                 <a:solidFill>
                   <a:srgbClr val="28685E"/>
                 </a:solidFill>
+                <a:latin typeface="Calibri"/>
+                <a:ea typeface="Calibri"/>
+                <a:cs typeface="Calibri"/>
               </a:defRPr>
             </a:pPr>
             <a:r>
@@ -3010,6 +3175,9 @@
                 <a:solidFill>
                   <a:srgbClr val="28685E"/>
                 </a:solidFill>
+                <a:latin typeface="Calibri"/>
+                <a:ea typeface="Calibri"/>
+                <a:cs typeface="Calibri"/>
               </a:rPr>
               <a:t>10</a:t>
             </a:r>
@@ -3032,8 +3200,8 @@
         </p:nvSpPr>
         <p:spPr>
           <a:xfrm xmlns:a="http://schemas.openxmlformats.org/drawingml/2006/main">
-            <a:off x="609600" y="2619375"/>
-            <a:ext cx="10972800" cy="781050"/>
+            <a:off x="1000125" y="2333625"/>
+            <a:ext cx="10382250" cy="1076325"/>
           </a:xfrm>
           <a:prstGeom xmlns:a="http://schemas.openxmlformats.org/drawingml/2006/main" prst="rect">
             <a:avLst/>
@@ -3045,21 +3213,30 @@
           </a:ln>
         </p:spPr>
         <p:txBody>
-          <a:bodyPr xmlns:a="http://schemas.openxmlformats.org/drawingml/2006/main" lIns="0" tIns="0" rIns="0" bIns="0" anchor="ctr"/>
-          <a:lstStyle xmlns:a="http://schemas.openxmlformats.org/drawingml/2006/main"/>
-          <a:p xmlns:a="http://schemas.openxmlformats.org/drawingml/2006/main">
-            <a:pPr>
-              <a:defRPr sz="2550" b="0">
+          <a:bodyPr xmlns:a="http://schemas.openxmlformats.org/drawingml/2006/main" lIns="0" tIns="0" rIns="0" bIns="0" anchor="ctr">
+            <a:noAutofit/>
+          </a:bodyPr>
+          <a:lstStyle xmlns:a="http://schemas.openxmlformats.org/drawingml/2006/main"/>
+          <a:p xmlns:a="http://schemas.openxmlformats.org/drawingml/2006/main">
+            <a:pPr algn="l">
+              <a:buNone/>
+              <a:defRPr sz="2625" b="0">
                 <a:solidFill>
                   <a:srgbClr val="152B3A"/>
                 </a:solidFill>
-              </a:defRPr>
-            </a:pPr>
-            <a:r>
-              <a:rPr sz="2550" b="0">
+                <a:latin typeface="Calibri"/>
+                <a:ea typeface="Calibri"/>
+                <a:cs typeface="Calibri"/>
+              </a:defRPr>
+            </a:pPr>
+            <a:r>
+              <a:rPr sz="2625" b="0">
                 <a:solidFill>
                   <a:srgbClr val="152B3A"/>
                 </a:solidFill>
+                <a:latin typeface="Calibri"/>
+                <a:ea typeface="Calibri"/>
+                <a:cs typeface="Calibri"/>
               </a:rPr>
               <a:t>Did the model or still drawing help you understand?</a:t>
             </a:r>
@@ -3082,8 +3259,8 @@
         </p:nvSpPr>
         <p:spPr>
           <a:xfrm xmlns:a="http://schemas.openxmlformats.org/drawingml/2006/main">
-            <a:off x="609600" y="3476625"/>
-            <a:ext cx="10972800" cy="781050"/>
+            <a:off x="1000125" y="3467100"/>
+            <a:ext cx="10382250" cy="1076325"/>
           </a:xfrm>
           <a:prstGeom xmlns:a="http://schemas.openxmlformats.org/drawingml/2006/main" prst="rect">
             <a:avLst/>
@@ -3095,21 +3272,30 @@
           </a:ln>
         </p:spPr>
         <p:txBody>
-          <a:bodyPr xmlns:a="http://schemas.openxmlformats.org/drawingml/2006/main" lIns="0" tIns="0" rIns="0" bIns="0" anchor="ctr"/>
-          <a:lstStyle xmlns:a="http://schemas.openxmlformats.org/drawingml/2006/main"/>
-          <a:p xmlns:a="http://schemas.openxmlformats.org/drawingml/2006/main">
-            <a:pPr>
-              <a:defRPr sz="2550" b="0">
+          <a:bodyPr xmlns:a="http://schemas.openxmlformats.org/drawingml/2006/main" lIns="0" tIns="0" rIns="0" bIns="0" anchor="ctr">
+            <a:noAutofit/>
+          </a:bodyPr>
+          <a:lstStyle xmlns:a="http://schemas.openxmlformats.org/drawingml/2006/main"/>
+          <a:p xmlns:a="http://schemas.openxmlformats.org/drawingml/2006/main">
+            <a:pPr algn="l">
+              <a:buNone/>
+              <a:defRPr sz="2625" b="0">
                 <a:solidFill>
                   <a:srgbClr val="152B3A"/>
                 </a:solidFill>
-              </a:defRPr>
-            </a:pPr>
-            <a:r>
-              <a:rPr sz="2550" b="0">
+                <a:latin typeface="Calibri"/>
+                <a:ea typeface="Calibri"/>
+                <a:cs typeface="Calibri"/>
+              </a:defRPr>
+            </a:pPr>
+            <a:r>
+              <a:rPr sz="2625" b="0">
                 <a:solidFill>
                   <a:srgbClr val="152B3A"/>
                 </a:solidFill>
+                <a:latin typeface="Calibri"/>
+                <a:ea typeface="Calibri"/>
+                <a:cs typeface="Calibri"/>
               </a:rPr>
               <a:t>Would a different light level, label or explanation help?</a:t>
             </a:r>
@@ -3132,8 +3318,8 @@
         </p:nvSpPr>
         <p:spPr>
           <a:xfrm xmlns:a="http://schemas.openxmlformats.org/drawingml/2006/main">
-            <a:off x="609600" y="4333875"/>
-            <a:ext cx="10972800" cy="781050"/>
+            <a:off x="1000125" y="4600575"/>
+            <a:ext cx="10382250" cy="1076325"/>
           </a:xfrm>
           <a:prstGeom xmlns:a="http://schemas.openxmlformats.org/drawingml/2006/main" prst="rect">
             <a:avLst/>
@@ -3145,23 +3331,263 @@
           </a:ln>
         </p:spPr>
         <p:txBody>
-          <a:bodyPr xmlns:a="http://schemas.openxmlformats.org/drawingml/2006/main" lIns="0" tIns="0" rIns="0" bIns="0" anchor="ctr"/>
-          <a:lstStyle xmlns:a="http://schemas.openxmlformats.org/drawingml/2006/main"/>
-          <a:p xmlns:a="http://schemas.openxmlformats.org/drawingml/2006/main">
-            <a:pPr>
-              <a:defRPr sz="2550" b="0">
+          <a:bodyPr xmlns:a="http://schemas.openxmlformats.org/drawingml/2006/main" lIns="0" tIns="0" rIns="0" bIns="0" anchor="ctr">
+            <a:noAutofit/>
+          </a:bodyPr>
+          <a:lstStyle xmlns:a="http://schemas.openxmlformats.org/drawingml/2006/main"/>
+          <a:p xmlns:a="http://schemas.openxmlformats.org/drawingml/2006/main">
+            <a:pPr algn="l">
+              <a:buNone/>
+              <a:defRPr sz="2625" b="0">
                 <a:solidFill>
                   <a:srgbClr val="152B3A"/>
                 </a:solidFill>
-              </a:defRPr>
-            </a:pPr>
-            <a:r>
-              <a:rPr sz="2550" b="0">
+                <a:latin typeface="Calibri"/>
+                <a:ea typeface="Calibri"/>
+                <a:cs typeface="Calibri"/>
+              </a:defRPr>
+            </a:pPr>
+            <a:r>
+              <a:rPr sz="2625" b="0">
                 <a:solidFill>
                   <a:srgbClr val="152B3A"/>
                 </a:solidFill>
+                <a:latin typeface="Calibri"/>
+                <a:ea typeface="Calibri"/>
+                <a:cs typeface="Calibri"/>
               </a:rPr>
               <a:t>Point, sign, speak privately, or pass.</a:t>
+            </a:r>
+          </a:p>
+        </p:txBody>
+      </p:sp>
+      <p:sp>
+        <p:nvSpPr>
+          <p:cNvPr id="11" name="cue-0">
+            <a:extLst xmlns:a="http://schemas.openxmlformats.org/drawingml/2006/main">
+              <a:ext uri="{FF2B5EF4-FFF2-40B4-BE49-F238E27FC236}">
+                <a16:creationId xmlns:a16="http://schemas.microsoft.com/office/drawing/2014/main" id="{DD10ADC5-60E9-4837-94C9-D673D53C01E1}"/>
+              </a:ext>
+            </a:extLst>
+          </p:cNvPr>
+          <p:cNvSpPr>
+            <a:spLocks xmlns:a="http://schemas.openxmlformats.org/drawingml/2006/main" noGrp="1"/>
+          </p:cNvSpPr>
+          <p:nvPr/>
+        </p:nvSpPr>
+        <p:spPr>
+          <a:xfrm xmlns:a="http://schemas.openxmlformats.org/drawingml/2006/main">
+            <a:off x="609600" y="2362200"/>
+            <a:ext cx="323850" cy="323850"/>
+          </a:xfrm>
+          <a:prstGeom xmlns:a="http://schemas.openxmlformats.org/drawingml/2006/main" prst="rect">
+            <a:avLst/>
+          </a:prstGeom>
+          <a:noFill xmlns:a="http://schemas.openxmlformats.org/drawingml/2006/main"/>
+          <a:ln xmlns:a="http://schemas.openxmlformats.org/drawingml/2006/main" w="0">
+            <a:noFill/>
+          </a:ln>
+        </p:spPr>
+        <p:txBody>
+          <a:bodyPr xmlns:a="http://schemas.openxmlformats.org/drawingml/2006/main" lIns="0" tIns="0" rIns="0" bIns="0" anchor="ctr">
+            <a:noAutofit/>
+          </a:bodyPr>
+          <a:lstStyle xmlns:a="http://schemas.openxmlformats.org/drawingml/2006/main"/>
+          <a:p xmlns:a="http://schemas.openxmlformats.org/drawingml/2006/main">
+            <a:pPr algn="l">
+              <a:defRPr sz="1350" b="1">
+                <a:solidFill>
+                  <a:srgbClr val="28685E"/>
+                </a:solidFill>
+                <a:latin typeface="Calibri"/>
+                <a:ea typeface="Calibri"/>
+                <a:cs typeface="Calibri"/>
+              </a:defRPr>
+            </a:pPr>
+            <a:r>
+              <a:rPr sz="1350" b="1">
+                <a:solidFill>
+                  <a:srgbClr val="28685E"/>
+                </a:solidFill>
+                <a:latin typeface="Calibri"/>
+                <a:ea typeface="Calibri"/>
+                <a:cs typeface="Calibri"/>
+              </a:rPr>
+              <a:t>01</a:t>
+            </a:r>
+          </a:p>
+        </p:txBody>
+      </p:sp>
+      <p:sp>
+        <p:nvSpPr>
+          <p:cNvPr id="12" name="row-rule-0">
+            <a:extLst xmlns:a="http://schemas.openxmlformats.org/drawingml/2006/main">
+              <a:ext uri="{FF2B5EF4-FFF2-40B4-BE49-F238E27FC236}">
+                <a16:creationId xmlns:a16="http://schemas.microsoft.com/office/drawing/2014/main" id="{C4EE6705-8415-42D9-A338-868B4CAA31E6}"/>
+              </a:ext>
+            </a:extLst>
+          </p:cNvPr>
+          <p:cNvSpPr>
+            <a:spLocks xmlns:a="http://schemas.openxmlformats.org/drawingml/2006/main" noGrp="1"/>
+          </p:cNvSpPr>
+          <p:nvPr/>
+        </p:nvSpPr>
+        <p:spPr>
+          <a:xfrm xmlns:a="http://schemas.openxmlformats.org/drawingml/2006/main">
+            <a:off x="1000125" y="3419475"/>
+            <a:ext cx="10334625" cy="0"/>
+          </a:xfrm>
+          <a:prstGeom xmlns:a="http://schemas.openxmlformats.org/drawingml/2006/main" prst="line">
+            <a:avLst/>
+          </a:prstGeom>
+          <a:noFill xmlns:a="http://schemas.openxmlformats.org/drawingml/2006/main"/>
+          <a:ln xmlns:a="http://schemas.openxmlformats.org/drawingml/2006/main" w="9525">
+            <a:solidFill>
+              <a:srgbClr val="CEDBD3"/>
+            </a:solidFill>
+          </a:ln>
+        </p:spPr>
+      </p:sp>
+      <p:sp>
+        <p:nvSpPr>
+          <p:cNvPr id="13" name="cue-1">
+            <a:extLst xmlns:a="http://schemas.openxmlformats.org/drawingml/2006/main">
+              <a:ext uri="{FF2B5EF4-FFF2-40B4-BE49-F238E27FC236}">
+                <a16:creationId xmlns:a16="http://schemas.microsoft.com/office/drawing/2014/main" id="{0A3AF454-A5A8-4DAE-85C8-BF5DED69D818}"/>
+              </a:ext>
+            </a:extLst>
+          </p:cNvPr>
+          <p:cNvSpPr>
+            <a:spLocks xmlns:a="http://schemas.openxmlformats.org/drawingml/2006/main" noGrp="1"/>
+          </p:cNvSpPr>
+          <p:nvPr/>
+        </p:nvSpPr>
+        <p:spPr>
+          <a:xfrm xmlns:a="http://schemas.openxmlformats.org/drawingml/2006/main">
+            <a:off x="609600" y="3495675"/>
+            <a:ext cx="323850" cy="323850"/>
+          </a:xfrm>
+          <a:prstGeom xmlns:a="http://schemas.openxmlformats.org/drawingml/2006/main" prst="rect">
+            <a:avLst/>
+          </a:prstGeom>
+          <a:noFill xmlns:a="http://schemas.openxmlformats.org/drawingml/2006/main"/>
+          <a:ln xmlns:a="http://schemas.openxmlformats.org/drawingml/2006/main" w="0">
+            <a:noFill/>
+          </a:ln>
+        </p:spPr>
+        <p:txBody>
+          <a:bodyPr xmlns:a="http://schemas.openxmlformats.org/drawingml/2006/main" lIns="0" tIns="0" rIns="0" bIns="0" anchor="ctr">
+            <a:noAutofit/>
+          </a:bodyPr>
+          <a:lstStyle xmlns:a="http://schemas.openxmlformats.org/drawingml/2006/main"/>
+          <a:p xmlns:a="http://schemas.openxmlformats.org/drawingml/2006/main">
+            <a:pPr algn="l">
+              <a:defRPr sz="1350" b="1">
+                <a:solidFill>
+                  <a:srgbClr val="28685E"/>
+                </a:solidFill>
+                <a:latin typeface="Calibri"/>
+                <a:ea typeface="Calibri"/>
+                <a:cs typeface="Calibri"/>
+              </a:defRPr>
+            </a:pPr>
+            <a:r>
+              <a:rPr sz="1350" b="1">
+                <a:solidFill>
+                  <a:srgbClr val="28685E"/>
+                </a:solidFill>
+                <a:latin typeface="Calibri"/>
+                <a:ea typeface="Calibri"/>
+                <a:cs typeface="Calibri"/>
+              </a:rPr>
+              <a:t>02</a:t>
+            </a:r>
+          </a:p>
+        </p:txBody>
+      </p:sp>
+      <p:sp>
+        <p:nvSpPr>
+          <p:cNvPr id="14" name="row-rule-1">
+            <a:extLst xmlns:a="http://schemas.openxmlformats.org/drawingml/2006/main">
+              <a:ext uri="{FF2B5EF4-FFF2-40B4-BE49-F238E27FC236}">
+                <a16:creationId xmlns:a16="http://schemas.microsoft.com/office/drawing/2014/main" id="{CA584B42-1042-4233-982A-69C3B007A1A7}"/>
+              </a:ext>
+            </a:extLst>
+          </p:cNvPr>
+          <p:cNvSpPr>
+            <a:spLocks xmlns:a="http://schemas.openxmlformats.org/drawingml/2006/main" noGrp="1"/>
+          </p:cNvSpPr>
+          <p:nvPr/>
+        </p:nvSpPr>
+        <p:spPr>
+          <a:xfrm xmlns:a="http://schemas.openxmlformats.org/drawingml/2006/main">
+            <a:off x="1000125" y="4552950"/>
+            <a:ext cx="10334625" cy="0"/>
+          </a:xfrm>
+          <a:prstGeom xmlns:a="http://schemas.openxmlformats.org/drawingml/2006/main" prst="line">
+            <a:avLst/>
+          </a:prstGeom>
+          <a:noFill xmlns:a="http://schemas.openxmlformats.org/drawingml/2006/main"/>
+          <a:ln xmlns:a="http://schemas.openxmlformats.org/drawingml/2006/main" w="9525">
+            <a:solidFill>
+              <a:srgbClr val="CEDBD3"/>
+            </a:solidFill>
+          </a:ln>
+        </p:spPr>
+      </p:sp>
+      <p:sp>
+        <p:nvSpPr>
+          <p:cNvPr id="15" name="cue-2">
+            <a:extLst xmlns:a="http://schemas.openxmlformats.org/drawingml/2006/main">
+              <a:ext uri="{FF2B5EF4-FFF2-40B4-BE49-F238E27FC236}">
+                <a16:creationId xmlns:a16="http://schemas.microsoft.com/office/drawing/2014/main" id="{156DCABC-9D91-4567-A44A-59EA5202BEE6}"/>
+              </a:ext>
+            </a:extLst>
+          </p:cNvPr>
+          <p:cNvSpPr>
+            <a:spLocks xmlns:a="http://schemas.openxmlformats.org/drawingml/2006/main" noGrp="1"/>
+          </p:cNvSpPr>
+          <p:nvPr/>
+        </p:nvSpPr>
+        <p:spPr>
+          <a:xfrm xmlns:a="http://schemas.openxmlformats.org/drawingml/2006/main">
+            <a:off x="609600" y="4629150"/>
+            <a:ext cx="323850" cy="323850"/>
+          </a:xfrm>
+          <a:prstGeom xmlns:a="http://schemas.openxmlformats.org/drawingml/2006/main" prst="rect">
+            <a:avLst/>
+          </a:prstGeom>
+          <a:noFill xmlns:a="http://schemas.openxmlformats.org/drawingml/2006/main"/>
+          <a:ln xmlns:a="http://schemas.openxmlformats.org/drawingml/2006/main" w="0">
+            <a:noFill/>
+          </a:ln>
+        </p:spPr>
+        <p:txBody>
+          <a:bodyPr xmlns:a="http://schemas.openxmlformats.org/drawingml/2006/main" lIns="0" tIns="0" rIns="0" bIns="0" anchor="ctr">
+            <a:noAutofit/>
+          </a:bodyPr>
+          <a:lstStyle xmlns:a="http://schemas.openxmlformats.org/drawingml/2006/main"/>
+          <a:p xmlns:a="http://schemas.openxmlformats.org/drawingml/2006/main">
+            <a:pPr algn="l">
+              <a:defRPr sz="1350" b="1">
+                <a:solidFill>
+                  <a:srgbClr val="28685E"/>
+                </a:solidFill>
+                <a:latin typeface="Calibri"/>
+                <a:ea typeface="Calibri"/>
+                <a:cs typeface="Calibri"/>
+              </a:defRPr>
+            </a:pPr>
+            <a:r>
+              <a:rPr sz="1350" b="1">
+                <a:solidFill>
+                  <a:srgbClr val="28685E"/>
+                </a:solidFill>
+                <a:latin typeface="Calibri"/>
+                <a:ea typeface="Calibri"/>
+                <a:cs typeface="Calibri"/>
+              </a:rPr>
+              <a:t>03</a:t>
             </a:r>
           </a:p>
         </p:txBody>
@@ -3182,7 +3608,7 @@
     <p:bg>
       <p:bgPr>
         <a:solidFill xmlns:a="http://schemas.openxmlformats.org/drawingml/2006/main">
-          <a:srgbClr val="F5F1E8"/>
+          <a:srgbClr val="FAF9F5"/>
         </a:solidFill>
       </p:bgPr>
     </p:bg>
@@ -3211,8 +3637,8 @@
         </p:nvSpPr>
         <p:spPr>
           <a:xfrm xmlns:a="http://schemas.openxmlformats.org/drawingml/2006/main">
-            <a:off x="609600" y="552450"/>
-            <a:ext cx="781050" cy="57150"/>
+            <a:off x="609600" y="733425"/>
+            <a:ext cx="781050" cy="38100"/>
           </a:xfrm>
           <a:prstGeom xmlns:a="http://schemas.openxmlformats.org/drawingml/2006/main" prst="rect">
             <a:avLst/>
@@ -3242,8 +3668,8 @@
         </p:nvSpPr>
         <p:spPr>
           <a:xfrm xmlns:a="http://schemas.openxmlformats.org/drawingml/2006/main">
-            <a:off x="609600" y="762000"/>
-            <a:ext cx="8572500" cy="285750"/>
+            <a:off x="609600" y="342900"/>
+            <a:ext cx="9334500" cy="304800"/>
           </a:xfrm>
           <a:prstGeom xmlns:a="http://schemas.openxmlformats.org/drawingml/2006/main" prst="rect">
             <a:avLst/>
@@ -3255,21 +3681,30 @@
           </a:ln>
         </p:spPr>
         <p:txBody>
-          <a:bodyPr xmlns:a="http://schemas.openxmlformats.org/drawingml/2006/main" lIns="0" tIns="0" rIns="0" bIns="0" anchor="ctr"/>
-          <a:lstStyle xmlns:a="http://schemas.openxmlformats.org/drawingml/2006/main"/>
-          <a:p xmlns:a="http://schemas.openxmlformats.org/drawingml/2006/main">
-            <a:pPr>
-              <a:defRPr sz="1500" b="1">
-                <a:solidFill>
-                  <a:srgbClr val="28685E"/>
-                </a:solidFill>
-              </a:defRPr>
-            </a:pPr>
-            <a:r>
-              <a:rPr sz="1500" b="1">
-                <a:solidFill>
-                  <a:srgbClr val="28685E"/>
-                </a:solidFill>
+          <a:bodyPr xmlns:a="http://schemas.openxmlformats.org/drawingml/2006/main" lIns="0" tIns="0" rIns="0" bIns="0" anchor="ctr">
+            <a:noAutofit/>
+          </a:bodyPr>
+          <a:lstStyle xmlns:a="http://schemas.openxmlformats.org/drawingml/2006/main"/>
+          <a:p xmlns:a="http://schemas.openxmlformats.org/drawingml/2006/main">
+            <a:pPr algn="l">
+              <a:buNone/>
+              <a:defRPr sz="1350" b="1">
+                <a:solidFill>
+                  <a:srgbClr val="28685E"/>
+                </a:solidFill>
+                <a:latin typeface="Calibri"/>
+                <a:ea typeface="Calibri"/>
+                <a:cs typeface="Calibri"/>
+              </a:defRPr>
+            </a:pPr>
+            <a:r>
+              <a:rPr sz="1350" b="1">
+                <a:solidFill>
+                  <a:srgbClr val="28685E"/>
+                </a:solidFill>
+                <a:latin typeface="Calibri"/>
+                <a:ea typeface="Calibri"/>
+                <a:cs typeface="Calibri"/>
               </a:rPr>
               <a:t>MADE BY MATT  /  GROW SCIENCE</a:t>
             </a:r>
@@ -3292,8 +3727,8 @@
         </p:nvSpPr>
         <p:spPr>
           <a:xfrm xmlns:a="http://schemas.openxmlformats.org/drawingml/2006/main">
-            <a:off x="609600" y="1352550"/>
-            <a:ext cx="10972800" cy="952500"/>
+            <a:off x="609600" y="990600"/>
+            <a:ext cx="10972800" cy="1000125"/>
           </a:xfrm>
           <a:prstGeom xmlns:a="http://schemas.openxmlformats.org/drawingml/2006/main" prst="rect">
             <a:avLst/>
@@ -3305,21 +3740,30 @@
           </a:ln>
         </p:spPr>
         <p:txBody>
-          <a:bodyPr xmlns:a="http://schemas.openxmlformats.org/drawingml/2006/main" lIns="0" tIns="0" rIns="0" bIns="0" anchor="ctr"/>
-          <a:lstStyle xmlns:a="http://schemas.openxmlformats.org/drawingml/2006/main"/>
-          <a:p xmlns:a="http://schemas.openxmlformats.org/drawingml/2006/main">
-            <a:pPr>
-              <a:defRPr sz="3750" b="1">
+          <a:bodyPr xmlns:a="http://schemas.openxmlformats.org/drawingml/2006/main" lIns="0" tIns="0" rIns="0" bIns="0" anchor="ctr">
+            <a:noAutofit/>
+          </a:bodyPr>
+          <a:lstStyle xmlns:a="http://schemas.openxmlformats.org/drawingml/2006/main"/>
+          <a:p xmlns:a="http://schemas.openxmlformats.org/drawingml/2006/main">
+            <a:pPr algn="l">
+              <a:buNone/>
+              <a:defRPr sz="3675" b="1">
                 <a:solidFill>
                   <a:srgbClr val="152B3A"/>
                 </a:solidFill>
-              </a:defRPr>
-            </a:pPr>
-            <a:r>
-              <a:rPr sz="3750" b="1">
+                <a:latin typeface="Calibri"/>
+                <a:ea typeface="Calibri"/>
+                <a:cs typeface="Calibri"/>
+              </a:defRPr>
+            </a:pPr>
+            <a:r>
+              <a:rPr sz="3675" b="1">
                 <a:solidFill>
                   <a:srgbClr val="152B3A"/>
                 </a:solidFill>
+                <a:latin typeface="Calibri"/>
+                <a:ea typeface="Calibri"/>
+                <a:cs typeface="Calibri"/>
               </a:rPr>
               <a:t>Check the agreed change</a:t>
             </a:r>
@@ -3342,14 +3786,14 @@
         </p:nvSpPr>
         <p:spPr>
           <a:xfrm xmlns:a="http://schemas.openxmlformats.org/drawingml/2006/main">
-            <a:off x="609600" y="6219825"/>
+            <a:off x="609600" y="6191250"/>
             <a:ext cx="10972800" cy="9525"/>
           </a:xfrm>
           <a:prstGeom xmlns:a="http://schemas.openxmlformats.org/drawingml/2006/main" prst="rect">
             <a:avLst/>
           </a:prstGeom>
           <a:solidFill xmlns:a="http://schemas.openxmlformats.org/drawingml/2006/main">
-            <a:srgbClr val="DCE7DD"/>
+            <a:srgbClr val="CEDBD3"/>
           </a:solidFill>
           <a:ln xmlns:a="http://schemas.openxmlformats.org/drawingml/2006/main" w="0">
             <a:noFill/>
@@ -3373,8 +3817,8 @@
         </p:nvSpPr>
         <p:spPr>
           <a:xfrm xmlns:a="http://schemas.openxmlformats.org/drawingml/2006/main">
-            <a:off x="609600" y="6381750"/>
-            <a:ext cx="9906000" cy="228600"/>
+            <a:off x="609600" y="6419850"/>
+            <a:ext cx="9525000" cy="219075"/>
           </a:xfrm>
           <a:prstGeom xmlns:a="http://schemas.openxmlformats.org/drawingml/2006/main" prst="rect">
             <a:avLst/>
@@ -3386,21 +3830,30 @@
           </a:ln>
         </p:spPr>
         <p:txBody>
-          <a:bodyPr xmlns:a="http://schemas.openxmlformats.org/drawingml/2006/main" lIns="0" tIns="0" rIns="0" bIns="0" anchor="ctr"/>
-          <a:lstStyle xmlns:a="http://schemas.openxmlformats.org/drawingml/2006/main"/>
-          <a:p xmlns:a="http://schemas.openxmlformats.org/drawingml/2006/main">
-            <a:pPr>
-              <a:defRPr sz="1275" b="0">
+          <a:bodyPr xmlns:a="http://schemas.openxmlformats.org/drawingml/2006/main" lIns="0" tIns="0" rIns="0" bIns="0" anchor="ctr">
+            <a:noAutofit/>
+          </a:bodyPr>
+          <a:lstStyle xmlns:a="http://schemas.openxmlformats.org/drawingml/2006/main"/>
+          <a:p xmlns:a="http://schemas.openxmlformats.org/drawingml/2006/main">
+            <a:pPr algn="l">
+              <a:buNone/>
+              <a:defRPr sz="1200" b="0">
                 <a:solidFill>
                   <a:srgbClr val="50616B"/>
                 </a:solidFill>
-              </a:defRPr>
-            </a:pPr>
-            <a:r>
-              <a:rPr sz="1275" b="0">
+                <a:latin typeface="Calibri"/>
+                <a:ea typeface="Calibri"/>
+                <a:cs typeface="Calibri"/>
+              </a:defRPr>
+            </a:pPr>
+            <a:r>
+              <a:rPr sz="1200" b="0">
                 <a:solidFill>
                   <a:srgbClr val="50616B"/>
                 </a:solidFill>
+                <a:latin typeface="Calibri"/>
+                <a:ea typeface="Calibri"/>
+                <a:cs typeface="Calibri"/>
               </a:rPr>
               <a:t>AUTUMN 1  ·  WEEK 7  ·  LESSON B</a:t>
             </a:r>
@@ -3423,8 +3876,8 @@
         </p:nvSpPr>
         <p:spPr>
           <a:xfrm xmlns:a="http://schemas.openxmlformats.org/drawingml/2006/main">
-            <a:off x="11106150" y="6362700"/>
-            <a:ext cx="476250" cy="238125"/>
+            <a:off x="11106150" y="6400800"/>
+            <a:ext cx="476250" cy="247650"/>
           </a:xfrm>
           <a:prstGeom xmlns:a="http://schemas.openxmlformats.org/drawingml/2006/main" prst="rect">
             <a:avLst/>
@@ -3436,14 +3889,20 @@
           </a:ln>
         </p:spPr>
         <p:txBody>
-          <a:bodyPr xmlns:a="http://schemas.openxmlformats.org/drawingml/2006/main" lIns="0" tIns="0" rIns="0" bIns="0" anchor="ctr"/>
-          <a:lstStyle xmlns:a="http://schemas.openxmlformats.org/drawingml/2006/main"/>
-          <a:p xmlns:a="http://schemas.openxmlformats.org/drawingml/2006/main">
-            <a:pPr>
+          <a:bodyPr xmlns:a="http://schemas.openxmlformats.org/drawingml/2006/main" lIns="0" tIns="0" rIns="0" bIns="0" anchor="ctr">
+            <a:noAutofit/>
+          </a:bodyPr>
+          <a:lstStyle xmlns:a="http://schemas.openxmlformats.org/drawingml/2006/main"/>
+          <a:p xmlns:a="http://schemas.openxmlformats.org/drawingml/2006/main">
+            <a:pPr algn="l">
+              <a:buNone/>
               <a:defRPr sz="1350" b="1">
                 <a:solidFill>
                   <a:srgbClr val="28685E"/>
                 </a:solidFill>
+                <a:latin typeface="Calibri"/>
+                <a:ea typeface="Calibri"/>
+                <a:cs typeface="Calibri"/>
               </a:defRPr>
             </a:pPr>
             <a:r>
@@ -3451,6 +3910,9 @@
                 <a:solidFill>
                   <a:srgbClr val="28685E"/>
                 </a:solidFill>
+                <a:latin typeface="Calibri"/>
+                <a:ea typeface="Calibri"/>
+                <a:cs typeface="Calibri"/>
               </a:rPr>
               <a:t>11</a:t>
             </a:r>
@@ -3473,34 +3935,45 @@
         </p:nvSpPr>
         <p:spPr>
           <a:xfrm xmlns:a="http://schemas.openxmlformats.org/drawingml/2006/main">
-            <a:off x="609600" y="2686050"/>
-            <a:ext cx="10858500" cy="1524000"/>
-          </a:xfrm>
-          <a:prstGeom xmlns:a="http://schemas.openxmlformats.org/drawingml/2006/main" prst="rect">
-            <a:avLst/>
-          </a:prstGeom>
-          <a:noFill xmlns:a="http://schemas.openxmlformats.org/drawingml/2006/main"/>
+            <a:off x="457200" y="2190750"/>
+            <a:ext cx="11277600" cy="2143125"/>
+          </a:xfrm>
+          <a:prstGeom xmlns:a="http://schemas.openxmlformats.org/drawingml/2006/main" prst="rect">
+            <a:avLst/>
+          </a:prstGeom>
+          <a:solidFill xmlns:a="http://schemas.openxmlformats.org/drawingml/2006/main">
+            <a:srgbClr val="E7EFE9"/>
+          </a:solidFill>
           <a:ln xmlns:a="http://schemas.openxmlformats.org/drawingml/2006/main" w="0">
             <a:noFill/>
             <a:prstDash val="solid"/>
           </a:ln>
         </p:spPr>
         <p:txBody>
-          <a:bodyPr xmlns:a="http://schemas.openxmlformats.org/drawingml/2006/main" lIns="0" tIns="0" rIns="0" bIns="0" anchor="ctr"/>
-          <a:lstStyle xmlns:a="http://schemas.openxmlformats.org/drawingml/2006/main"/>
-          <a:p xmlns:a="http://schemas.openxmlformats.org/drawingml/2006/main">
-            <a:pPr>
-              <a:defRPr sz="2925" b="1">
-                <a:solidFill>
-                  <a:srgbClr val="28685E"/>
-                </a:solidFill>
-              </a:defRPr>
-            </a:pPr>
-            <a:r>
-              <a:rPr sz="2925" b="1">
-                <a:solidFill>
-                  <a:srgbClr val="28685E"/>
-                </a:solidFill>
+          <a:bodyPr xmlns:a="http://schemas.openxmlformats.org/drawingml/2006/main" lIns="152400" tIns="114300" rIns="152400" bIns="114300" anchor="ctr">
+            <a:noAutofit/>
+          </a:bodyPr>
+          <a:lstStyle xmlns:a="http://schemas.openxmlformats.org/drawingml/2006/main"/>
+          <a:p xmlns:a="http://schemas.openxmlformats.org/drawingml/2006/main">
+            <a:pPr algn="l">
+              <a:buNone/>
+              <a:defRPr sz="3075" b="1">
+                <a:solidFill>
+                  <a:srgbClr val="28685E"/>
+                </a:solidFill>
+                <a:latin typeface="Calibri"/>
+                <a:ea typeface="Calibri"/>
+                <a:cs typeface="Calibri"/>
+              </a:defRPr>
+            </a:pPr>
+            <a:r>
+              <a:rPr sz="3075" b="1">
+                <a:solidFill>
+                  <a:srgbClr val="28685E"/>
+                </a:solidFill>
+                <a:latin typeface="Calibri"/>
+                <a:ea typeface="Calibri"/>
+                <a:cs typeface="Calibri"/>
               </a:rPr>
               <a:t>You asked for_____. We changed_____.</a:t>
             </a:r>
@@ -3523,8 +3996,8 @@
         </p:nvSpPr>
         <p:spPr>
           <a:xfrm xmlns:a="http://schemas.openxmlformats.org/drawingml/2006/main">
-            <a:off x="609600" y="4552950"/>
-            <a:ext cx="10858500" cy="1285875"/>
+            <a:off x="609600" y="4438650"/>
+            <a:ext cx="10972800" cy="1257300"/>
           </a:xfrm>
           <a:prstGeom xmlns:a="http://schemas.openxmlformats.org/drawingml/2006/main" prst="rect">
             <a:avLst/>
@@ -3536,21 +4009,30 @@
           </a:ln>
         </p:spPr>
         <p:txBody>
-          <a:bodyPr xmlns:a="http://schemas.openxmlformats.org/drawingml/2006/main" lIns="0" tIns="0" rIns="0" bIns="0" anchor="ctr"/>
-          <a:lstStyle xmlns:a="http://schemas.openxmlformats.org/drawingml/2006/main"/>
-          <a:p xmlns:a="http://schemas.openxmlformats.org/drawingml/2006/main">
-            <a:pPr>
-              <a:defRPr sz="2700" b="0">
+          <a:bodyPr xmlns:a="http://schemas.openxmlformats.org/drawingml/2006/main" lIns="0" tIns="0" rIns="0" bIns="0" anchor="ctr">
+            <a:noAutofit/>
+          </a:bodyPr>
+          <a:lstStyle xmlns:a="http://schemas.openxmlformats.org/drawingml/2006/main"/>
+          <a:p xmlns:a="http://schemas.openxmlformats.org/drawingml/2006/main">
+            <a:pPr algn="l">
+              <a:buNone/>
+              <a:defRPr sz="2550" b="0">
                 <a:solidFill>
                   <a:srgbClr val="152B3A"/>
                 </a:solidFill>
-              </a:defRPr>
-            </a:pPr>
-            <a:r>
-              <a:rPr sz="2700" b="0">
+                <a:latin typeface="Calibri"/>
+                <a:ea typeface="Calibri"/>
+                <a:cs typeface="Calibri"/>
+              </a:defRPr>
+            </a:pPr>
+            <a:r>
+              <a:rPr sz="2550" b="0">
                 <a:solidFill>
                   <a:srgbClr val="152B3A"/>
                 </a:solidFill>
+                <a:latin typeface="Calibri"/>
+                <a:ea typeface="Calibri"/>
+                <a:cs typeface="Calibri"/>
               </a:rPr>
               <a:t>Did it help? What else needs explaining?</a:t>
             </a:r>
@@ -3573,7 +4055,7 @@
     <p:bg>
       <p:bgPr>
         <a:solidFill xmlns:a="http://schemas.openxmlformats.org/drawingml/2006/main">
-          <a:srgbClr val="F5F1E8"/>
+          <a:srgbClr val="FAF9F5"/>
         </a:solidFill>
       </p:bgPr>
     </p:bg>
@@ -3602,8 +4084,8 @@
         </p:nvSpPr>
         <p:spPr>
           <a:xfrm xmlns:a="http://schemas.openxmlformats.org/drawingml/2006/main">
-            <a:off x="609600" y="552450"/>
-            <a:ext cx="781050" cy="57150"/>
+            <a:off x="609600" y="733425"/>
+            <a:ext cx="781050" cy="38100"/>
           </a:xfrm>
           <a:prstGeom xmlns:a="http://schemas.openxmlformats.org/drawingml/2006/main" prst="rect">
             <a:avLst/>
@@ -3633,8 +4115,8 @@
         </p:nvSpPr>
         <p:spPr>
           <a:xfrm xmlns:a="http://schemas.openxmlformats.org/drawingml/2006/main">
-            <a:off x="609600" y="762000"/>
-            <a:ext cx="8572500" cy="285750"/>
+            <a:off x="609600" y="342900"/>
+            <a:ext cx="9334500" cy="304800"/>
           </a:xfrm>
           <a:prstGeom xmlns:a="http://schemas.openxmlformats.org/drawingml/2006/main" prst="rect">
             <a:avLst/>
@@ -3646,21 +4128,30 @@
           </a:ln>
         </p:spPr>
         <p:txBody>
-          <a:bodyPr xmlns:a="http://schemas.openxmlformats.org/drawingml/2006/main" lIns="0" tIns="0" rIns="0" bIns="0" anchor="ctr"/>
-          <a:lstStyle xmlns:a="http://schemas.openxmlformats.org/drawingml/2006/main"/>
-          <a:p xmlns:a="http://schemas.openxmlformats.org/drawingml/2006/main">
-            <a:pPr>
-              <a:defRPr sz="1500" b="1">
-                <a:solidFill>
-                  <a:srgbClr val="28685E"/>
-                </a:solidFill>
-              </a:defRPr>
-            </a:pPr>
-            <a:r>
-              <a:rPr sz="1500" b="1">
-                <a:solidFill>
-                  <a:srgbClr val="28685E"/>
-                </a:solidFill>
+          <a:bodyPr xmlns:a="http://schemas.openxmlformats.org/drawingml/2006/main" lIns="0" tIns="0" rIns="0" bIns="0" anchor="ctr">
+            <a:noAutofit/>
+          </a:bodyPr>
+          <a:lstStyle xmlns:a="http://schemas.openxmlformats.org/drawingml/2006/main"/>
+          <a:p xmlns:a="http://schemas.openxmlformats.org/drawingml/2006/main">
+            <a:pPr algn="l">
+              <a:buNone/>
+              <a:defRPr sz="1350" b="1">
+                <a:solidFill>
+                  <a:srgbClr val="28685E"/>
+                </a:solidFill>
+                <a:latin typeface="Calibri"/>
+                <a:ea typeface="Calibri"/>
+                <a:cs typeface="Calibri"/>
+              </a:defRPr>
+            </a:pPr>
+            <a:r>
+              <a:rPr sz="1350" b="1">
+                <a:solidFill>
+                  <a:srgbClr val="28685E"/>
+                </a:solidFill>
+                <a:latin typeface="Calibri"/>
+                <a:ea typeface="Calibri"/>
+                <a:cs typeface="Calibri"/>
               </a:rPr>
               <a:t>MADE BY MATT  /  GROW SCIENCE</a:t>
             </a:r>
@@ -3683,8 +4174,8 @@
         </p:nvSpPr>
         <p:spPr>
           <a:xfrm xmlns:a="http://schemas.openxmlformats.org/drawingml/2006/main">
-            <a:off x="609600" y="1352550"/>
-            <a:ext cx="10972800" cy="952500"/>
+            <a:off x="609600" y="990600"/>
+            <a:ext cx="10972800" cy="1000125"/>
           </a:xfrm>
           <a:prstGeom xmlns:a="http://schemas.openxmlformats.org/drawingml/2006/main" prst="rect">
             <a:avLst/>
@@ -3696,21 +4187,30 @@
           </a:ln>
         </p:spPr>
         <p:txBody>
-          <a:bodyPr xmlns:a="http://schemas.openxmlformats.org/drawingml/2006/main" lIns="0" tIns="0" rIns="0" bIns="0" anchor="ctr"/>
-          <a:lstStyle xmlns:a="http://schemas.openxmlformats.org/drawingml/2006/main"/>
-          <a:p xmlns:a="http://schemas.openxmlformats.org/drawingml/2006/main">
-            <a:pPr>
-              <a:defRPr sz="3750" b="1">
+          <a:bodyPr xmlns:a="http://schemas.openxmlformats.org/drawingml/2006/main" lIns="0" tIns="0" rIns="0" bIns="0" anchor="ctr">
+            <a:noAutofit/>
+          </a:bodyPr>
+          <a:lstStyle xmlns:a="http://schemas.openxmlformats.org/drawingml/2006/main"/>
+          <a:p xmlns:a="http://schemas.openxmlformats.org/drawingml/2006/main">
+            <a:pPr algn="l">
+              <a:buNone/>
+              <a:defRPr sz="3675" b="1">
                 <a:solidFill>
                   <a:srgbClr val="152B3A"/>
                 </a:solidFill>
-              </a:defRPr>
-            </a:pPr>
-            <a:r>
-              <a:rPr sz="3750" b="1">
+                <a:latin typeface="Calibri"/>
+                <a:ea typeface="Calibri"/>
+                <a:cs typeface="Calibri"/>
+              </a:defRPr>
+            </a:pPr>
+            <a:r>
+              <a:rPr sz="3675" b="1">
                 <a:solidFill>
                   <a:srgbClr val="152B3A"/>
                 </a:solidFill>
+                <a:latin typeface="Calibri"/>
+                <a:ea typeface="Calibri"/>
+                <a:cs typeface="Calibri"/>
               </a:rPr>
               <a:t>Exit: choose your explanation</a:t>
             </a:r>
@@ -3733,14 +4233,14 @@
         </p:nvSpPr>
         <p:spPr>
           <a:xfrm xmlns:a="http://schemas.openxmlformats.org/drawingml/2006/main">
-            <a:off x="609600" y="6219825"/>
+            <a:off x="609600" y="6191250"/>
             <a:ext cx="10972800" cy="9525"/>
           </a:xfrm>
           <a:prstGeom xmlns:a="http://schemas.openxmlformats.org/drawingml/2006/main" prst="rect">
             <a:avLst/>
           </a:prstGeom>
           <a:solidFill xmlns:a="http://schemas.openxmlformats.org/drawingml/2006/main">
-            <a:srgbClr val="DCE7DD"/>
+            <a:srgbClr val="CEDBD3"/>
           </a:solidFill>
           <a:ln xmlns:a="http://schemas.openxmlformats.org/drawingml/2006/main" w="0">
             <a:noFill/>
@@ -3764,8 +4264,8 @@
         </p:nvSpPr>
         <p:spPr>
           <a:xfrm xmlns:a="http://schemas.openxmlformats.org/drawingml/2006/main">
-            <a:off x="609600" y="6381750"/>
-            <a:ext cx="9906000" cy="228600"/>
+            <a:off x="609600" y="6419850"/>
+            <a:ext cx="9525000" cy="219075"/>
           </a:xfrm>
           <a:prstGeom xmlns:a="http://schemas.openxmlformats.org/drawingml/2006/main" prst="rect">
             <a:avLst/>
@@ -3777,21 +4277,30 @@
           </a:ln>
         </p:spPr>
         <p:txBody>
-          <a:bodyPr xmlns:a="http://schemas.openxmlformats.org/drawingml/2006/main" lIns="0" tIns="0" rIns="0" bIns="0" anchor="ctr"/>
-          <a:lstStyle xmlns:a="http://schemas.openxmlformats.org/drawingml/2006/main"/>
-          <a:p xmlns:a="http://schemas.openxmlformats.org/drawingml/2006/main">
-            <a:pPr>
-              <a:defRPr sz="1275" b="0">
+          <a:bodyPr xmlns:a="http://schemas.openxmlformats.org/drawingml/2006/main" lIns="0" tIns="0" rIns="0" bIns="0" anchor="ctr">
+            <a:noAutofit/>
+          </a:bodyPr>
+          <a:lstStyle xmlns:a="http://schemas.openxmlformats.org/drawingml/2006/main"/>
+          <a:p xmlns:a="http://schemas.openxmlformats.org/drawingml/2006/main">
+            <a:pPr algn="l">
+              <a:buNone/>
+              <a:defRPr sz="1200" b="0">
                 <a:solidFill>
                   <a:srgbClr val="50616B"/>
                 </a:solidFill>
-              </a:defRPr>
-            </a:pPr>
-            <a:r>
-              <a:rPr sz="1275" b="0">
+                <a:latin typeface="Calibri"/>
+                <a:ea typeface="Calibri"/>
+                <a:cs typeface="Calibri"/>
+              </a:defRPr>
+            </a:pPr>
+            <a:r>
+              <a:rPr sz="1200" b="0">
                 <a:solidFill>
                   <a:srgbClr val="50616B"/>
                 </a:solidFill>
+                <a:latin typeface="Calibri"/>
+                <a:ea typeface="Calibri"/>
+                <a:cs typeface="Calibri"/>
               </a:rPr>
               <a:t>AUTUMN 1  ·  WEEK 7  ·  LESSON B</a:t>
             </a:r>
@@ -3814,8 +4323,8 @@
         </p:nvSpPr>
         <p:spPr>
           <a:xfrm xmlns:a="http://schemas.openxmlformats.org/drawingml/2006/main">
-            <a:off x="11106150" y="6362700"/>
-            <a:ext cx="476250" cy="238125"/>
+            <a:off x="11106150" y="6400800"/>
+            <a:ext cx="476250" cy="247650"/>
           </a:xfrm>
           <a:prstGeom xmlns:a="http://schemas.openxmlformats.org/drawingml/2006/main" prst="rect">
             <a:avLst/>
@@ -3827,14 +4336,20 @@
           </a:ln>
         </p:spPr>
         <p:txBody>
-          <a:bodyPr xmlns:a="http://schemas.openxmlformats.org/drawingml/2006/main" lIns="0" tIns="0" rIns="0" bIns="0" anchor="ctr"/>
-          <a:lstStyle xmlns:a="http://schemas.openxmlformats.org/drawingml/2006/main"/>
-          <a:p xmlns:a="http://schemas.openxmlformats.org/drawingml/2006/main">
-            <a:pPr>
+          <a:bodyPr xmlns:a="http://schemas.openxmlformats.org/drawingml/2006/main" lIns="0" tIns="0" rIns="0" bIns="0" anchor="ctr">
+            <a:noAutofit/>
+          </a:bodyPr>
+          <a:lstStyle xmlns:a="http://schemas.openxmlformats.org/drawingml/2006/main"/>
+          <a:p xmlns:a="http://schemas.openxmlformats.org/drawingml/2006/main">
+            <a:pPr algn="l">
+              <a:buNone/>
               <a:defRPr sz="1350" b="1">
                 <a:solidFill>
                   <a:srgbClr val="28685E"/>
                 </a:solidFill>
+                <a:latin typeface="Calibri"/>
+                <a:ea typeface="Calibri"/>
+                <a:cs typeface="Calibri"/>
               </a:defRPr>
             </a:pPr>
             <a:r>
@@ -3842,6 +4357,9 @@
                 <a:solidFill>
                   <a:srgbClr val="28685E"/>
                 </a:solidFill>
+                <a:latin typeface="Calibri"/>
+                <a:ea typeface="Calibri"/>
+                <a:cs typeface="Calibri"/>
               </a:rPr>
               <a:t>12</a:t>
             </a:r>
@@ -3864,8 +4382,8 @@
         </p:nvSpPr>
         <p:spPr>
           <a:xfrm xmlns:a="http://schemas.openxmlformats.org/drawingml/2006/main">
-            <a:off x="609600" y="2619375"/>
-            <a:ext cx="10972800" cy="781050"/>
+            <a:off x="1000125" y="2333625"/>
+            <a:ext cx="10382250" cy="1076325"/>
           </a:xfrm>
           <a:prstGeom xmlns:a="http://schemas.openxmlformats.org/drawingml/2006/main" prst="rect">
             <a:avLst/>
@@ -3877,21 +4395,30 @@
           </a:ln>
         </p:spPr>
         <p:txBody>
-          <a:bodyPr xmlns:a="http://schemas.openxmlformats.org/drawingml/2006/main" lIns="0" tIns="0" rIns="0" bIns="0" anchor="ctr"/>
-          <a:lstStyle xmlns:a="http://schemas.openxmlformats.org/drawingml/2006/main"/>
-          <a:p xmlns:a="http://schemas.openxmlformats.org/drawingml/2006/main">
-            <a:pPr>
-              <a:defRPr sz="2550" b="0">
+          <a:bodyPr xmlns:a="http://schemas.openxmlformats.org/drawingml/2006/main" lIns="0" tIns="0" rIns="0" bIns="0" anchor="ctr">
+            <a:noAutofit/>
+          </a:bodyPr>
+          <a:lstStyle xmlns:a="http://schemas.openxmlformats.org/drawingml/2006/main"/>
+          <a:p xmlns:a="http://schemas.openxmlformats.org/drawingml/2006/main">
+            <a:pPr algn="l">
+              <a:buNone/>
+              <a:defRPr sz="2625" b="0">
                 <a:solidFill>
                   <a:srgbClr val="152B3A"/>
                 </a:solidFill>
-              </a:defRPr>
-            </a:pPr>
-            <a:r>
-              <a:rPr sz="2550" b="0">
+                <a:latin typeface="Calibri"/>
+                <a:ea typeface="Calibri"/>
+                <a:cs typeface="Calibri"/>
+              </a:defRPr>
+            </a:pPr>
+            <a:r>
+              <a:rPr sz="2625" b="0">
                 <a:solidFill>
                   <a:srgbClr val="152B3A"/>
                 </a:solidFill>
+                <a:latin typeface="Calibri"/>
+                <a:ea typeface="Calibri"/>
+                <a:cs typeface="Calibri"/>
               </a:rPr>
               <a:t>Supported: does the Moon make its own visible light?</a:t>
             </a:r>
@@ -3914,8 +4441,8 @@
         </p:nvSpPr>
         <p:spPr>
           <a:xfrm xmlns:a="http://schemas.openxmlformats.org/drawingml/2006/main">
-            <a:off x="609600" y="3476625"/>
-            <a:ext cx="10972800" cy="781050"/>
+            <a:off x="1000125" y="3467100"/>
+            <a:ext cx="10382250" cy="1076325"/>
           </a:xfrm>
           <a:prstGeom xmlns:a="http://schemas.openxmlformats.org/drawingml/2006/main" prst="rect">
             <a:avLst/>
@@ -3927,21 +4454,30 @@
           </a:ln>
         </p:spPr>
         <p:txBody>
-          <a:bodyPr xmlns:a="http://schemas.openxmlformats.org/drawingml/2006/main" lIns="0" tIns="0" rIns="0" bIns="0" anchor="ctr"/>
-          <a:lstStyle xmlns:a="http://schemas.openxmlformats.org/drawingml/2006/main"/>
-          <a:p xmlns:a="http://schemas.openxmlformats.org/drawingml/2006/main">
-            <a:pPr>
-              <a:defRPr sz="2550" b="0">
+          <a:bodyPr xmlns:a="http://schemas.openxmlformats.org/drawingml/2006/main" lIns="0" tIns="0" rIns="0" bIns="0" anchor="ctr">
+            <a:noAutofit/>
+          </a:bodyPr>
+          <a:lstStyle xmlns:a="http://schemas.openxmlformats.org/drawingml/2006/main"/>
+          <a:p xmlns:a="http://schemas.openxmlformats.org/drawingml/2006/main">
+            <a:pPr algn="l">
+              <a:buNone/>
+              <a:defRPr sz="2625" b="0">
                 <a:solidFill>
                   <a:srgbClr val="152B3A"/>
                 </a:solidFill>
-              </a:defRPr>
-            </a:pPr>
-            <a:r>
-              <a:rPr sz="2550" b="0">
+                <a:latin typeface="Calibri"/>
+                <a:ea typeface="Calibri"/>
+                <a:cs typeface="Calibri"/>
+              </a:defRPr>
+            </a:pPr>
+            <a:r>
+              <a:rPr sz="2625" b="0">
                 <a:solidFill>
                   <a:srgbClr val="152B3A"/>
                 </a:solidFill>
+                <a:latin typeface="Calibri"/>
+                <a:ea typeface="Calibri"/>
+                <a:cs typeface="Calibri"/>
               </a:rPr>
               <a:t>Standard: how long is one orbit around Earth?</a:t>
             </a:r>
@@ -3964,8 +4500,8 @@
         </p:nvSpPr>
         <p:spPr>
           <a:xfrm xmlns:a="http://schemas.openxmlformats.org/drawingml/2006/main">
-            <a:off x="609600" y="4333875"/>
-            <a:ext cx="10972800" cy="781050"/>
+            <a:off x="1000125" y="4600575"/>
+            <a:ext cx="10382250" cy="1076325"/>
           </a:xfrm>
           <a:prstGeom xmlns:a="http://schemas.openxmlformats.org/drawingml/2006/main" prst="rect">
             <a:avLst/>
@@ -3977,23 +4513,263 @@
           </a:ln>
         </p:spPr>
         <p:txBody>
-          <a:bodyPr xmlns:a="http://schemas.openxmlformats.org/drawingml/2006/main" lIns="0" tIns="0" rIns="0" bIns="0" anchor="ctr"/>
-          <a:lstStyle xmlns:a="http://schemas.openxmlformats.org/drawingml/2006/main"/>
-          <a:p xmlns:a="http://schemas.openxmlformats.org/drawingml/2006/main">
-            <a:pPr>
-              <a:defRPr sz="2550" b="0">
+          <a:bodyPr xmlns:a="http://schemas.openxmlformats.org/drawingml/2006/main" lIns="0" tIns="0" rIns="0" bIns="0" anchor="ctr">
+            <a:noAutofit/>
+          </a:bodyPr>
+          <a:lstStyle xmlns:a="http://schemas.openxmlformats.org/drawingml/2006/main"/>
+          <a:p xmlns:a="http://schemas.openxmlformats.org/drawingml/2006/main">
+            <a:pPr algn="l">
+              <a:buNone/>
+              <a:defRPr sz="2625" b="0">
                 <a:solidFill>
                   <a:srgbClr val="152B3A"/>
                 </a:solidFill>
-              </a:defRPr>
-            </a:pPr>
-            <a:r>
-              <a:rPr sz="2550" b="0">
+                <a:latin typeface="Calibri"/>
+                <a:ea typeface="Calibri"/>
+                <a:cs typeface="Calibri"/>
+              </a:defRPr>
+            </a:pPr>
+            <a:r>
+              <a:rPr sz="2625" b="0">
                 <a:solidFill>
                   <a:srgbClr val="152B3A"/>
                 </a:solidFill>
+                <a:latin typeface="Calibri"/>
+                <a:ea typeface="Calibri"/>
+                <a:cs typeface="Calibri"/>
               </a:rPr>
               <a:t>Stretch: why are ordinary phases not Earth's shadow?</a:t>
+            </a:r>
+          </a:p>
+        </p:txBody>
+      </p:sp>
+      <p:sp>
+        <p:nvSpPr>
+          <p:cNvPr id="11" name="cue-0">
+            <a:extLst xmlns:a="http://schemas.openxmlformats.org/drawingml/2006/main">
+              <a:ext uri="{FF2B5EF4-FFF2-40B4-BE49-F238E27FC236}">
+                <a16:creationId xmlns:a16="http://schemas.microsoft.com/office/drawing/2014/main" id="{E6294685-922D-49A0-8E9B-B15F067385E5}"/>
+              </a:ext>
+            </a:extLst>
+          </p:cNvPr>
+          <p:cNvSpPr>
+            <a:spLocks xmlns:a="http://schemas.openxmlformats.org/drawingml/2006/main" noGrp="1"/>
+          </p:cNvSpPr>
+          <p:nvPr/>
+        </p:nvSpPr>
+        <p:spPr>
+          <a:xfrm xmlns:a="http://schemas.openxmlformats.org/drawingml/2006/main">
+            <a:off x="609600" y="2362200"/>
+            <a:ext cx="323850" cy="323850"/>
+          </a:xfrm>
+          <a:prstGeom xmlns:a="http://schemas.openxmlformats.org/drawingml/2006/main" prst="rect">
+            <a:avLst/>
+          </a:prstGeom>
+          <a:noFill xmlns:a="http://schemas.openxmlformats.org/drawingml/2006/main"/>
+          <a:ln xmlns:a="http://schemas.openxmlformats.org/drawingml/2006/main" w="0">
+            <a:noFill/>
+          </a:ln>
+        </p:spPr>
+        <p:txBody>
+          <a:bodyPr xmlns:a="http://schemas.openxmlformats.org/drawingml/2006/main" lIns="0" tIns="0" rIns="0" bIns="0" anchor="ctr">
+            <a:noAutofit/>
+          </a:bodyPr>
+          <a:lstStyle xmlns:a="http://schemas.openxmlformats.org/drawingml/2006/main"/>
+          <a:p xmlns:a="http://schemas.openxmlformats.org/drawingml/2006/main">
+            <a:pPr algn="l">
+              <a:defRPr sz="1350" b="1">
+                <a:solidFill>
+                  <a:srgbClr val="28685E"/>
+                </a:solidFill>
+                <a:latin typeface="Calibri"/>
+                <a:ea typeface="Calibri"/>
+                <a:cs typeface="Calibri"/>
+              </a:defRPr>
+            </a:pPr>
+            <a:r>
+              <a:rPr sz="1350" b="1">
+                <a:solidFill>
+                  <a:srgbClr val="28685E"/>
+                </a:solidFill>
+                <a:latin typeface="Calibri"/>
+                <a:ea typeface="Calibri"/>
+                <a:cs typeface="Calibri"/>
+              </a:rPr>
+              <a:t>01</a:t>
+            </a:r>
+          </a:p>
+        </p:txBody>
+      </p:sp>
+      <p:sp>
+        <p:nvSpPr>
+          <p:cNvPr id="12" name="row-rule-0">
+            <a:extLst xmlns:a="http://schemas.openxmlformats.org/drawingml/2006/main">
+              <a:ext uri="{FF2B5EF4-FFF2-40B4-BE49-F238E27FC236}">
+                <a16:creationId xmlns:a16="http://schemas.microsoft.com/office/drawing/2014/main" id="{98AE2B3B-0CCF-4E5C-B77C-7D7EA9C8E177}"/>
+              </a:ext>
+            </a:extLst>
+          </p:cNvPr>
+          <p:cNvSpPr>
+            <a:spLocks xmlns:a="http://schemas.openxmlformats.org/drawingml/2006/main" noGrp="1"/>
+          </p:cNvSpPr>
+          <p:nvPr/>
+        </p:nvSpPr>
+        <p:spPr>
+          <a:xfrm xmlns:a="http://schemas.openxmlformats.org/drawingml/2006/main">
+            <a:off x="1000125" y="3419475"/>
+            <a:ext cx="10334625" cy="0"/>
+          </a:xfrm>
+          <a:prstGeom xmlns:a="http://schemas.openxmlformats.org/drawingml/2006/main" prst="line">
+            <a:avLst/>
+          </a:prstGeom>
+          <a:noFill xmlns:a="http://schemas.openxmlformats.org/drawingml/2006/main"/>
+          <a:ln xmlns:a="http://schemas.openxmlformats.org/drawingml/2006/main" w="9525">
+            <a:solidFill>
+              <a:srgbClr val="CEDBD3"/>
+            </a:solidFill>
+          </a:ln>
+        </p:spPr>
+      </p:sp>
+      <p:sp>
+        <p:nvSpPr>
+          <p:cNvPr id="13" name="cue-1">
+            <a:extLst xmlns:a="http://schemas.openxmlformats.org/drawingml/2006/main">
+              <a:ext uri="{FF2B5EF4-FFF2-40B4-BE49-F238E27FC236}">
+                <a16:creationId xmlns:a16="http://schemas.microsoft.com/office/drawing/2014/main" id="{46888372-8B36-4985-9596-73BDAEC5DCEC}"/>
+              </a:ext>
+            </a:extLst>
+          </p:cNvPr>
+          <p:cNvSpPr>
+            <a:spLocks xmlns:a="http://schemas.openxmlformats.org/drawingml/2006/main" noGrp="1"/>
+          </p:cNvSpPr>
+          <p:nvPr/>
+        </p:nvSpPr>
+        <p:spPr>
+          <a:xfrm xmlns:a="http://schemas.openxmlformats.org/drawingml/2006/main">
+            <a:off x="609600" y="3495675"/>
+            <a:ext cx="323850" cy="323850"/>
+          </a:xfrm>
+          <a:prstGeom xmlns:a="http://schemas.openxmlformats.org/drawingml/2006/main" prst="rect">
+            <a:avLst/>
+          </a:prstGeom>
+          <a:noFill xmlns:a="http://schemas.openxmlformats.org/drawingml/2006/main"/>
+          <a:ln xmlns:a="http://schemas.openxmlformats.org/drawingml/2006/main" w="0">
+            <a:noFill/>
+          </a:ln>
+        </p:spPr>
+        <p:txBody>
+          <a:bodyPr xmlns:a="http://schemas.openxmlformats.org/drawingml/2006/main" lIns="0" tIns="0" rIns="0" bIns="0" anchor="ctr">
+            <a:noAutofit/>
+          </a:bodyPr>
+          <a:lstStyle xmlns:a="http://schemas.openxmlformats.org/drawingml/2006/main"/>
+          <a:p xmlns:a="http://schemas.openxmlformats.org/drawingml/2006/main">
+            <a:pPr algn="l">
+              <a:defRPr sz="1350" b="1">
+                <a:solidFill>
+                  <a:srgbClr val="28685E"/>
+                </a:solidFill>
+                <a:latin typeface="Calibri"/>
+                <a:ea typeface="Calibri"/>
+                <a:cs typeface="Calibri"/>
+              </a:defRPr>
+            </a:pPr>
+            <a:r>
+              <a:rPr sz="1350" b="1">
+                <a:solidFill>
+                  <a:srgbClr val="28685E"/>
+                </a:solidFill>
+                <a:latin typeface="Calibri"/>
+                <a:ea typeface="Calibri"/>
+                <a:cs typeface="Calibri"/>
+              </a:rPr>
+              <a:t>02</a:t>
+            </a:r>
+          </a:p>
+        </p:txBody>
+      </p:sp>
+      <p:sp>
+        <p:nvSpPr>
+          <p:cNvPr id="14" name="row-rule-1">
+            <a:extLst xmlns:a="http://schemas.openxmlformats.org/drawingml/2006/main">
+              <a:ext uri="{FF2B5EF4-FFF2-40B4-BE49-F238E27FC236}">
+                <a16:creationId xmlns:a16="http://schemas.microsoft.com/office/drawing/2014/main" id="{570836E2-A490-4A76-8164-3038AE039B64}"/>
+              </a:ext>
+            </a:extLst>
+          </p:cNvPr>
+          <p:cNvSpPr>
+            <a:spLocks xmlns:a="http://schemas.openxmlformats.org/drawingml/2006/main" noGrp="1"/>
+          </p:cNvSpPr>
+          <p:nvPr/>
+        </p:nvSpPr>
+        <p:spPr>
+          <a:xfrm xmlns:a="http://schemas.openxmlformats.org/drawingml/2006/main">
+            <a:off x="1000125" y="4552950"/>
+            <a:ext cx="10334625" cy="0"/>
+          </a:xfrm>
+          <a:prstGeom xmlns:a="http://schemas.openxmlformats.org/drawingml/2006/main" prst="line">
+            <a:avLst/>
+          </a:prstGeom>
+          <a:noFill xmlns:a="http://schemas.openxmlformats.org/drawingml/2006/main"/>
+          <a:ln xmlns:a="http://schemas.openxmlformats.org/drawingml/2006/main" w="9525">
+            <a:solidFill>
+              <a:srgbClr val="CEDBD3"/>
+            </a:solidFill>
+          </a:ln>
+        </p:spPr>
+      </p:sp>
+      <p:sp>
+        <p:nvSpPr>
+          <p:cNvPr id="15" name="cue-2">
+            <a:extLst xmlns:a="http://schemas.openxmlformats.org/drawingml/2006/main">
+              <a:ext uri="{FF2B5EF4-FFF2-40B4-BE49-F238E27FC236}">
+                <a16:creationId xmlns:a16="http://schemas.microsoft.com/office/drawing/2014/main" id="{8ED72E19-3061-433F-ADC0-B7401C502F3D}"/>
+              </a:ext>
+            </a:extLst>
+          </p:cNvPr>
+          <p:cNvSpPr>
+            <a:spLocks xmlns:a="http://schemas.openxmlformats.org/drawingml/2006/main" noGrp="1"/>
+          </p:cNvSpPr>
+          <p:nvPr/>
+        </p:nvSpPr>
+        <p:spPr>
+          <a:xfrm xmlns:a="http://schemas.openxmlformats.org/drawingml/2006/main">
+            <a:off x="609600" y="4629150"/>
+            <a:ext cx="323850" cy="323850"/>
+          </a:xfrm>
+          <a:prstGeom xmlns:a="http://schemas.openxmlformats.org/drawingml/2006/main" prst="rect">
+            <a:avLst/>
+          </a:prstGeom>
+          <a:noFill xmlns:a="http://schemas.openxmlformats.org/drawingml/2006/main"/>
+          <a:ln xmlns:a="http://schemas.openxmlformats.org/drawingml/2006/main" w="0">
+            <a:noFill/>
+          </a:ln>
+        </p:spPr>
+        <p:txBody>
+          <a:bodyPr xmlns:a="http://schemas.openxmlformats.org/drawingml/2006/main" lIns="0" tIns="0" rIns="0" bIns="0" anchor="ctr">
+            <a:noAutofit/>
+          </a:bodyPr>
+          <a:lstStyle xmlns:a="http://schemas.openxmlformats.org/drawingml/2006/main"/>
+          <a:p xmlns:a="http://schemas.openxmlformats.org/drawingml/2006/main">
+            <a:pPr algn="l">
+              <a:defRPr sz="1350" b="1">
+                <a:solidFill>
+                  <a:srgbClr val="28685E"/>
+                </a:solidFill>
+                <a:latin typeface="Calibri"/>
+                <a:ea typeface="Calibri"/>
+                <a:cs typeface="Calibri"/>
+              </a:defRPr>
+            </a:pPr>
+            <a:r>
+              <a:rPr sz="1350" b="1">
+                <a:solidFill>
+                  <a:srgbClr val="28685E"/>
+                </a:solidFill>
+                <a:latin typeface="Calibri"/>
+                <a:ea typeface="Calibri"/>
+                <a:cs typeface="Calibri"/>
+              </a:rPr>
+              <a:t>03</a:t>
             </a:r>
           </a:p>
         </p:txBody>
@@ -4014,7 +4790,7 @@
     <p:bg>
       <p:bgPr>
         <a:solidFill xmlns:a="http://schemas.openxmlformats.org/drawingml/2006/main">
-          <a:srgbClr val="F5F1E8"/>
+          <a:srgbClr val="FAF9F5"/>
         </a:solidFill>
       </p:bgPr>
     </p:bg>
@@ -4043,8 +4819,8 @@
         </p:nvSpPr>
         <p:spPr>
           <a:xfrm xmlns:a="http://schemas.openxmlformats.org/drawingml/2006/main">
-            <a:off x="609600" y="552450"/>
-            <a:ext cx="781050" cy="57150"/>
+            <a:off x="609600" y="733425"/>
+            <a:ext cx="781050" cy="38100"/>
           </a:xfrm>
           <a:prstGeom xmlns:a="http://schemas.openxmlformats.org/drawingml/2006/main" prst="rect">
             <a:avLst/>
@@ -4074,8 +4850,8 @@
         </p:nvSpPr>
         <p:spPr>
           <a:xfrm xmlns:a="http://schemas.openxmlformats.org/drawingml/2006/main">
-            <a:off x="609600" y="762000"/>
-            <a:ext cx="8572500" cy="285750"/>
+            <a:off x="609600" y="342900"/>
+            <a:ext cx="9334500" cy="304800"/>
           </a:xfrm>
           <a:prstGeom xmlns:a="http://schemas.openxmlformats.org/drawingml/2006/main" prst="rect">
             <a:avLst/>
@@ -4087,21 +4863,30 @@
           </a:ln>
         </p:spPr>
         <p:txBody>
-          <a:bodyPr xmlns:a="http://schemas.openxmlformats.org/drawingml/2006/main" lIns="0" tIns="0" rIns="0" bIns="0" anchor="ctr"/>
-          <a:lstStyle xmlns:a="http://schemas.openxmlformats.org/drawingml/2006/main"/>
-          <a:p xmlns:a="http://schemas.openxmlformats.org/drawingml/2006/main">
-            <a:pPr>
-              <a:defRPr sz="1500" b="1">
-                <a:solidFill>
-                  <a:srgbClr val="28685E"/>
-                </a:solidFill>
-              </a:defRPr>
-            </a:pPr>
-            <a:r>
-              <a:rPr sz="1500" b="1">
-                <a:solidFill>
-                  <a:srgbClr val="28685E"/>
-                </a:solidFill>
+          <a:bodyPr xmlns:a="http://schemas.openxmlformats.org/drawingml/2006/main" lIns="0" tIns="0" rIns="0" bIns="0" anchor="ctr">
+            <a:noAutofit/>
+          </a:bodyPr>
+          <a:lstStyle xmlns:a="http://schemas.openxmlformats.org/drawingml/2006/main"/>
+          <a:p xmlns:a="http://schemas.openxmlformats.org/drawingml/2006/main">
+            <a:pPr algn="l">
+              <a:buNone/>
+              <a:defRPr sz="1350" b="1">
+                <a:solidFill>
+                  <a:srgbClr val="28685E"/>
+                </a:solidFill>
+                <a:latin typeface="Calibri"/>
+                <a:ea typeface="Calibri"/>
+                <a:cs typeface="Calibri"/>
+              </a:defRPr>
+            </a:pPr>
+            <a:r>
+              <a:rPr sz="1350" b="1">
+                <a:solidFill>
+                  <a:srgbClr val="28685E"/>
+                </a:solidFill>
+                <a:latin typeface="Calibri"/>
+                <a:ea typeface="Calibri"/>
+                <a:cs typeface="Calibri"/>
               </a:rPr>
               <a:t>MADE BY MATT  /  GROW SCIENCE</a:t>
             </a:r>
@@ -4124,8 +4909,8 @@
         </p:nvSpPr>
         <p:spPr>
           <a:xfrm xmlns:a="http://schemas.openxmlformats.org/drawingml/2006/main">
-            <a:off x="609600" y="1352550"/>
-            <a:ext cx="10972800" cy="952500"/>
+            <a:off x="609600" y="990600"/>
+            <a:ext cx="10972800" cy="1000125"/>
           </a:xfrm>
           <a:prstGeom xmlns:a="http://schemas.openxmlformats.org/drawingml/2006/main" prst="rect">
             <a:avLst/>
@@ -4137,21 +4922,30 @@
           </a:ln>
         </p:spPr>
         <p:txBody>
-          <a:bodyPr xmlns:a="http://schemas.openxmlformats.org/drawingml/2006/main" lIns="0" tIns="0" rIns="0" bIns="0" anchor="ctr"/>
-          <a:lstStyle xmlns:a="http://schemas.openxmlformats.org/drawingml/2006/main"/>
-          <a:p xmlns:a="http://schemas.openxmlformats.org/drawingml/2006/main">
-            <a:pPr>
-              <a:defRPr sz="3750" b="1">
+          <a:bodyPr xmlns:a="http://schemas.openxmlformats.org/drawingml/2006/main" lIns="0" tIns="0" rIns="0" bIns="0" anchor="ctr">
+            <a:noAutofit/>
+          </a:bodyPr>
+          <a:lstStyle xmlns:a="http://schemas.openxmlformats.org/drawingml/2006/main"/>
+          <a:p xmlns:a="http://schemas.openxmlformats.org/drawingml/2006/main">
+            <a:pPr algn="l">
+              <a:buNone/>
+              <a:defRPr sz="3675" b="1">
                 <a:solidFill>
                   <a:srgbClr val="152B3A"/>
                 </a:solidFill>
-              </a:defRPr>
-            </a:pPr>
-            <a:r>
-              <a:rPr sz="3750" b="1">
+                <a:latin typeface="Calibri"/>
+                <a:ea typeface="Calibri"/>
+                <a:cs typeface="Calibri"/>
+              </a:defRPr>
+            </a:pPr>
+            <a:r>
+              <a:rPr sz="3675" b="1">
                 <a:solidFill>
                   <a:srgbClr val="152B3A"/>
                 </a:solidFill>
+                <a:latin typeface="Calibri"/>
+                <a:ea typeface="Calibri"/>
+                <a:cs typeface="Calibri"/>
               </a:rPr>
               <a:t>Check and keep one improvement</a:t>
             </a:r>
@@ -4174,14 +4968,14 @@
         </p:nvSpPr>
         <p:spPr>
           <a:xfrm xmlns:a="http://schemas.openxmlformats.org/drawingml/2006/main">
-            <a:off x="609600" y="6219825"/>
+            <a:off x="609600" y="6191250"/>
             <a:ext cx="10972800" cy="9525"/>
           </a:xfrm>
           <a:prstGeom xmlns:a="http://schemas.openxmlformats.org/drawingml/2006/main" prst="rect">
             <a:avLst/>
           </a:prstGeom>
           <a:solidFill xmlns:a="http://schemas.openxmlformats.org/drawingml/2006/main">
-            <a:srgbClr val="DCE7DD"/>
+            <a:srgbClr val="CEDBD3"/>
           </a:solidFill>
           <a:ln xmlns:a="http://schemas.openxmlformats.org/drawingml/2006/main" w="0">
             <a:noFill/>
@@ -4205,8 +4999,8 @@
         </p:nvSpPr>
         <p:spPr>
           <a:xfrm xmlns:a="http://schemas.openxmlformats.org/drawingml/2006/main">
-            <a:off x="609600" y="6381750"/>
-            <a:ext cx="9906000" cy="228600"/>
+            <a:off x="609600" y="6419850"/>
+            <a:ext cx="9525000" cy="219075"/>
           </a:xfrm>
           <a:prstGeom xmlns:a="http://schemas.openxmlformats.org/drawingml/2006/main" prst="rect">
             <a:avLst/>
@@ -4218,21 +5012,30 @@
           </a:ln>
         </p:spPr>
         <p:txBody>
-          <a:bodyPr xmlns:a="http://schemas.openxmlformats.org/drawingml/2006/main" lIns="0" tIns="0" rIns="0" bIns="0" anchor="ctr"/>
-          <a:lstStyle xmlns:a="http://schemas.openxmlformats.org/drawingml/2006/main"/>
-          <a:p xmlns:a="http://schemas.openxmlformats.org/drawingml/2006/main">
-            <a:pPr>
-              <a:defRPr sz="1275" b="0">
+          <a:bodyPr xmlns:a="http://schemas.openxmlformats.org/drawingml/2006/main" lIns="0" tIns="0" rIns="0" bIns="0" anchor="ctr">
+            <a:noAutofit/>
+          </a:bodyPr>
+          <a:lstStyle xmlns:a="http://schemas.openxmlformats.org/drawingml/2006/main"/>
+          <a:p xmlns:a="http://schemas.openxmlformats.org/drawingml/2006/main">
+            <a:pPr algn="l">
+              <a:buNone/>
+              <a:defRPr sz="1200" b="0">
                 <a:solidFill>
                   <a:srgbClr val="50616B"/>
                 </a:solidFill>
-              </a:defRPr>
-            </a:pPr>
-            <a:r>
-              <a:rPr sz="1275" b="0">
+                <a:latin typeface="Calibri"/>
+                <a:ea typeface="Calibri"/>
+                <a:cs typeface="Calibri"/>
+              </a:defRPr>
+            </a:pPr>
+            <a:r>
+              <a:rPr sz="1200" b="0">
                 <a:solidFill>
                   <a:srgbClr val="50616B"/>
                 </a:solidFill>
+                <a:latin typeface="Calibri"/>
+                <a:ea typeface="Calibri"/>
+                <a:cs typeface="Calibri"/>
               </a:rPr>
               <a:t>AUTUMN 1  ·  WEEK 7  ·  LESSON B</a:t>
             </a:r>
@@ -4255,8 +5058,8 @@
         </p:nvSpPr>
         <p:spPr>
           <a:xfrm xmlns:a="http://schemas.openxmlformats.org/drawingml/2006/main">
-            <a:off x="11106150" y="6362700"/>
-            <a:ext cx="476250" cy="238125"/>
+            <a:off x="11106150" y="6400800"/>
+            <a:ext cx="476250" cy="247650"/>
           </a:xfrm>
           <a:prstGeom xmlns:a="http://schemas.openxmlformats.org/drawingml/2006/main" prst="rect">
             <a:avLst/>
@@ -4268,14 +5071,20 @@
           </a:ln>
         </p:spPr>
         <p:txBody>
-          <a:bodyPr xmlns:a="http://schemas.openxmlformats.org/drawingml/2006/main" lIns="0" tIns="0" rIns="0" bIns="0" anchor="ctr"/>
-          <a:lstStyle xmlns:a="http://schemas.openxmlformats.org/drawingml/2006/main"/>
-          <a:p xmlns:a="http://schemas.openxmlformats.org/drawingml/2006/main">
-            <a:pPr>
+          <a:bodyPr xmlns:a="http://schemas.openxmlformats.org/drawingml/2006/main" lIns="0" tIns="0" rIns="0" bIns="0" anchor="ctr">
+            <a:noAutofit/>
+          </a:bodyPr>
+          <a:lstStyle xmlns:a="http://schemas.openxmlformats.org/drawingml/2006/main"/>
+          <a:p xmlns:a="http://schemas.openxmlformats.org/drawingml/2006/main">
+            <a:pPr algn="l">
+              <a:buNone/>
               <a:defRPr sz="1350" b="1">
                 <a:solidFill>
                   <a:srgbClr val="28685E"/>
                 </a:solidFill>
+                <a:latin typeface="Calibri"/>
+                <a:ea typeface="Calibri"/>
+                <a:cs typeface="Calibri"/>
               </a:defRPr>
             </a:pPr>
             <a:r>
@@ -4283,6 +5092,9 @@
                 <a:solidFill>
                   <a:srgbClr val="28685E"/>
                 </a:solidFill>
+                <a:latin typeface="Calibri"/>
+                <a:ea typeface="Calibri"/>
+                <a:cs typeface="Calibri"/>
               </a:rPr>
               <a:t>13</a:t>
             </a:r>
@@ -4305,8 +5117,8 @@
         </p:nvSpPr>
         <p:spPr>
           <a:xfrm xmlns:a="http://schemas.openxmlformats.org/drawingml/2006/main">
-            <a:off x="609600" y="2619375"/>
-            <a:ext cx="10972800" cy="781050"/>
+            <a:off x="1000125" y="2333625"/>
+            <a:ext cx="10382250" cy="1076325"/>
           </a:xfrm>
           <a:prstGeom xmlns:a="http://schemas.openxmlformats.org/drawingml/2006/main" prst="rect">
             <a:avLst/>
@@ -4318,21 +5130,30 @@
           </a:ln>
         </p:spPr>
         <p:txBody>
-          <a:bodyPr xmlns:a="http://schemas.openxmlformats.org/drawingml/2006/main" lIns="0" tIns="0" rIns="0" bIns="0" anchor="ctr"/>
-          <a:lstStyle xmlns:a="http://schemas.openxmlformats.org/drawingml/2006/main"/>
-          <a:p xmlns:a="http://schemas.openxmlformats.org/drawingml/2006/main">
-            <a:pPr>
-              <a:defRPr sz="2550" b="0">
+          <a:bodyPr xmlns:a="http://schemas.openxmlformats.org/drawingml/2006/main" lIns="0" tIns="0" rIns="0" bIns="0" anchor="ctr">
+            <a:noAutofit/>
+          </a:bodyPr>
+          <a:lstStyle xmlns:a="http://schemas.openxmlformats.org/drawingml/2006/main"/>
+          <a:p xmlns:a="http://schemas.openxmlformats.org/drawingml/2006/main">
+            <a:pPr algn="l">
+              <a:buNone/>
+              <a:defRPr sz="2625" b="0">
                 <a:solidFill>
                   <a:srgbClr val="152B3A"/>
                 </a:solidFill>
-              </a:defRPr>
-            </a:pPr>
-            <a:r>
-              <a:rPr sz="2550" b="0">
+                <a:latin typeface="Calibri"/>
+                <a:ea typeface="Calibri"/>
+                <a:cs typeface="Calibri"/>
+              </a:defRPr>
+            </a:pPr>
+            <a:r>
+              <a:rPr sz="2625" b="0">
                 <a:solidFill>
                   <a:srgbClr val="152B3A"/>
                 </a:solidFill>
+                <a:latin typeface="Calibri"/>
+                <a:ea typeface="Calibri"/>
+                <a:cs typeface="Calibri"/>
               </a:rPr>
               <a:t>Moonlight is reflected sunlight.</a:t>
             </a:r>
@@ -4355,8 +5176,8 @@
         </p:nvSpPr>
         <p:spPr>
           <a:xfrm xmlns:a="http://schemas.openxmlformats.org/drawingml/2006/main">
-            <a:off x="609600" y="3476625"/>
-            <a:ext cx="10972800" cy="781050"/>
+            <a:off x="1000125" y="3467100"/>
+            <a:ext cx="10382250" cy="1076325"/>
           </a:xfrm>
           <a:prstGeom xmlns:a="http://schemas.openxmlformats.org/drawingml/2006/main" prst="rect">
             <a:avLst/>
@@ -4368,21 +5189,30 @@
           </a:ln>
         </p:spPr>
         <p:txBody>
-          <a:bodyPr xmlns:a="http://schemas.openxmlformats.org/drawingml/2006/main" lIns="0" tIns="0" rIns="0" bIns="0" anchor="ctr"/>
-          <a:lstStyle xmlns:a="http://schemas.openxmlformats.org/drawingml/2006/main"/>
-          <a:p xmlns:a="http://schemas.openxmlformats.org/drawingml/2006/main">
-            <a:pPr>
-              <a:defRPr sz="2550" b="0">
+          <a:bodyPr xmlns:a="http://schemas.openxmlformats.org/drawingml/2006/main" lIns="0" tIns="0" rIns="0" bIns="0" anchor="ctr">
+            <a:noAutofit/>
+          </a:bodyPr>
+          <a:lstStyle xmlns:a="http://schemas.openxmlformats.org/drawingml/2006/main"/>
+          <a:p xmlns:a="http://schemas.openxmlformats.org/drawingml/2006/main">
+            <a:pPr algn="l">
+              <a:buNone/>
+              <a:defRPr sz="2625" b="0">
                 <a:solidFill>
                   <a:srgbClr val="152B3A"/>
                 </a:solidFill>
-              </a:defRPr>
-            </a:pPr>
-            <a:r>
-              <a:rPr sz="2550" b="0">
+                <a:latin typeface="Calibri"/>
+                <a:ea typeface="Calibri"/>
+                <a:cs typeface="Calibri"/>
+              </a:defRPr>
+            </a:pPr>
+            <a:r>
+              <a:rPr sz="2625" b="0">
                 <a:solidFill>
                   <a:srgbClr val="152B3A"/>
                 </a:solidFill>
+                <a:latin typeface="Calibri"/>
+                <a:ea typeface="Calibri"/>
+                <a:cs typeface="Calibri"/>
               </a:rPr>
               <a:t>One orbit is about 27.3 days; phase cycle about 29.5 days.</a:t>
             </a:r>
@@ -4405,8 +5235,8 @@
         </p:nvSpPr>
         <p:spPr>
           <a:xfrm xmlns:a="http://schemas.openxmlformats.org/drawingml/2006/main">
-            <a:off x="609600" y="4333875"/>
-            <a:ext cx="10972800" cy="781050"/>
+            <a:off x="1000125" y="4600575"/>
+            <a:ext cx="10382250" cy="1076325"/>
           </a:xfrm>
           <a:prstGeom xmlns:a="http://schemas.openxmlformats.org/drawingml/2006/main" prst="rect">
             <a:avLst/>
@@ -4418,23 +5248,263 @@
           </a:ln>
         </p:spPr>
         <p:txBody>
-          <a:bodyPr xmlns:a="http://schemas.openxmlformats.org/drawingml/2006/main" lIns="0" tIns="0" rIns="0" bIns="0" anchor="ctr"/>
-          <a:lstStyle xmlns:a="http://schemas.openxmlformats.org/drawingml/2006/main"/>
-          <a:p xmlns:a="http://schemas.openxmlformats.org/drawingml/2006/main">
-            <a:pPr>
-              <a:defRPr sz="2550" b="0">
+          <a:bodyPr xmlns:a="http://schemas.openxmlformats.org/drawingml/2006/main" lIns="0" tIns="0" rIns="0" bIns="0" anchor="ctr">
+            <a:noAutofit/>
+          </a:bodyPr>
+          <a:lstStyle xmlns:a="http://schemas.openxmlformats.org/drawingml/2006/main"/>
+          <a:p xmlns:a="http://schemas.openxmlformats.org/drawingml/2006/main">
+            <a:pPr algn="l">
+              <a:buNone/>
+              <a:defRPr sz="2625" b="0">
                 <a:solidFill>
                   <a:srgbClr val="152B3A"/>
                 </a:solidFill>
-              </a:defRPr>
-            </a:pPr>
-            <a:r>
-              <a:rPr sz="2550" b="0">
+                <a:latin typeface="Calibri"/>
+                <a:ea typeface="Calibri"/>
+                <a:cs typeface="Calibri"/>
+              </a:defRPr>
+            </a:pPr>
+            <a:r>
+              <a:rPr sz="2625" b="0">
                 <a:solidFill>
                   <a:srgbClr val="152B3A"/>
                 </a:solidFill>
+                <a:latin typeface="Calibri"/>
+                <a:ea typeface="Calibri"/>
+                <a:cs typeface="Calibri"/>
               </a:rPr>
               <a:t>Ordinary phases come from our view of the sunlit half.</a:t>
+            </a:r>
+          </a:p>
+        </p:txBody>
+      </p:sp>
+      <p:sp>
+        <p:nvSpPr>
+          <p:cNvPr id="11" name="cue-0">
+            <a:extLst xmlns:a="http://schemas.openxmlformats.org/drawingml/2006/main">
+              <a:ext uri="{FF2B5EF4-FFF2-40B4-BE49-F238E27FC236}">
+                <a16:creationId xmlns:a16="http://schemas.microsoft.com/office/drawing/2014/main" id="{0AA6FF95-D4E8-4655-9099-F1F7CA230360}"/>
+              </a:ext>
+            </a:extLst>
+          </p:cNvPr>
+          <p:cNvSpPr>
+            <a:spLocks xmlns:a="http://schemas.openxmlformats.org/drawingml/2006/main" noGrp="1"/>
+          </p:cNvSpPr>
+          <p:nvPr/>
+        </p:nvSpPr>
+        <p:spPr>
+          <a:xfrm xmlns:a="http://schemas.openxmlformats.org/drawingml/2006/main">
+            <a:off x="609600" y="2362200"/>
+            <a:ext cx="323850" cy="323850"/>
+          </a:xfrm>
+          <a:prstGeom xmlns:a="http://schemas.openxmlformats.org/drawingml/2006/main" prst="rect">
+            <a:avLst/>
+          </a:prstGeom>
+          <a:noFill xmlns:a="http://schemas.openxmlformats.org/drawingml/2006/main"/>
+          <a:ln xmlns:a="http://schemas.openxmlformats.org/drawingml/2006/main" w="0">
+            <a:noFill/>
+          </a:ln>
+        </p:spPr>
+        <p:txBody>
+          <a:bodyPr xmlns:a="http://schemas.openxmlformats.org/drawingml/2006/main" lIns="0" tIns="0" rIns="0" bIns="0" anchor="ctr">
+            <a:noAutofit/>
+          </a:bodyPr>
+          <a:lstStyle xmlns:a="http://schemas.openxmlformats.org/drawingml/2006/main"/>
+          <a:p xmlns:a="http://schemas.openxmlformats.org/drawingml/2006/main">
+            <a:pPr algn="l">
+              <a:defRPr sz="1350" b="1">
+                <a:solidFill>
+                  <a:srgbClr val="28685E"/>
+                </a:solidFill>
+                <a:latin typeface="Calibri"/>
+                <a:ea typeface="Calibri"/>
+                <a:cs typeface="Calibri"/>
+              </a:defRPr>
+            </a:pPr>
+            <a:r>
+              <a:rPr sz="1350" b="1">
+                <a:solidFill>
+                  <a:srgbClr val="28685E"/>
+                </a:solidFill>
+                <a:latin typeface="Calibri"/>
+                <a:ea typeface="Calibri"/>
+                <a:cs typeface="Calibri"/>
+              </a:rPr>
+              <a:t>01</a:t>
+            </a:r>
+          </a:p>
+        </p:txBody>
+      </p:sp>
+      <p:sp>
+        <p:nvSpPr>
+          <p:cNvPr id="12" name="row-rule-0">
+            <a:extLst xmlns:a="http://schemas.openxmlformats.org/drawingml/2006/main">
+              <a:ext uri="{FF2B5EF4-FFF2-40B4-BE49-F238E27FC236}">
+                <a16:creationId xmlns:a16="http://schemas.microsoft.com/office/drawing/2014/main" id="{A1F2CFFF-7278-4677-9E4E-9EFFD7CCE5C6}"/>
+              </a:ext>
+            </a:extLst>
+          </p:cNvPr>
+          <p:cNvSpPr>
+            <a:spLocks xmlns:a="http://schemas.openxmlformats.org/drawingml/2006/main" noGrp="1"/>
+          </p:cNvSpPr>
+          <p:nvPr/>
+        </p:nvSpPr>
+        <p:spPr>
+          <a:xfrm xmlns:a="http://schemas.openxmlformats.org/drawingml/2006/main">
+            <a:off x="1000125" y="3419475"/>
+            <a:ext cx="10334625" cy="0"/>
+          </a:xfrm>
+          <a:prstGeom xmlns:a="http://schemas.openxmlformats.org/drawingml/2006/main" prst="line">
+            <a:avLst/>
+          </a:prstGeom>
+          <a:noFill xmlns:a="http://schemas.openxmlformats.org/drawingml/2006/main"/>
+          <a:ln xmlns:a="http://schemas.openxmlformats.org/drawingml/2006/main" w="9525">
+            <a:solidFill>
+              <a:srgbClr val="CEDBD3"/>
+            </a:solidFill>
+          </a:ln>
+        </p:spPr>
+      </p:sp>
+      <p:sp>
+        <p:nvSpPr>
+          <p:cNvPr id="13" name="cue-1">
+            <a:extLst xmlns:a="http://schemas.openxmlformats.org/drawingml/2006/main">
+              <a:ext uri="{FF2B5EF4-FFF2-40B4-BE49-F238E27FC236}">
+                <a16:creationId xmlns:a16="http://schemas.microsoft.com/office/drawing/2014/main" id="{EBCD6A43-A265-4C7B-86B3-E72C7EA21D23}"/>
+              </a:ext>
+            </a:extLst>
+          </p:cNvPr>
+          <p:cNvSpPr>
+            <a:spLocks xmlns:a="http://schemas.openxmlformats.org/drawingml/2006/main" noGrp="1"/>
+          </p:cNvSpPr>
+          <p:nvPr/>
+        </p:nvSpPr>
+        <p:spPr>
+          <a:xfrm xmlns:a="http://schemas.openxmlformats.org/drawingml/2006/main">
+            <a:off x="609600" y="3495675"/>
+            <a:ext cx="323850" cy="323850"/>
+          </a:xfrm>
+          <a:prstGeom xmlns:a="http://schemas.openxmlformats.org/drawingml/2006/main" prst="rect">
+            <a:avLst/>
+          </a:prstGeom>
+          <a:noFill xmlns:a="http://schemas.openxmlformats.org/drawingml/2006/main"/>
+          <a:ln xmlns:a="http://schemas.openxmlformats.org/drawingml/2006/main" w="0">
+            <a:noFill/>
+          </a:ln>
+        </p:spPr>
+        <p:txBody>
+          <a:bodyPr xmlns:a="http://schemas.openxmlformats.org/drawingml/2006/main" lIns="0" tIns="0" rIns="0" bIns="0" anchor="ctr">
+            <a:noAutofit/>
+          </a:bodyPr>
+          <a:lstStyle xmlns:a="http://schemas.openxmlformats.org/drawingml/2006/main"/>
+          <a:p xmlns:a="http://schemas.openxmlformats.org/drawingml/2006/main">
+            <a:pPr algn="l">
+              <a:defRPr sz="1350" b="1">
+                <a:solidFill>
+                  <a:srgbClr val="28685E"/>
+                </a:solidFill>
+                <a:latin typeface="Calibri"/>
+                <a:ea typeface="Calibri"/>
+                <a:cs typeface="Calibri"/>
+              </a:defRPr>
+            </a:pPr>
+            <a:r>
+              <a:rPr sz="1350" b="1">
+                <a:solidFill>
+                  <a:srgbClr val="28685E"/>
+                </a:solidFill>
+                <a:latin typeface="Calibri"/>
+                <a:ea typeface="Calibri"/>
+                <a:cs typeface="Calibri"/>
+              </a:rPr>
+              <a:t>02</a:t>
+            </a:r>
+          </a:p>
+        </p:txBody>
+      </p:sp>
+      <p:sp>
+        <p:nvSpPr>
+          <p:cNvPr id="14" name="row-rule-1">
+            <a:extLst xmlns:a="http://schemas.openxmlformats.org/drawingml/2006/main">
+              <a:ext uri="{FF2B5EF4-FFF2-40B4-BE49-F238E27FC236}">
+                <a16:creationId xmlns:a16="http://schemas.microsoft.com/office/drawing/2014/main" id="{08146CBF-2CD6-477F-B237-E03B8DAA824E}"/>
+              </a:ext>
+            </a:extLst>
+          </p:cNvPr>
+          <p:cNvSpPr>
+            <a:spLocks xmlns:a="http://schemas.openxmlformats.org/drawingml/2006/main" noGrp="1"/>
+          </p:cNvSpPr>
+          <p:nvPr/>
+        </p:nvSpPr>
+        <p:spPr>
+          <a:xfrm xmlns:a="http://schemas.openxmlformats.org/drawingml/2006/main">
+            <a:off x="1000125" y="4552950"/>
+            <a:ext cx="10334625" cy="0"/>
+          </a:xfrm>
+          <a:prstGeom xmlns:a="http://schemas.openxmlformats.org/drawingml/2006/main" prst="line">
+            <a:avLst/>
+          </a:prstGeom>
+          <a:noFill xmlns:a="http://schemas.openxmlformats.org/drawingml/2006/main"/>
+          <a:ln xmlns:a="http://schemas.openxmlformats.org/drawingml/2006/main" w="9525">
+            <a:solidFill>
+              <a:srgbClr val="CEDBD3"/>
+            </a:solidFill>
+          </a:ln>
+        </p:spPr>
+      </p:sp>
+      <p:sp>
+        <p:nvSpPr>
+          <p:cNvPr id="15" name="cue-2">
+            <a:extLst xmlns:a="http://schemas.openxmlformats.org/drawingml/2006/main">
+              <a:ext uri="{FF2B5EF4-FFF2-40B4-BE49-F238E27FC236}">
+                <a16:creationId xmlns:a16="http://schemas.microsoft.com/office/drawing/2014/main" id="{4B71B4DC-29A2-4823-B552-6B5F5DB3368B}"/>
+              </a:ext>
+            </a:extLst>
+          </p:cNvPr>
+          <p:cNvSpPr>
+            <a:spLocks xmlns:a="http://schemas.openxmlformats.org/drawingml/2006/main" noGrp="1"/>
+          </p:cNvSpPr>
+          <p:nvPr/>
+        </p:nvSpPr>
+        <p:spPr>
+          <a:xfrm xmlns:a="http://schemas.openxmlformats.org/drawingml/2006/main">
+            <a:off x="609600" y="4629150"/>
+            <a:ext cx="323850" cy="323850"/>
+          </a:xfrm>
+          <a:prstGeom xmlns:a="http://schemas.openxmlformats.org/drawingml/2006/main" prst="rect">
+            <a:avLst/>
+          </a:prstGeom>
+          <a:noFill xmlns:a="http://schemas.openxmlformats.org/drawingml/2006/main"/>
+          <a:ln xmlns:a="http://schemas.openxmlformats.org/drawingml/2006/main" w="0">
+            <a:noFill/>
+          </a:ln>
+        </p:spPr>
+        <p:txBody>
+          <a:bodyPr xmlns:a="http://schemas.openxmlformats.org/drawingml/2006/main" lIns="0" tIns="0" rIns="0" bIns="0" anchor="ctr">
+            <a:noAutofit/>
+          </a:bodyPr>
+          <a:lstStyle xmlns:a="http://schemas.openxmlformats.org/drawingml/2006/main"/>
+          <a:p xmlns:a="http://schemas.openxmlformats.org/drawingml/2006/main">
+            <a:pPr algn="l">
+              <a:defRPr sz="1350" b="1">
+                <a:solidFill>
+                  <a:srgbClr val="28685E"/>
+                </a:solidFill>
+                <a:latin typeface="Calibri"/>
+                <a:ea typeface="Calibri"/>
+                <a:cs typeface="Calibri"/>
+              </a:defRPr>
+            </a:pPr>
+            <a:r>
+              <a:rPr sz="1350" b="1">
+                <a:solidFill>
+                  <a:srgbClr val="28685E"/>
+                </a:solidFill>
+                <a:latin typeface="Calibri"/>
+                <a:ea typeface="Calibri"/>
+                <a:cs typeface="Calibri"/>
+              </a:rPr>
+              <a:t>03</a:t>
             </a:r>
           </a:p>
         </p:txBody>
@@ -4455,7 +5525,7 @@
     <p:bg>
       <p:bgPr>
         <a:solidFill xmlns:a="http://schemas.openxmlformats.org/drawingml/2006/main">
-          <a:srgbClr val="F5F1E8"/>
+          <a:srgbClr val="FAF9F5"/>
         </a:solidFill>
       </p:bgPr>
     </p:bg>
@@ -4484,8 +5554,8 @@
         </p:nvSpPr>
         <p:spPr>
           <a:xfrm xmlns:a="http://schemas.openxmlformats.org/drawingml/2006/main">
-            <a:off x="609600" y="552450"/>
-            <a:ext cx="781050" cy="57150"/>
+            <a:off x="609600" y="733425"/>
+            <a:ext cx="781050" cy="38100"/>
           </a:xfrm>
           <a:prstGeom xmlns:a="http://schemas.openxmlformats.org/drawingml/2006/main" prst="rect">
             <a:avLst/>
@@ -4515,8 +5585,8 @@
         </p:nvSpPr>
         <p:spPr>
           <a:xfrm xmlns:a="http://schemas.openxmlformats.org/drawingml/2006/main">
-            <a:off x="609600" y="762000"/>
-            <a:ext cx="8572500" cy="285750"/>
+            <a:off x="609600" y="342900"/>
+            <a:ext cx="9334500" cy="304800"/>
           </a:xfrm>
           <a:prstGeom xmlns:a="http://schemas.openxmlformats.org/drawingml/2006/main" prst="rect">
             <a:avLst/>
@@ -4528,21 +5598,30 @@
           </a:ln>
         </p:spPr>
         <p:txBody>
-          <a:bodyPr xmlns:a="http://schemas.openxmlformats.org/drawingml/2006/main" lIns="0" tIns="0" rIns="0" bIns="0" anchor="ctr"/>
-          <a:lstStyle xmlns:a="http://schemas.openxmlformats.org/drawingml/2006/main"/>
-          <a:p xmlns:a="http://schemas.openxmlformats.org/drawingml/2006/main">
-            <a:pPr>
-              <a:defRPr sz="1500" b="1">
-                <a:solidFill>
-                  <a:srgbClr val="28685E"/>
-                </a:solidFill>
-              </a:defRPr>
-            </a:pPr>
-            <a:r>
-              <a:rPr sz="1500" b="1">
-                <a:solidFill>
-                  <a:srgbClr val="28685E"/>
-                </a:solidFill>
+          <a:bodyPr xmlns:a="http://schemas.openxmlformats.org/drawingml/2006/main" lIns="0" tIns="0" rIns="0" bIns="0" anchor="ctr">
+            <a:noAutofit/>
+          </a:bodyPr>
+          <a:lstStyle xmlns:a="http://schemas.openxmlformats.org/drawingml/2006/main"/>
+          <a:p xmlns:a="http://schemas.openxmlformats.org/drawingml/2006/main">
+            <a:pPr algn="l">
+              <a:buNone/>
+              <a:defRPr sz="1350" b="1">
+                <a:solidFill>
+                  <a:srgbClr val="28685E"/>
+                </a:solidFill>
+                <a:latin typeface="Calibri"/>
+                <a:ea typeface="Calibri"/>
+                <a:cs typeface="Calibri"/>
+              </a:defRPr>
+            </a:pPr>
+            <a:r>
+              <a:rPr sz="1350" b="1">
+                <a:solidFill>
+                  <a:srgbClr val="28685E"/>
+                </a:solidFill>
+                <a:latin typeface="Calibri"/>
+                <a:ea typeface="Calibri"/>
+                <a:cs typeface="Calibri"/>
               </a:rPr>
               <a:t>MADE BY MATT  /  GROW SCIENCE</a:t>
             </a:r>
@@ -4565,8 +5644,8 @@
         </p:nvSpPr>
         <p:spPr>
           <a:xfrm xmlns:a="http://schemas.openxmlformats.org/drawingml/2006/main">
-            <a:off x="609600" y="1352550"/>
-            <a:ext cx="10972800" cy="952500"/>
+            <a:off x="609600" y="990600"/>
+            <a:ext cx="10972800" cy="1000125"/>
           </a:xfrm>
           <a:prstGeom xmlns:a="http://schemas.openxmlformats.org/drawingml/2006/main" prst="rect">
             <a:avLst/>
@@ -4578,21 +5657,30 @@
           </a:ln>
         </p:spPr>
         <p:txBody>
-          <a:bodyPr xmlns:a="http://schemas.openxmlformats.org/drawingml/2006/main" lIns="0" tIns="0" rIns="0" bIns="0" anchor="ctr"/>
-          <a:lstStyle xmlns:a="http://schemas.openxmlformats.org/drawingml/2006/main"/>
-          <a:p xmlns:a="http://schemas.openxmlformats.org/drawingml/2006/main">
-            <a:pPr>
-              <a:defRPr sz="3750" b="1">
+          <a:bodyPr xmlns:a="http://schemas.openxmlformats.org/drawingml/2006/main" lIns="0" tIns="0" rIns="0" bIns="0" anchor="ctr">
+            <a:noAutofit/>
+          </a:bodyPr>
+          <a:lstStyle xmlns:a="http://schemas.openxmlformats.org/drawingml/2006/main"/>
+          <a:p xmlns:a="http://schemas.openxmlformats.org/drawingml/2006/main">
+            <a:pPr algn="l">
+              <a:buNone/>
+              <a:defRPr sz="3675" b="1">
                 <a:solidFill>
                   <a:srgbClr val="152B3A"/>
                 </a:solidFill>
-              </a:defRPr>
-            </a:pPr>
-            <a:r>
-              <a:rPr sz="3750" b="1">
+                <a:latin typeface="Calibri"/>
+                <a:ea typeface="Calibri"/>
+                <a:cs typeface="Calibri"/>
+              </a:defRPr>
+            </a:pPr>
+            <a:r>
+              <a:rPr sz="3675" b="1">
                 <a:solidFill>
                   <a:srgbClr val="152B3A"/>
                 </a:solidFill>
+                <a:latin typeface="Calibri"/>
+                <a:ea typeface="Calibri"/>
+                <a:cs typeface="Calibri"/>
               </a:rPr>
               <a:t>Retrieve the lit-side rule</a:t>
             </a:r>
@@ -4615,14 +5703,14 @@
         </p:nvSpPr>
         <p:spPr>
           <a:xfrm xmlns:a="http://schemas.openxmlformats.org/drawingml/2006/main">
-            <a:off x="609600" y="6219825"/>
+            <a:off x="609600" y="6191250"/>
             <a:ext cx="10972800" cy="9525"/>
           </a:xfrm>
           <a:prstGeom xmlns:a="http://schemas.openxmlformats.org/drawingml/2006/main" prst="rect">
             <a:avLst/>
           </a:prstGeom>
           <a:solidFill xmlns:a="http://schemas.openxmlformats.org/drawingml/2006/main">
-            <a:srgbClr val="DCE7DD"/>
+            <a:srgbClr val="CEDBD3"/>
           </a:solidFill>
           <a:ln xmlns:a="http://schemas.openxmlformats.org/drawingml/2006/main" w="0">
             <a:noFill/>
@@ -4646,8 +5734,8 @@
         </p:nvSpPr>
         <p:spPr>
           <a:xfrm xmlns:a="http://schemas.openxmlformats.org/drawingml/2006/main">
-            <a:off x="609600" y="6381750"/>
-            <a:ext cx="9906000" cy="228600"/>
+            <a:off x="609600" y="6419850"/>
+            <a:ext cx="9525000" cy="219075"/>
           </a:xfrm>
           <a:prstGeom xmlns:a="http://schemas.openxmlformats.org/drawingml/2006/main" prst="rect">
             <a:avLst/>
@@ -4659,21 +5747,30 @@
           </a:ln>
         </p:spPr>
         <p:txBody>
-          <a:bodyPr xmlns:a="http://schemas.openxmlformats.org/drawingml/2006/main" lIns="0" tIns="0" rIns="0" bIns="0" anchor="ctr"/>
-          <a:lstStyle xmlns:a="http://schemas.openxmlformats.org/drawingml/2006/main"/>
-          <a:p xmlns:a="http://schemas.openxmlformats.org/drawingml/2006/main">
-            <a:pPr>
-              <a:defRPr sz="1275" b="0">
+          <a:bodyPr xmlns:a="http://schemas.openxmlformats.org/drawingml/2006/main" lIns="0" tIns="0" rIns="0" bIns="0" anchor="ctr">
+            <a:noAutofit/>
+          </a:bodyPr>
+          <a:lstStyle xmlns:a="http://schemas.openxmlformats.org/drawingml/2006/main"/>
+          <a:p xmlns:a="http://schemas.openxmlformats.org/drawingml/2006/main">
+            <a:pPr algn="l">
+              <a:buNone/>
+              <a:defRPr sz="1200" b="0">
                 <a:solidFill>
                   <a:srgbClr val="50616B"/>
                 </a:solidFill>
-              </a:defRPr>
-            </a:pPr>
-            <a:r>
-              <a:rPr sz="1275" b="0">
+                <a:latin typeface="Calibri"/>
+                <a:ea typeface="Calibri"/>
+                <a:cs typeface="Calibri"/>
+              </a:defRPr>
+            </a:pPr>
+            <a:r>
+              <a:rPr sz="1200" b="0">
                 <a:solidFill>
                   <a:srgbClr val="50616B"/>
                 </a:solidFill>
+                <a:latin typeface="Calibri"/>
+                <a:ea typeface="Calibri"/>
+                <a:cs typeface="Calibri"/>
               </a:rPr>
               <a:t>AUTUMN 1  ·  WEEK 7  ·  LESSON B</a:t>
             </a:r>
@@ -4696,8 +5793,8 @@
         </p:nvSpPr>
         <p:spPr>
           <a:xfrm xmlns:a="http://schemas.openxmlformats.org/drawingml/2006/main">
-            <a:off x="11106150" y="6362700"/>
-            <a:ext cx="476250" cy="238125"/>
+            <a:off x="11106150" y="6400800"/>
+            <a:ext cx="476250" cy="247650"/>
           </a:xfrm>
           <a:prstGeom xmlns:a="http://schemas.openxmlformats.org/drawingml/2006/main" prst="rect">
             <a:avLst/>
@@ -4709,14 +5806,20 @@
           </a:ln>
         </p:spPr>
         <p:txBody>
-          <a:bodyPr xmlns:a="http://schemas.openxmlformats.org/drawingml/2006/main" lIns="0" tIns="0" rIns="0" bIns="0" anchor="ctr"/>
-          <a:lstStyle xmlns:a="http://schemas.openxmlformats.org/drawingml/2006/main"/>
-          <a:p xmlns:a="http://schemas.openxmlformats.org/drawingml/2006/main">
-            <a:pPr>
+          <a:bodyPr xmlns:a="http://schemas.openxmlformats.org/drawingml/2006/main" lIns="0" tIns="0" rIns="0" bIns="0" anchor="ctr">
+            <a:noAutofit/>
+          </a:bodyPr>
+          <a:lstStyle xmlns:a="http://schemas.openxmlformats.org/drawingml/2006/main"/>
+          <a:p xmlns:a="http://schemas.openxmlformats.org/drawingml/2006/main">
+            <a:pPr algn="l">
+              <a:buNone/>
               <a:defRPr sz="1350" b="1">
                 <a:solidFill>
                   <a:srgbClr val="28685E"/>
                 </a:solidFill>
+                <a:latin typeface="Calibri"/>
+                <a:ea typeface="Calibri"/>
+                <a:cs typeface="Calibri"/>
               </a:defRPr>
             </a:pPr>
             <a:r>
@@ -4724,6 +5827,9 @@
                 <a:solidFill>
                   <a:srgbClr val="28685E"/>
                 </a:solidFill>
+                <a:latin typeface="Calibri"/>
+                <a:ea typeface="Calibri"/>
+                <a:cs typeface="Calibri"/>
               </a:rPr>
               <a:t>02</a:t>
             </a:r>
@@ -4746,8 +5852,8 @@
         </p:nvSpPr>
         <p:spPr>
           <a:xfrm xmlns:a="http://schemas.openxmlformats.org/drawingml/2006/main">
-            <a:off x="609600" y="2619375"/>
-            <a:ext cx="10972800" cy="781050"/>
+            <a:off x="1000125" y="2333625"/>
+            <a:ext cx="10382250" cy="1076325"/>
           </a:xfrm>
           <a:prstGeom xmlns:a="http://schemas.openxmlformats.org/drawingml/2006/main" prst="rect">
             <a:avLst/>
@@ -4759,21 +5865,30 @@
           </a:ln>
         </p:spPr>
         <p:txBody>
-          <a:bodyPr xmlns:a="http://schemas.openxmlformats.org/drawingml/2006/main" lIns="0" tIns="0" rIns="0" bIns="0" anchor="ctr"/>
-          <a:lstStyle xmlns:a="http://schemas.openxmlformats.org/drawingml/2006/main"/>
-          <a:p xmlns:a="http://schemas.openxmlformats.org/drawingml/2006/main">
-            <a:pPr>
-              <a:defRPr sz="2550" b="0">
+          <a:bodyPr xmlns:a="http://schemas.openxmlformats.org/drawingml/2006/main" lIns="0" tIns="0" rIns="0" bIns="0" anchor="ctr">
+            <a:noAutofit/>
+          </a:bodyPr>
+          <a:lstStyle xmlns:a="http://schemas.openxmlformats.org/drawingml/2006/main"/>
+          <a:p xmlns:a="http://schemas.openxmlformats.org/drawingml/2006/main">
+            <a:pPr algn="l">
+              <a:buNone/>
+              <a:defRPr sz="2625" b="0">
                 <a:solidFill>
                   <a:srgbClr val="152B3A"/>
                 </a:solidFill>
-              </a:defRPr>
-            </a:pPr>
-            <a:r>
-              <a:rPr sz="2550" b="0">
+                <a:latin typeface="Calibri"/>
+                <a:ea typeface="Calibri"/>
+                <a:cs typeface="Calibri"/>
+              </a:defRPr>
+            </a:pPr>
+            <a:r>
+              <a:rPr sz="2625" b="0">
                 <a:solidFill>
                   <a:srgbClr val="152B3A"/>
                 </a:solidFill>
+                <a:latin typeface="Calibri"/>
+                <a:ea typeface="Calibri"/>
+                <a:cs typeface="Calibri"/>
               </a:rPr>
               <a:t>Where does moonlight come from?</a:t>
             </a:r>
@@ -4796,8 +5911,8 @@
         </p:nvSpPr>
         <p:spPr>
           <a:xfrm xmlns:a="http://schemas.openxmlformats.org/drawingml/2006/main">
-            <a:off x="609600" y="3476625"/>
-            <a:ext cx="10972800" cy="781050"/>
+            <a:off x="1000125" y="3467100"/>
+            <a:ext cx="10382250" cy="1076325"/>
           </a:xfrm>
           <a:prstGeom xmlns:a="http://schemas.openxmlformats.org/drawingml/2006/main" prst="rect">
             <a:avLst/>
@@ -4809,21 +5924,30 @@
           </a:ln>
         </p:spPr>
         <p:txBody>
-          <a:bodyPr xmlns:a="http://schemas.openxmlformats.org/drawingml/2006/main" lIns="0" tIns="0" rIns="0" bIns="0" anchor="ctr"/>
-          <a:lstStyle xmlns:a="http://schemas.openxmlformats.org/drawingml/2006/main"/>
-          <a:p xmlns:a="http://schemas.openxmlformats.org/drawingml/2006/main">
-            <a:pPr>
-              <a:defRPr sz="2550" b="0">
+          <a:bodyPr xmlns:a="http://schemas.openxmlformats.org/drawingml/2006/main" lIns="0" tIns="0" rIns="0" bIns="0" anchor="ctr">
+            <a:noAutofit/>
+          </a:bodyPr>
+          <a:lstStyle xmlns:a="http://schemas.openxmlformats.org/drawingml/2006/main"/>
+          <a:p xmlns:a="http://schemas.openxmlformats.org/drawingml/2006/main">
+            <a:pPr algn="l">
+              <a:buNone/>
+              <a:defRPr sz="2625" b="0">
                 <a:solidFill>
                   <a:srgbClr val="152B3A"/>
                 </a:solidFill>
-              </a:defRPr>
-            </a:pPr>
-            <a:r>
-              <a:rPr sz="2550" b="0">
+                <a:latin typeface="Calibri"/>
+                <a:ea typeface="Calibri"/>
+                <a:cs typeface="Calibri"/>
+              </a:defRPr>
+            </a:pPr>
+            <a:r>
+              <a:rPr sz="2625" b="0">
                 <a:solidFill>
                   <a:srgbClr val="152B3A"/>
                 </a:solidFill>
+                <a:latin typeface="Calibri"/>
+                <a:ea typeface="Calibri"/>
+                <a:cs typeface="Calibri"/>
               </a:rPr>
               <a:t>What stays round while the Moon looks different?</a:t>
             </a:r>
@@ -4846,8 +5970,8 @@
         </p:nvSpPr>
         <p:spPr>
           <a:xfrm xmlns:a="http://schemas.openxmlformats.org/drawingml/2006/main">
-            <a:off x="609600" y="4333875"/>
-            <a:ext cx="10972800" cy="781050"/>
+            <a:off x="1000125" y="4600575"/>
+            <a:ext cx="10382250" cy="1076325"/>
           </a:xfrm>
           <a:prstGeom xmlns:a="http://schemas.openxmlformats.org/drawingml/2006/main" prst="rect">
             <a:avLst/>
@@ -4859,23 +5983,263 @@
           </a:ln>
         </p:spPr>
         <p:txBody>
-          <a:bodyPr xmlns:a="http://schemas.openxmlformats.org/drawingml/2006/main" lIns="0" tIns="0" rIns="0" bIns="0" anchor="ctr"/>
-          <a:lstStyle xmlns:a="http://schemas.openxmlformats.org/drawingml/2006/main"/>
-          <a:p xmlns:a="http://schemas.openxmlformats.org/drawingml/2006/main">
-            <a:pPr>
-              <a:defRPr sz="2550" b="0">
+          <a:bodyPr xmlns:a="http://schemas.openxmlformats.org/drawingml/2006/main" lIns="0" tIns="0" rIns="0" bIns="0" anchor="ctr">
+            <a:noAutofit/>
+          </a:bodyPr>
+          <a:lstStyle xmlns:a="http://schemas.openxmlformats.org/drawingml/2006/main"/>
+          <a:p xmlns:a="http://schemas.openxmlformats.org/drawingml/2006/main">
+            <a:pPr algn="l">
+              <a:buNone/>
+              <a:defRPr sz="2625" b="0">
                 <a:solidFill>
                   <a:srgbClr val="152B3A"/>
                 </a:solidFill>
-              </a:defRPr>
-            </a:pPr>
-            <a:r>
-              <a:rPr sz="2550" b="0">
+                <a:latin typeface="Calibri"/>
+                <a:ea typeface="Calibri"/>
+                <a:cs typeface="Calibri"/>
+              </a:defRPr>
+            </a:pPr>
+            <a:r>
+              <a:rPr sz="2625" b="0">
                 <a:solidFill>
                   <a:srgbClr val="152B3A"/>
                 </a:solidFill>
+                <a:latin typeface="Calibri"/>
+                <a:ea typeface="Calibri"/>
+                <a:cs typeface="Calibri"/>
               </a:rPr>
               <a:t>Choose drawings, pre-cut circles or adult-operated kit.</a:t>
+            </a:r>
+          </a:p>
+        </p:txBody>
+      </p:sp>
+      <p:sp>
+        <p:nvSpPr>
+          <p:cNvPr id="11" name="cue-0">
+            <a:extLst xmlns:a="http://schemas.openxmlformats.org/drawingml/2006/main">
+              <a:ext uri="{FF2B5EF4-FFF2-40B4-BE49-F238E27FC236}">
+                <a16:creationId xmlns:a16="http://schemas.microsoft.com/office/drawing/2014/main" id="{EF220581-F1C1-44DB-9FAF-A451C5E70E0B}"/>
+              </a:ext>
+            </a:extLst>
+          </p:cNvPr>
+          <p:cNvSpPr>
+            <a:spLocks xmlns:a="http://schemas.openxmlformats.org/drawingml/2006/main" noGrp="1"/>
+          </p:cNvSpPr>
+          <p:nvPr/>
+        </p:nvSpPr>
+        <p:spPr>
+          <a:xfrm xmlns:a="http://schemas.openxmlformats.org/drawingml/2006/main">
+            <a:off x="609600" y="2362200"/>
+            <a:ext cx="323850" cy="323850"/>
+          </a:xfrm>
+          <a:prstGeom xmlns:a="http://schemas.openxmlformats.org/drawingml/2006/main" prst="rect">
+            <a:avLst/>
+          </a:prstGeom>
+          <a:noFill xmlns:a="http://schemas.openxmlformats.org/drawingml/2006/main"/>
+          <a:ln xmlns:a="http://schemas.openxmlformats.org/drawingml/2006/main" w="0">
+            <a:noFill/>
+          </a:ln>
+        </p:spPr>
+        <p:txBody>
+          <a:bodyPr xmlns:a="http://schemas.openxmlformats.org/drawingml/2006/main" lIns="0" tIns="0" rIns="0" bIns="0" anchor="ctr">
+            <a:noAutofit/>
+          </a:bodyPr>
+          <a:lstStyle xmlns:a="http://schemas.openxmlformats.org/drawingml/2006/main"/>
+          <a:p xmlns:a="http://schemas.openxmlformats.org/drawingml/2006/main">
+            <a:pPr algn="l">
+              <a:defRPr sz="1350" b="1">
+                <a:solidFill>
+                  <a:srgbClr val="28685E"/>
+                </a:solidFill>
+                <a:latin typeface="Calibri"/>
+                <a:ea typeface="Calibri"/>
+                <a:cs typeface="Calibri"/>
+              </a:defRPr>
+            </a:pPr>
+            <a:r>
+              <a:rPr sz="1350" b="1">
+                <a:solidFill>
+                  <a:srgbClr val="28685E"/>
+                </a:solidFill>
+                <a:latin typeface="Calibri"/>
+                <a:ea typeface="Calibri"/>
+                <a:cs typeface="Calibri"/>
+              </a:rPr>
+              <a:t>01</a:t>
+            </a:r>
+          </a:p>
+        </p:txBody>
+      </p:sp>
+      <p:sp>
+        <p:nvSpPr>
+          <p:cNvPr id="12" name="row-rule-0">
+            <a:extLst xmlns:a="http://schemas.openxmlformats.org/drawingml/2006/main">
+              <a:ext uri="{FF2B5EF4-FFF2-40B4-BE49-F238E27FC236}">
+                <a16:creationId xmlns:a16="http://schemas.microsoft.com/office/drawing/2014/main" id="{070B5935-EAA6-485C-85BA-CF82A5E5250D}"/>
+              </a:ext>
+            </a:extLst>
+          </p:cNvPr>
+          <p:cNvSpPr>
+            <a:spLocks xmlns:a="http://schemas.openxmlformats.org/drawingml/2006/main" noGrp="1"/>
+          </p:cNvSpPr>
+          <p:nvPr/>
+        </p:nvSpPr>
+        <p:spPr>
+          <a:xfrm xmlns:a="http://schemas.openxmlformats.org/drawingml/2006/main">
+            <a:off x="1000125" y="3419475"/>
+            <a:ext cx="10334625" cy="0"/>
+          </a:xfrm>
+          <a:prstGeom xmlns:a="http://schemas.openxmlformats.org/drawingml/2006/main" prst="line">
+            <a:avLst/>
+          </a:prstGeom>
+          <a:noFill xmlns:a="http://schemas.openxmlformats.org/drawingml/2006/main"/>
+          <a:ln xmlns:a="http://schemas.openxmlformats.org/drawingml/2006/main" w="9525">
+            <a:solidFill>
+              <a:srgbClr val="CEDBD3"/>
+            </a:solidFill>
+          </a:ln>
+        </p:spPr>
+      </p:sp>
+      <p:sp>
+        <p:nvSpPr>
+          <p:cNvPr id="13" name="cue-1">
+            <a:extLst xmlns:a="http://schemas.openxmlformats.org/drawingml/2006/main">
+              <a:ext uri="{FF2B5EF4-FFF2-40B4-BE49-F238E27FC236}">
+                <a16:creationId xmlns:a16="http://schemas.microsoft.com/office/drawing/2014/main" id="{4D8A88AB-23C9-4CE0-B70D-0FF0A81668A6}"/>
+              </a:ext>
+            </a:extLst>
+          </p:cNvPr>
+          <p:cNvSpPr>
+            <a:spLocks xmlns:a="http://schemas.openxmlformats.org/drawingml/2006/main" noGrp="1"/>
+          </p:cNvSpPr>
+          <p:nvPr/>
+        </p:nvSpPr>
+        <p:spPr>
+          <a:xfrm xmlns:a="http://schemas.openxmlformats.org/drawingml/2006/main">
+            <a:off x="609600" y="3495675"/>
+            <a:ext cx="323850" cy="323850"/>
+          </a:xfrm>
+          <a:prstGeom xmlns:a="http://schemas.openxmlformats.org/drawingml/2006/main" prst="rect">
+            <a:avLst/>
+          </a:prstGeom>
+          <a:noFill xmlns:a="http://schemas.openxmlformats.org/drawingml/2006/main"/>
+          <a:ln xmlns:a="http://schemas.openxmlformats.org/drawingml/2006/main" w="0">
+            <a:noFill/>
+          </a:ln>
+        </p:spPr>
+        <p:txBody>
+          <a:bodyPr xmlns:a="http://schemas.openxmlformats.org/drawingml/2006/main" lIns="0" tIns="0" rIns="0" bIns="0" anchor="ctr">
+            <a:noAutofit/>
+          </a:bodyPr>
+          <a:lstStyle xmlns:a="http://schemas.openxmlformats.org/drawingml/2006/main"/>
+          <a:p xmlns:a="http://schemas.openxmlformats.org/drawingml/2006/main">
+            <a:pPr algn="l">
+              <a:defRPr sz="1350" b="1">
+                <a:solidFill>
+                  <a:srgbClr val="28685E"/>
+                </a:solidFill>
+                <a:latin typeface="Calibri"/>
+                <a:ea typeface="Calibri"/>
+                <a:cs typeface="Calibri"/>
+              </a:defRPr>
+            </a:pPr>
+            <a:r>
+              <a:rPr sz="1350" b="1">
+                <a:solidFill>
+                  <a:srgbClr val="28685E"/>
+                </a:solidFill>
+                <a:latin typeface="Calibri"/>
+                <a:ea typeface="Calibri"/>
+                <a:cs typeface="Calibri"/>
+              </a:rPr>
+              <a:t>02</a:t>
+            </a:r>
+          </a:p>
+        </p:txBody>
+      </p:sp>
+      <p:sp>
+        <p:nvSpPr>
+          <p:cNvPr id="14" name="row-rule-1">
+            <a:extLst xmlns:a="http://schemas.openxmlformats.org/drawingml/2006/main">
+              <a:ext uri="{FF2B5EF4-FFF2-40B4-BE49-F238E27FC236}">
+                <a16:creationId xmlns:a16="http://schemas.microsoft.com/office/drawing/2014/main" id="{9F39FD57-AAED-445B-87BD-D95CAB3109D9}"/>
+              </a:ext>
+            </a:extLst>
+          </p:cNvPr>
+          <p:cNvSpPr>
+            <a:spLocks xmlns:a="http://schemas.openxmlformats.org/drawingml/2006/main" noGrp="1"/>
+          </p:cNvSpPr>
+          <p:nvPr/>
+        </p:nvSpPr>
+        <p:spPr>
+          <a:xfrm xmlns:a="http://schemas.openxmlformats.org/drawingml/2006/main">
+            <a:off x="1000125" y="4552950"/>
+            <a:ext cx="10334625" cy="0"/>
+          </a:xfrm>
+          <a:prstGeom xmlns:a="http://schemas.openxmlformats.org/drawingml/2006/main" prst="line">
+            <a:avLst/>
+          </a:prstGeom>
+          <a:noFill xmlns:a="http://schemas.openxmlformats.org/drawingml/2006/main"/>
+          <a:ln xmlns:a="http://schemas.openxmlformats.org/drawingml/2006/main" w="9525">
+            <a:solidFill>
+              <a:srgbClr val="CEDBD3"/>
+            </a:solidFill>
+          </a:ln>
+        </p:spPr>
+      </p:sp>
+      <p:sp>
+        <p:nvSpPr>
+          <p:cNvPr id="15" name="cue-2">
+            <a:extLst xmlns:a="http://schemas.openxmlformats.org/drawingml/2006/main">
+              <a:ext uri="{FF2B5EF4-FFF2-40B4-BE49-F238E27FC236}">
+                <a16:creationId xmlns:a16="http://schemas.microsoft.com/office/drawing/2014/main" id="{ABCFB114-757A-4CDD-86D7-004639092CCA}"/>
+              </a:ext>
+            </a:extLst>
+          </p:cNvPr>
+          <p:cNvSpPr>
+            <a:spLocks xmlns:a="http://schemas.openxmlformats.org/drawingml/2006/main" noGrp="1"/>
+          </p:cNvSpPr>
+          <p:nvPr/>
+        </p:nvSpPr>
+        <p:spPr>
+          <a:xfrm xmlns:a="http://schemas.openxmlformats.org/drawingml/2006/main">
+            <a:off x="609600" y="4629150"/>
+            <a:ext cx="323850" cy="323850"/>
+          </a:xfrm>
+          <a:prstGeom xmlns:a="http://schemas.openxmlformats.org/drawingml/2006/main" prst="rect">
+            <a:avLst/>
+          </a:prstGeom>
+          <a:noFill xmlns:a="http://schemas.openxmlformats.org/drawingml/2006/main"/>
+          <a:ln xmlns:a="http://schemas.openxmlformats.org/drawingml/2006/main" w="0">
+            <a:noFill/>
+          </a:ln>
+        </p:spPr>
+        <p:txBody>
+          <a:bodyPr xmlns:a="http://schemas.openxmlformats.org/drawingml/2006/main" lIns="0" tIns="0" rIns="0" bIns="0" anchor="ctr">
+            <a:noAutofit/>
+          </a:bodyPr>
+          <a:lstStyle xmlns:a="http://schemas.openxmlformats.org/drawingml/2006/main"/>
+          <a:p xmlns:a="http://schemas.openxmlformats.org/drawingml/2006/main">
+            <a:pPr algn="l">
+              <a:defRPr sz="1350" b="1">
+                <a:solidFill>
+                  <a:srgbClr val="28685E"/>
+                </a:solidFill>
+                <a:latin typeface="Calibri"/>
+                <a:ea typeface="Calibri"/>
+                <a:cs typeface="Calibri"/>
+              </a:defRPr>
+            </a:pPr>
+            <a:r>
+              <a:rPr sz="1350" b="1">
+                <a:solidFill>
+                  <a:srgbClr val="28685E"/>
+                </a:solidFill>
+                <a:latin typeface="Calibri"/>
+                <a:ea typeface="Calibri"/>
+                <a:cs typeface="Calibri"/>
+              </a:rPr>
+              <a:t>03</a:t>
             </a:r>
           </a:p>
         </p:txBody>
@@ -4896,7 +6260,7 @@
     <p:bg>
       <p:bgPr>
         <a:solidFill xmlns:a="http://schemas.openxmlformats.org/drawingml/2006/main">
-          <a:srgbClr val="F5F1E8"/>
+          <a:srgbClr val="FAF9F5"/>
         </a:solidFill>
       </p:bgPr>
     </p:bg>
@@ -4925,8 +6289,8 @@
         </p:nvSpPr>
         <p:spPr>
           <a:xfrm xmlns:a="http://schemas.openxmlformats.org/drawingml/2006/main">
-            <a:off x="609600" y="552450"/>
-            <a:ext cx="781050" cy="57150"/>
+            <a:off x="609600" y="733425"/>
+            <a:ext cx="781050" cy="38100"/>
           </a:xfrm>
           <a:prstGeom xmlns:a="http://schemas.openxmlformats.org/drawingml/2006/main" prst="rect">
             <a:avLst/>
@@ -4956,8 +6320,8 @@
         </p:nvSpPr>
         <p:spPr>
           <a:xfrm xmlns:a="http://schemas.openxmlformats.org/drawingml/2006/main">
-            <a:off x="609600" y="762000"/>
-            <a:ext cx="8572500" cy="285750"/>
+            <a:off x="609600" y="342900"/>
+            <a:ext cx="9334500" cy="304800"/>
           </a:xfrm>
           <a:prstGeom xmlns:a="http://schemas.openxmlformats.org/drawingml/2006/main" prst="rect">
             <a:avLst/>
@@ -4969,21 +6333,30 @@
           </a:ln>
         </p:spPr>
         <p:txBody>
-          <a:bodyPr xmlns:a="http://schemas.openxmlformats.org/drawingml/2006/main" lIns="0" tIns="0" rIns="0" bIns="0" anchor="ctr"/>
-          <a:lstStyle xmlns:a="http://schemas.openxmlformats.org/drawingml/2006/main"/>
-          <a:p xmlns:a="http://schemas.openxmlformats.org/drawingml/2006/main">
-            <a:pPr>
-              <a:defRPr sz="1500" b="1">
-                <a:solidFill>
-                  <a:srgbClr val="28685E"/>
-                </a:solidFill>
-              </a:defRPr>
-            </a:pPr>
-            <a:r>
-              <a:rPr sz="1500" b="1">
-                <a:solidFill>
-                  <a:srgbClr val="28685E"/>
-                </a:solidFill>
+          <a:bodyPr xmlns:a="http://schemas.openxmlformats.org/drawingml/2006/main" lIns="0" tIns="0" rIns="0" bIns="0" anchor="ctr">
+            <a:noAutofit/>
+          </a:bodyPr>
+          <a:lstStyle xmlns:a="http://schemas.openxmlformats.org/drawingml/2006/main"/>
+          <a:p xmlns:a="http://schemas.openxmlformats.org/drawingml/2006/main">
+            <a:pPr algn="l">
+              <a:buNone/>
+              <a:defRPr sz="1350" b="1">
+                <a:solidFill>
+                  <a:srgbClr val="28685E"/>
+                </a:solidFill>
+                <a:latin typeface="Calibri"/>
+                <a:ea typeface="Calibri"/>
+                <a:cs typeface="Calibri"/>
+              </a:defRPr>
+            </a:pPr>
+            <a:r>
+              <a:rPr sz="1350" b="1">
+                <a:solidFill>
+                  <a:srgbClr val="28685E"/>
+                </a:solidFill>
+                <a:latin typeface="Calibri"/>
+                <a:ea typeface="Calibri"/>
+                <a:cs typeface="Calibri"/>
               </a:rPr>
               <a:t>MADE BY MATT  /  GROW SCIENCE</a:t>
             </a:r>
@@ -5006,8 +6379,8 @@
         </p:nvSpPr>
         <p:spPr>
           <a:xfrm xmlns:a="http://schemas.openxmlformats.org/drawingml/2006/main">
-            <a:off x="609600" y="1352550"/>
-            <a:ext cx="10972800" cy="952500"/>
+            <a:off x="609600" y="990600"/>
+            <a:ext cx="10972800" cy="1000125"/>
           </a:xfrm>
           <a:prstGeom xmlns:a="http://schemas.openxmlformats.org/drawingml/2006/main" prst="rect">
             <a:avLst/>
@@ -5019,21 +6392,30 @@
           </a:ln>
         </p:spPr>
         <p:txBody>
-          <a:bodyPr xmlns:a="http://schemas.openxmlformats.org/drawingml/2006/main" lIns="0" tIns="0" rIns="0" bIns="0" anchor="ctr"/>
-          <a:lstStyle xmlns:a="http://schemas.openxmlformats.org/drawingml/2006/main"/>
-          <a:p xmlns:a="http://schemas.openxmlformats.org/drawingml/2006/main">
-            <a:pPr>
-              <a:defRPr sz="3750" b="1">
+          <a:bodyPr xmlns:a="http://schemas.openxmlformats.org/drawingml/2006/main" lIns="0" tIns="0" rIns="0" bIns="0" anchor="ctr">
+            <a:noAutofit/>
+          </a:bodyPr>
+          <a:lstStyle xmlns:a="http://schemas.openxmlformats.org/drawingml/2006/main"/>
+          <a:p xmlns:a="http://schemas.openxmlformats.org/drawingml/2006/main">
+            <a:pPr algn="l">
+              <a:buNone/>
+              <a:defRPr sz="3675" b="1">
                 <a:solidFill>
                   <a:srgbClr val="152B3A"/>
                 </a:solidFill>
-              </a:defRPr>
-            </a:pPr>
-            <a:r>
-              <a:rPr sz="3750" b="1">
+                <a:latin typeface="Calibri"/>
+                <a:ea typeface="Calibri"/>
+                <a:cs typeface="Calibri"/>
+              </a:defRPr>
+            </a:pPr>
+            <a:r>
+              <a:rPr sz="3675" b="1">
                 <a:solidFill>
                   <a:srgbClr val="152B3A"/>
                 </a:solidFill>
+                <a:latin typeface="Calibri"/>
+                <a:ea typeface="Calibri"/>
+                <a:cs typeface="Calibri"/>
               </a:rPr>
               <a:t>Prepare your model safely</a:t>
             </a:r>
@@ -5056,14 +6438,14 @@
         </p:nvSpPr>
         <p:spPr>
           <a:xfrm xmlns:a="http://schemas.openxmlformats.org/drawingml/2006/main">
-            <a:off x="609600" y="6219825"/>
+            <a:off x="609600" y="6191250"/>
             <a:ext cx="10972800" cy="9525"/>
           </a:xfrm>
           <a:prstGeom xmlns:a="http://schemas.openxmlformats.org/drawingml/2006/main" prst="rect">
             <a:avLst/>
           </a:prstGeom>
           <a:solidFill xmlns:a="http://schemas.openxmlformats.org/drawingml/2006/main">
-            <a:srgbClr val="DCE7DD"/>
+            <a:srgbClr val="CEDBD3"/>
           </a:solidFill>
           <a:ln xmlns:a="http://schemas.openxmlformats.org/drawingml/2006/main" w="0">
             <a:noFill/>
@@ -5087,8 +6469,8 @@
         </p:nvSpPr>
         <p:spPr>
           <a:xfrm xmlns:a="http://schemas.openxmlformats.org/drawingml/2006/main">
-            <a:off x="609600" y="6381750"/>
-            <a:ext cx="9906000" cy="228600"/>
+            <a:off x="609600" y="6419850"/>
+            <a:ext cx="9525000" cy="219075"/>
           </a:xfrm>
           <a:prstGeom xmlns:a="http://schemas.openxmlformats.org/drawingml/2006/main" prst="rect">
             <a:avLst/>
@@ -5100,21 +6482,30 @@
           </a:ln>
         </p:spPr>
         <p:txBody>
-          <a:bodyPr xmlns:a="http://schemas.openxmlformats.org/drawingml/2006/main" lIns="0" tIns="0" rIns="0" bIns="0" anchor="ctr"/>
-          <a:lstStyle xmlns:a="http://schemas.openxmlformats.org/drawingml/2006/main"/>
-          <a:p xmlns:a="http://schemas.openxmlformats.org/drawingml/2006/main">
-            <a:pPr>
-              <a:defRPr sz="1275" b="0">
+          <a:bodyPr xmlns:a="http://schemas.openxmlformats.org/drawingml/2006/main" lIns="0" tIns="0" rIns="0" bIns="0" anchor="ctr">
+            <a:noAutofit/>
+          </a:bodyPr>
+          <a:lstStyle xmlns:a="http://schemas.openxmlformats.org/drawingml/2006/main"/>
+          <a:p xmlns:a="http://schemas.openxmlformats.org/drawingml/2006/main">
+            <a:pPr algn="l">
+              <a:buNone/>
+              <a:defRPr sz="1200" b="0">
                 <a:solidFill>
                   <a:srgbClr val="50616B"/>
                 </a:solidFill>
-              </a:defRPr>
-            </a:pPr>
-            <a:r>
-              <a:rPr sz="1275" b="0">
+                <a:latin typeface="Calibri"/>
+                <a:ea typeface="Calibri"/>
+                <a:cs typeface="Calibri"/>
+              </a:defRPr>
+            </a:pPr>
+            <a:r>
+              <a:rPr sz="1200" b="0">
                 <a:solidFill>
                   <a:srgbClr val="50616B"/>
                 </a:solidFill>
+                <a:latin typeface="Calibri"/>
+                <a:ea typeface="Calibri"/>
+                <a:cs typeface="Calibri"/>
               </a:rPr>
               <a:t>AUTUMN 1  ·  WEEK 7  ·  LESSON B</a:t>
             </a:r>
@@ -5137,8 +6528,8 @@
         </p:nvSpPr>
         <p:spPr>
           <a:xfrm xmlns:a="http://schemas.openxmlformats.org/drawingml/2006/main">
-            <a:off x="11106150" y="6362700"/>
-            <a:ext cx="476250" cy="238125"/>
+            <a:off x="11106150" y="6400800"/>
+            <a:ext cx="476250" cy="247650"/>
           </a:xfrm>
           <a:prstGeom xmlns:a="http://schemas.openxmlformats.org/drawingml/2006/main" prst="rect">
             <a:avLst/>
@@ -5150,14 +6541,20 @@
           </a:ln>
         </p:spPr>
         <p:txBody>
-          <a:bodyPr xmlns:a="http://schemas.openxmlformats.org/drawingml/2006/main" lIns="0" tIns="0" rIns="0" bIns="0" anchor="ctr"/>
-          <a:lstStyle xmlns:a="http://schemas.openxmlformats.org/drawingml/2006/main"/>
-          <a:p xmlns:a="http://schemas.openxmlformats.org/drawingml/2006/main">
-            <a:pPr>
+          <a:bodyPr xmlns:a="http://schemas.openxmlformats.org/drawingml/2006/main" lIns="0" tIns="0" rIns="0" bIns="0" anchor="ctr">
+            <a:noAutofit/>
+          </a:bodyPr>
+          <a:lstStyle xmlns:a="http://schemas.openxmlformats.org/drawingml/2006/main"/>
+          <a:p xmlns:a="http://schemas.openxmlformats.org/drawingml/2006/main">
+            <a:pPr algn="l">
+              <a:buNone/>
               <a:defRPr sz="1350" b="1">
                 <a:solidFill>
                   <a:srgbClr val="28685E"/>
                 </a:solidFill>
+                <a:latin typeface="Calibri"/>
+                <a:ea typeface="Calibri"/>
+                <a:cs typeface="Calibri"/>
               </a:defRPr>
             </a:pPr>
             <a:r>
@@ -5165,6 +6562,9 @@
                 <a:solidFill>
                   <a:srgbClr val="28685E"/>
                 </a:solidFill>
+                <a:latin typeface="Calibri"/>
+                <a:ea typeface="Calibri"/>
+                <a:cs typeface="Calibri"/>
               </a:rPr>
               <a:t>03</a:t>
             </a:r>
@@ -5187,8 +6587,8 @@
         </p:nvSpPr>
         <p:spPr>
           <a:xfrm xmlns:a="http://schemas.openxmlformats.org/drawingml/2006/main">
-            <a:off x="609600" y="2619375"/>
-            <a:ext cx="10972800" cy="781050"/>
+            <a:off x="1000125" y="2333625"/>
+            <a:ext cx="10382250" cy="1076325"/>
           </a:xfrm>
           <a:prstGeom xmlns:a="http://schemas.openxmlformats.org/drawingml/2006/main" prst="rect">
             <a:avLst/>
@@ -5200,21 +6600,30 @@
           </a:ln>
         </p:spPr>
         <p:txBody>
-          <a:bodyPr xmlns:a="http://schemas.openxmlformats.org/drawingml/2006/main" lIns="0" tIns="0" rIns="0" bIns="0" anchor="ctr"/>
-          <a:lstStyle xmlns:a="http://schemas.openxmlformats.org/drawingml/2006/main"/>
-          <a:p xmlns:a="http://schemas.openxmlformats.org/drawingml/2006/main">
-            <a:pPr>
-              <a:defRPr sz="2550" b="0">
+          <a:bodyPr xmlns:a="http://schemas.openxmlformats.org/drawingml/2006/main" lIns="0" tIns="0" rIns="0" bIns="0" anchor="ctr">
+            <a:noAutofit/>
+          </a:bodyPr>
+          <a:lstStyle xmlns:a="http://schemas.openxmlformats.org/drawingml/2006/main"/>
+          <a:p xmlns:a="http://schemas.openxmlformats.org/drawingml/2006/main">
+            <a:pPr algn="l">
+              <a:buNone/>
+              <a:defRPr sz="2625" b="0">
                 <a:solidFill>
                   <a:srgbClr val="152B3A"/>
                 </a:solidFill>
-              </a:defRPr>
-            </a:pPr>
-            <a:r>
-              <a:rPr sz="2550" b="0">
+                <a:latin typeface="Calibri"/>
+                <a:ea typeface="Calibri"/>
+                <a:cs typeface="Calibri"/>
+              </a:defRPr>
+            </a:pPr>
+            <a:r>
+              <a:rPr sz="2625" b="0">
                 <a:solidFill>
                   <a:srgbClr val="152B3A"/>
                 </a:solidFill>
+                <a:latin typeface="Calibri"/>
+                <a:ea typeface="Calibri"/>
+                <a:cs typeface="Calibri"/>
               </a:rPr>
               <a:t>Use a ball, low-power torch and three drawn/card circles.</a:t>
             </a:r>
@@ -5237,8 +6646,8 @@
         </p:nvSpPr>
         <p:spPr>
           <a:xfrm xmlns:a="http://schemas.openxmlformats.org/drawingml/2006/main">
-            <a:off x="609600" y="3476625"/>
-            <a:ext cx="10972800" cy="781050"/>
+            <a:off x="1000125" y="3467100"/>
+            <a:ext cx="10382250" cy="1076325"/>
           </a:xfrm>
           <a:prstGeom xmlns:a="http://schemas.openxmlformats.org/drawingml/2006/main" prst="rect">
             <a:avLst/>
@@ -5250,21 +6659,30 @@
           </a:ln>
         </p:spPr>
         <p:txBody>
-          <a:bodyPr xmlns:a="http://schemas.openxmlformats.org/drawingml/2006/main" lIns="0" tIns="0" rIns="0" bIns="0" anchor="ctr"/>
-          <a:lstStyle xmlns:a="http://schemas.openxmlformats.org/drawingml/2006/main"/>
-          <a:p xmlns:a="http://schemas.openxmlformats.org/drawingml/2006/main">
-            <a:pPr>
-              <a:defRPr sz="2550" b="0">
+          <a:bodyPr xmlns:a="http://schemas.openxmlformats.org/drawingml/2006/main" lIns="0" tIns="0" rIns="0" bIns="0" anchor="ctr">
+            <a:noAutofit/>
+          </a:bodyPr>
+          <a:lstStyle xmlns:a="http://schemas.openxmlformats.org/drawingml/2006/main"/>
+          <a:p xmlns:a="http://schemas.openxmlformats.org/drawingml/2006/main">
+            <a:pPr algn="l">
+              <a:buNone/>
+              <a:defRPr sz="2625" b="0">
                 <a:solidFill>
                   <a:srgbClr val="152B3A"/>
                 </a:solidFill>
-              </a:defRPr>
-            </a:pPr>
-            <a:r>
-              <a:rPr sz="2550" b="0">
+                <a:latin typeface="Calibri"/>
+                <a:ea typeface="Calibri"/>
+                <a:cs typeface="Calibri"/>
+              </a:defRPr>
+            </a:pPr>
+            <a:r>
+              <a:rPr sz="2625" b="0">
                 <a:solidFill>
                   <a:srgbClr val="152B3A"/>
                 </a:solidFill>
+                <a:latin typeface="Calibri"/>
+                <a:ea typeface="Calibri"/>
+                <a:cs typeface="Calibri"/>
               </a:rPr>
               <a:t>Keep the torch direction fixed; never shine it at eyes.</a:t>
             </a:r>
@@ -5287,8 +6705,8 @@
         </p:nvSpPr>
         <p:spPr>
           <a:xfrm xmlns:a="http://schemas.openxmlformats.org/drawingml/2006/main">
-            <a:off x="609600" y="4333875"/>
-            <a:ext cx="10972800" cy="781050"/>
+            <a:off x="1000125" y="4600575"/>
+            <a:ext cx="10382250" cy="1076325"/>
           </a:xfrm>
           <a:prstGeom xmlns:a="http://schemas.openxmlformats.org/drawingml/2006/main" prst="rect">
             <a:avLst/>
@@ -5300,23 +6718,263 @@
           </a:ln>
         </p:spPr>
         <p:txBody>
-          <a:bodyPr xmlns:a="http://schemas.openxmlformats.org/drawingml/2006/main" lIns="0" tIns="0" rIns="0" bIns="0" anchor="ctr"/>
-          <a:lstStyle xmlns:a="http://schemas.openxmlformats.org/drawingml/2006/main"/>
-          <a:p xmlns:a="http://schemas.openxmlformats.org/drawingml/2006/main">
-            <a:pPr>
-              <a:defRPr sz="2550" b="0">
+          <a:bodyPr xmlns:a="http://schemas.openxmlformats.org/drawingml/2006/main" lIns="0" tIns="0" rIns="0" bIns="0" anchor="ctr">
+            <a:noAutofit/>
+          </a:bodyPr>
+          <a:lstStyle xmlns:a="http://schemas.openxmlformats.org/drawingml/2006/main"/>
+          <a:p xmlns:a="http://schemas.openxmlformats.org/drawingml/2006/main">
+            <a:pPr algn="l">
+              <a:buNone/>
+              <a:defRPr sz="2625" b="0">
                 <a:solidFill>
                   <a:srgbClr val="152B3A"/>
                 </a:solidFill>
-              </a:defRPr>
-            </a:pPr>
-            <a:r>
-              <a:rPr sz="2550" b="0">
+                <a:latin typeface="Calibri"/>
+                <a:ea typeface="Calibri"/>
+                <a:cs typeface="Calibri"/>
+              </a:defRPr>
+            </a:pPr>
+            <a:r>
+              <a:rPr sz="2625" b="0">
                 <a:solidFill>
                   <a:srgbClr val="152B3A"/>
                 </a:solidFill>
+                <a:latin typeface="Calibri"/>
+                <a:ea typeface="Calibri"/>
+                <a:cs typeface="Calibri"/>
               </a:rPr>
               <a:t>Keep room light, or choose the still-diagram route.</a:t>
+            </a:r>
+          </a:p>
+        </p:txBody>
+      </p:sp>
+      <p:sp>
+        <p:nvSpPr>
+          <p:cNvPr id="11" name="cue-0">
+            <a:extLst xmlns:a="http://schemas.openxmlformats.org/drawingml/2006/main">
+              <a:ext uri="{FF2B5EF4-FFF2-40B4-BE49-F238E27FC236}">
+                <a16:creationId xmlns:a16="http://schemas.microsoft.com/office/drawing/2014/main" id="{5308975E-1D9F-44D1-A912-185BF505455D}"/>
+              </a:ext>
+            </a:extLst>
+          </p:cNvPr>
+          <p:cNvSpPr>
+            <a:spLocks xmlns:a="http://schemas.openxmlformats.org/drawingml/2006/main" noGrp="1"/>
+          </p:cNvSpPr>
+          <p:nvPr/>
+        </p:nvSpPr>
+        <p:spPr>
+          <a:xfrm xmlns:a="http://schemas.openxmlformats.org/drawingml/2006/main">
+            <a:off x="609600" y="2362200"/>
+            <a:ext cx="323850" cy="323850"/>
+          </a:xfrm>
+          <a:prstGeom xmlns:a="http://schemas.openxmlformats.org/drawingml/2006/main" prst="rect">
+            <a:avLst/>
+          </a:prstGeom>
+          <a:noFill xmlns:a="http://schemas.openxmlformats.org/drawingml/2006/main"/>
+          <a:ln xmlns:a="http://schemas.openxmlformats.org/drawingml/2006/main" w="0">
+            <a:noFill/>
+          </a:ln>
+        </p:spPr>
+        <p:txBody>
+          <a:bodyPr xmlns:a="http://schemas.openxmlformats.org/drawingml/2006/main" lIns="0" tIns="0" rIns="0" bIns="0" anchor="ctr">
+            <a:noAutofit/>
+          </a:bodyPr>
+          <a:lstStyle xmlns:a="http://schemas.openxmlformats.org/drawingml/2006/main"/>
+          <a:p xmlns:a="http://schemas.openxmlformats.org/drawingml/2006/main">
+            <a:pPr algn="l">
+              <a:defRPr sz="1350" b="1">
+                <a:solidFill>
+                  <a:srgbClr val="28685E"/>
+                </a:solidFill>
+                <a:latin typeface="Calibri"/>
+                <a:ea typeface="Calibri"/>
+                <a:cs typeface="Calibri"/>
+              </a:defRPr>
+            </a:pPr>
+            <a:r>
+              <a:rPr sz="1350" b="1">
+                <a:solidFill>
+                  <a:srgbClr val="28685E"/>
+                </a:solidFill>
+                <a:latin typeface="Calibri"/>
+                <a:ea typeface="Calibri"/>
+                <a:cs typeface="Calibri"/>
+              </a:rPr>
+              <a:t>01</a:t>
+            </a:r>
+          </a:p>
+        </p:txBody>
+      </p:sp>
+      <p:sp>
+        <p:nvSpPr>
+          <p:cNvPr id="12" name="row-rule-0">
+            <a:extLst xmlns:a="http://schemas.openxmlformats.org/drawingml/2006/main">
+              <a:ext uri="{FF2B5EF4-FFF2-40B4-BE49-F238E27FC236}">
+                <a16:creationId xmlns:a16="http://schemas.microsoft.com/office/drawing/2014/main" id="{A313B5A5-B77A-452A-A522-2678ABD768C7}"/>
+              </a:ext>
+            </a:extLst>
+          </p:cNvPr>
+          <p:cNvSpPr>
+            <a:spLocks xmlns:a="http://schemas.openxmlformats.org/drawingml/2006/main" noGrp="1"/>
+          </p:cNvSpPr>
+          <p:nvPr/>
+        </p:nvSpPr>
+        <p:spPr>
+          <a:xfrm xmlns:a="http://schemas.openxmlformats.org/drawingml/2006/main">
+            <a:off x="1000125" y="3419475"/>
+            <a:ext cx="10334625" cy="0"/>
+          </a:xfrm>
+          <a:prstGeom xmlns:a="http://schemas.openxmlformats.org/drawingml/2006/main" prst="line">
+            <a:avLst/>
+          </a:prstGeom>
+          <a:noFill xmlns:a="http://schemas.openxmlformats.org/drawingml/2006/main"/>
+          <a:ln xmlns:a="http://schemas.openxmlformats.org/drawingml/2006/main" w="9525">
+            <a:solidFill>
+              <a:srgbClr val="CEDBD3"/>
+            </a:solidFill>
+          </a:ln>
+        </p:spPr>
+      </p:sp>
+      <p:sp>
+        <p:nvSpPr>
+          <p:cNvPr id="13" name="cue-1">
+            <a:extLst xmlns:a="http://schemas.openxmlformats.org/drawingml/2006/main">
+              <a:ext uri="{FF2B5EF4-FFF2-40B4-BE49-F238E27FC236}">
+                <a16:creationId xmlns:a16="http://schemas.microsoft.com/office/drawing/2014/main" id="{1907D8E6-D21D-4E37-8D75-96D056A4D0BC}"/>
+              </a:ext>
+            </a:extLst>
+          </p:cNvPr>
+          <p:cNvSpPr>
+            <a:spLocks xmlns:a="http://schemas.openxmlformats.org/drawingml/2006/main" noGrp="1"/>
+          </p:cNvSpPr>
+          <p:nvPr/>
+        </p:nvSpPr>
+        <p:spPr>
+          <a:xfrm xmlns:a="http://schemas.openxmlformats.org/drawingml/2006/main">
+            <a:off x="609600" y="3495675"/>
+            <a:ext cx="323850" cy="323850"/>
+          </a:xfrm>
+          <a:prstGeom xmlns:a="http://schemas.openxmlformats.org/drawingml/2006/main" prst="rect">
+            <a:avLst/>
+          </a:prstGeom>
+          <a:noFill xmlns:a="http://schemas.openxmlformats.org/drawingml/2006/main"/>
+          <a:ln xmlns:a="http://schemas.openxmlformats.org/drawingml/2006/main" w="0">
+            <a:noFill/>
+          </a:ln>
+        </p:spPr>
+        <p:txBody>
+          <a:bodyPr xmlns:a="http://schemas.openxmlformats.org/drawingml/2006/main" lIns="0" tIns="0" rIns="0" bIns="0" anchor="ctr">
+            <a:noAutofit/>
+          </a:bodyPr>
+          <a:lstStyle xmlns:a="http://schemas.openxmlformats.org/drawingml/2006/main"/>
+          <a:p xmlns:a="http://schemas.openxmlformats.org/drawingml/2006/main">
+            <a:pPr algn="l">
+              <a:defRPr sz="1350" b="1">
+                <a:solidFill>
+                  <a:srgbClr val="28685E"/>
+                </a:solidFill>
+                <a:latin typeface="Calibri"/>
+                <a:ea typeface="Calibri"/>
+                <a:cs typeface="Calibri"/>
+              </a:defRPr>
+            </a:pPr>
+            <a:r>
+              <a:rPr sz="1350" b="1">
+                <a:solidFill>
+                  <a:srgbClr val="28685E"/>
+                </a:solidFill>
+                <a:latin typeface="Calibri"/>
+                <a:ea typeface="Calibri"/>
+                <a:cs typeface="Calibri"/>
+              </a:rPr>
+              <a:t>02</a:t>
+            </a:r>
+          </a:p>
+        </p:txBody>
+      </p:sp>
+      <p:sp>
+        <p:nvSpPr>
+          <p:cNvPr id="14" name="row-rule-1">
+            <a:extLst xmlns:a="http://schemas.openxmlformats.org/drawingml/2006/main">
+              <a:ext uri="{FF2B5EF4-FFF2-40B4-BE49-F238E27FC236}">
+                <a16:creationId xmlns:a16="http://schemas.microsoft.com/office/drawing/2014/main" id="{F1941DDA-046C-4693-9AE0-79A9D5C9AE17}"/>
+              </a:ext>
+            </a:extLst>
+          </p:cNvPr>
+          <p:cNvSpPr>
+            <a:spLocks xmlns:a="http://schemas.openxmlformats.org/drawingml/2006/main" noGrp="1"/>
+          </p:cNvSpPr>
+          <p:nvPr/>
+        </p:nvSpPr>
+        <p:spPr>
+          <a:xfrm xmlns:a="http://schemas.openxmlformats.org/drawingml/2006/main">
+            <a:off x="1000125" y="4552950"/>
+            <a:ext cx="10334625" cy="0"/>
+          </a:xfrm>
+          <a:prstGeom xmlns:a="http://schemas.openxmlformats.org/drawingml/2006/main" prst="line">
+            <a:avLst/>
+          </a:prstGeom>
+          <a:noFill xmlns:a="http://schemas.openxmlformats.org/drawingml/2006/main"/>
+          <a:ln xmlns:a="http://schemas.openxmlformats.org/drawingml/2006/main" w="9525">
+            <a:solidFill>
+              <a:srgbClr val="CEDBD3"/>
+            </a:solidFill>
+          </a:ln>
+        </p:spPr>
+      </p:sp>
+      <p:sp>
+        <p:nvSpPr>
+          <p:cNvPr id="15" name="cue-2">
+            <a:extLst xmlns:a="http://schemas.openxmlformats.org/drawingml/2006/main">
+              <a:ext uri="{FF2B5EF4-FFF2-40B4-BE49-F238E27FC236}">
+                <a16:creationId xmlns:a16="http://schemas.microsoft.com/office/drawing/2014/main" id="{A4D83DC3-3FF6-4759-B082-41A2B7BD7959}"/>
+              </a:ext>
+            </a:extLst>
+          </p:cNvPr>
+          <p:cNvSpPr>
+            <a:spLocks xmlns:a="http://schemas.openxmlformats.org/drawingml/2006/main" noGrp="1"/>
+          </p:cNvSpPr>
+          <p:nvPr/>
+        </p:nvSpPr>
+        <p:spPr>
+          <a:xfrm xmlns:a="http://schemas.openxmlformats.org/drawingml/2006/main">
+            <a:off x="609600" y="4629150"/>
+            <a:ext cx="323850" cy="323850"/>
+          </a:xfrm>
+          <a:prstGeom xmlns:a="http://schemas.openxmlformats.org/drawingml/2006/main" prst="rect">
+            <a:avLst/>
+          </a:prstGeom>
+          <a:noFill xmlns:a="http://schemas.openxmlformats.org/drawingml/2006/main"/>
+          <a:ln xmlns:a="http://schemas.openxmlformats.org/drawingml/2006/main" w="0">
+            <a:noFill/>
+          </a:ln>
+        </p:spPr>
+        <p:txBody>
+          <a:bodyPr xmlns:a="http://schemas.openxmlformats.org/drawingml/2006/main" lIns="0" tIns="0" rIns="0" bIns="0" anchor="ctr">
+            <a:noAutofit/>
+          </a:bodyPr>
+          <a:lstStyle xmlns:a="http://schemas.openxmlformats.org/drawingml/2006/main"/>
+          <a:p xmlns:a="http://schemas.openxmlformats.org/drawingml/2006/main">
+            <a:pPr algn="l">
+              <a:defRPr sz="1350" b="1">
+                <a:solidFill>
+                  <a:srgbClr val="28685E"/>
+                </a:solidFill>
+                <a:latin typeface="Calibri"/>
+                <a:ea typeface="Calibri"/>
+                <a:cs typeface="Calibri"/>
+              </a:defRPr>
+            </a:pPr>
+            <a:r>
+              <a:rPr sz="1350" b="1">
+                <a:solidFill>
+                  <a:srgbClr val="28685E"/>
+                </a:solidFill>
+                <a:latin typeface="Calibri"/>
+                <a:ea typeface="Calibri"/>
+                <a:cs typeface="Calibri"/>
+              </a:rPr>
+              <a:t>03</a:t>
             </a:r>
           </a:p>
         </p:txBody>
@@ -5337,7 +6995,7 @@
     <p:bg>
       <p:bgPr>
         <a:solidFill xmlns:a="http://schemas.openxmlformats.org/drawingml/2006/main">
-          <a:srgbClr val="F5F1E8"/>
+          <a:srgbClr val="FAF9F5"/>
         </a:solidFill>
       </p:bgPr>
     </p:bg>
@@ -5366,8 +7024,8 @@
         </p:nvSpPr>
         <p:spPr>
           <a:xfrm xmlns:a="http://schemas.openxmlformats.org/drawingml/2006/main">
-            <a:off x="609600" y="552450"/>
-            <a:ext cx="781050" cy="57150"/>
+            <a:off x="609600" y="733425"/>
+            <a:ext cx="781050" cy="38100"/>
           </a:xfrm>
           <a:prstGeom xmlns:a="http://schemas.openxmlformats.org/drawingml/2006/main" prst="rect">
             <a:avLst/>
@@ -5397,8 +7055,8 @@
         </p:nvSpPr>
         <p:spPr>
           <a:xfrm xmlns:a="http://schemas.openxmlformats.org/drawingml/2006/main">
-            <a:off x="609600" y="762000"/>
-            <a:ext cx="8572500" cy="285750"/>
+            <a:off x="609600" y="342900"/>
+            <a:ext cx="9334500" cy="304800"/>
           </a:xfrm>
           <a:prstGeom xmlns:a="http://schemas.openxmlformats.org/drawingml/2006/main" prst="rect">
             <a:avLst/>
@@ -5410,21 +7068,30 @@
           </a:ln>
         </p:spPr>
         <p:txBody>
-          <a:bodyPr xmlns:a="http://schemas.openxmlformats.org/drawingml/2006/main" lIns="0" tIns="0" rIns="0" bIns="0" anchor="ctr"/>
-          <a:lstStyle xmlns:a="http://schemas.openxmlformats.org/drawingml/2006/main"/>
-          <a:p xmlns:a="http://schemas.openxmlformats.org/drawingml/2006/main">
-            <a:pPr>
-              <a:defRPr sz="1500" b="1">
-                <a:solidFill>
-                  <a:srgbClr val="28685E"/>
-                </a:solidFill>
-              </a:defRPr>
-            </a:pPr>
-            <a:r>
-              <a:rPr sz="1500" b="1">
-                <a:solidFill>
-                  <a:srgbClr val="28685E"/>
-                </a:solidFill>
+          <a:bodyPr xmlns:a="http://schemas.openxmlformats.org/drawingml/2006/main" lIns="0" tIns="0" rIns="0" bIns="0" anchor="ctr">
+            <a:noAutofit/>
+          </a:bodyPr>
+          <a:lstStyle xmlns:a="http://schemas.openxmlformats.org/drawingml/2006/main"/>
+          <a:p xmlns:a="http://schemas.openxmlformats.org/drawingml/2006/main">
+            <a:pPr algn="l">
+              <a:buNone/>
+              <a:defRPr sz="1350" b="1">
+                <a:solidFill>
+                  <a:srgbClr val="28685E"/>
+                </a:solidFill>
+                <a:latin typeface="Calibri"/>
+                <a:ea typeface="Calibri"/>
+                <a:cs typeface="Calibri"/>
+              </a:defRPr>
+            </a:pPr>
+            <a:r>
+              <a:rPr sz="1350" b="1">
+                <a:solidFill>
+                  <a:srgbClr val="28685E"/>
+                </a:solidFill>
+                <a:latin typeface="Calibri"/>
+                <a:ea typeface="Calibri"/>
+                <a:cs typeface="Calibri"/>
               </a:rPr>
               <a:t>MADE BY MATT  /  GROW SCIENCE</a:t>
             </a:r>
@@ -5447,8 +7114,8 @@
         </p:nvSpPr>
         <p:spPr>
           <a:xfrm xmlns:a="http://schemas.openxmlformats.org/drawingml/2006/main">
-            <a:off x="609600" y="1352550"/>
-            <a:ext cx="10972800" cy="952500"/>
+            <a:off x="609600" y="990600"/>
+            <a:ext cx="10972800" cy="1000125"/>
           </a:xfrm>
           <a:prstGeom xmlns:a="http://schemas.openxmlformats.org/drawingml/2006/main" prst="rect">
             <a:avLst/>
@@ -5460,21 +7127,30 @@
           </a:ln>
         </p:spPr>
         <p:txBody>
-          <a:bodyPr xmlns:a="http://schemas.openxmlformats.org/drawingml/2006/main" lIns="0" tIns="0" rIns="0" bIns="0" anchor="ctr"/>
-          <a:lstStyle xmlns:a="http://schemas.openxmlformats.org/drawingml/2006/main"/>
-          <a:p xmlns:a="http://schemas.openxmlformats.org/drawingml/2006/main">
-            <a:pPr>
-              <a:defRPr sz="3750" b="1">
+          <a:bodyPr xmlns:a="http://schemas.openxmlformats.org/drawingml/2006/main" lIns="0" tIns="0" rIns="0" bIns="0" anchor="ctr">
+            <a:noAutofit/>
+          </a:bodyPr>
+          <a:lstStyle xmlns:a="http://schemas.openxmlformats.org/drawingml/2006/main"/>
+          <a:p xmlns:a="http://schemas.openxmlformats.org/drawingml/2006/main">
+            <a:pPr algn="l">
+              <a:buNone/>
+              <a:defRPr sz="3675" b="1">
                 <a:solidFill>
                   <a:srgbClr val="152B3A"/>
                 </a:solidFill>
-              </a:defRPr>
-            </a:pPr>
-            <a:r>
-              <a:rPr sz="3750" b="1">
+                <a:latin typeface="Calibri"/>
+                <a:ea typeface="Calibri"/>
+                <a:cs typeface="Calibri"/>
+              </a:defRPr>
+            </a:pPr>
+            <a:r>
+              <a:rPr sz="3675" b="1">
                 <a:solidFill>
                   <a:srgbClr val="152B3A"/>
                 </a:solidFill>
+                <a:latin typeface="Calibri"/>
+                <a:ea typeface="Calibri"/>
+                <a:cs typeface="Calibri"/>
               </a:rPr>
               <a:t>Check three positions</a:t>
             </a:r>
@@ -5497,14 +7173,14 @@
         </p:nvSpPr>
         <p:spPr>
           <a:xfrm xmlns:a="http://schemas.openxmlformats.org/drawingml/2006/main">
-            <a:off x="609600" y="6219825"/>
+            <a:off x="609600" y="6191250"/>
             <a:ext cx="10972800" cy="9525"/>
           </a:xfrm>
           <a:prstGeom xmlns:a="http://schemas.openxmlformats.org/drawingml/2006/main" prst="rect">
             <a:avLst/>
           </a:prstGeom>
           <a:solidFill xmlns:a="http://schemas.openxmlformats.org/drawingml/2006/main">
-            <a:srgbClr val="DCE7DD"/>
+            <a:srgbClr val="CEDBD3"/>
           </a:solidFill>
           <a:ln xmlns:a="http://schemas.openxmlformats.org/drawingml/2006/main" w="0">
             <a:noFill/>
@@ -5528,8 +7204,8 @@
         </p:nvSpPr>
         <p:spPr>
           <a:xfrm xmlns:a="http://schemas.openxmlformats.org/drawingml/2006/main">
-            <a:off x="609600" y="6381750"/>
-            <a:ext cx="9906000" cy="228600"/>
+            <a:off x="609600" y="6419850"/>
+            <a:ext cx="9525000" cy="219075"/>
           </a:xfrm>
           <a:prstGeom xmlns:a="http://schemas.openxmlformats.org/drawingml/2006/main" prst="rect">
             <a:avLst/>
@@ -5541,21 +7217,30 @@
           </a:ln>
         </p:spPr>
         <p:txBody>
-          <a:bodyPr xmlns:a="http://schemas.openxmlformats.org/drawingml/2006/main" lIns="0" tIns="0" rIns="0" bIns="0" anchor="ctr"/>
-          <a:lstStyle xmlns:a="http://schemas.openxmlformats.org/drawingml/2006/main"/>
-          <a:p xmlns:a="http://schemas.openxmlformats.org/drawingml/2006/main">
-            <a:pPr>
-              <a:defRPr sz="1275" b="0">
+          <a:bodyPr xmlns:a="http://schemas.openxmlformats.org/drawingml/2006/main" lIns="0" tIns="0" rIns="0" bIns="0" anchor="ctr">
+            <a:noAutofit/>
+          </a:bodyPr>
+          <a:lstStyle xmlns:a="http://schemas.openxmlformats.org/drawingml/2006/main"/>
+          <a:p xmlns:a="http://schemas.openxmlformats.org/drawingml/2006/main">
+            <a:pPr algn="l">
+              <a:buNone/>
+              <a:defRPr sz="1200" b="0">
                 <a:solidFill>
                   <a:srgbClr val="50616B"/>
                 </a:solidFill>
-              </a:defRPr>
-            </a:pPr>
-            <a:r>
-              <a:rPr sz="1275" b="0">
+                <a:latin typeface="Calibri"/>
+                <a:ea typeface="Calibri"/>
+                <a:cs typeface="Calibri"/>
+              </a:defRPr>
+            </a:pPr>
+            <a:r>
+              <a:rPr sz="1200" b="0">
                 <a:solidFill>
                   <a:srgbClr val="50616B"/>
                 </a:solidFill>
+                <a:latin typeface="Calibri"/>
+                <a:ea typeface="Calibri"/>
+                <a:cs typeface="Calibri"/>
               </a:rPr>
               <a:t>AUTUMN 1  ·  WEEK 7  ·  LESSON B</a:t>
             </a:r>
@@ -5578,8 +7263,8 @@
         </p:nvSpPr>
         <p:spPr>
           <a:xfrm xmlns:a="http://schemas.openxmlformats.org/drawingml/2006/main">
-            <a:off x="11106150" y="6362700"/>
-            <a:ext cx="476250" cy="238125"/>
+            <a:off x="11106150" y="6400800"/>
+            <a:ext cx="476250" cy="247650"/>
           </a:xfrm>
           <a:prstGeom xmlns:a="http://schemas.openxmlformats.org/drawingml/2006/main" prst="rect">
             <a:avLst/>
@@ -5591,14 +7276,20 @@
           </a:ln>
         </p:spPr>
         <p:txBody>
-          <a:bodyPr xmlns:a="http://schemas.openxmlformats.org/drawingml/2006/main" lIns="0" tIns="0" rIns="0" bIns="0" anchor="ctr"/>
-          <a:lstStyle xmlns:a="http://schemas.openxmlformats.org/drawingml/2006/main"/>
-          <a:p xmlns:a="http://schemas.openxmlformats.org/drawingml/2006/main">
-            <a:pPr>
+          <a:bodyPr xmlns:a="http://schemas.openxmlformats.org/drawingml/2006/main" lIns="0" tIns="0" rIns="0" bIns="0" anchor="ctr">
+            <a:noAutofit/>
+          </a:bodyPr>
+          <a:lstStyle xmlns:a="http://schemas.openxmlformats.org/drawingml/2006/main"/>
+          <a:p xmlns:a="http://schemas.openxmlformats.org/drawingml/2006/main">
+            <a:pPr algn="l">
+              <a:buNone/>
               <a:defRPr sz="1350" b="1">
                 <a:solidFill>
                   <a:srgbClr val="28685E"/>
                 </a:solidFill>
+                <a:latin typeface="Calibri"/>
+                <a:ea typeface="Calibri"/>
+                <a:cs typeface="Calibri"/>
               </a:defRPr>
             </a:pPr>
             <a:r>
@@ -5606,6 +7297,9 @@
                 <a:solidFill>
                   <a:srgbClr val="28685E"/>
                 </a:solidFill>
+                <a:latin typeface="Calibri"/>
+                <a:ea typeface="Calibri"/>
+                <a:cs typeface="Calibri"/>
               </a:rPr>
               <a:t>04</a:t>
             </a:r>
@@ -5628,8 +7322,8 @@
         </p:nvSpPr>
         <p:spPr>
           <a:xfrm xmlns:a="http://schemas.openxmlformats.org/drawingml/2006/main">
-            <a:off x="609600" y="2619375"/>
-            <a:ext cx="10972800" cy="781050"/>
+            <a:off x="1000125" y="2333625"/>
+            <a:ext cx="10382250" cy="1076325"/>
           </a:xfrm>
           <a:prstGeom xmlns:a="http://schemas.openxmlformats.org/drawingml/2006/main" prst="rect">
             <a:avLst/>
@@ -5641,21 +7335,30 @@
           </a:ln>
         </p:spPr>
         <p:txBody>
-          <a:bodyPr xmlns:a="http://schemas.openxmlformats.org/drawingml/2006/main" lIns="0" tIns="0" rIns="0" bIns="0" anchor="ctr"/>
-          <a:lstStyle xmlns:a="http://schemas.openxmlformats.org/drawingml/2006/main"/>
-          <a:p xmlns:a="http://schemas.openxmlformats.org/drawingml/2006/main">
-            <a:pPr>
-              <a:defRPr sz="2550" b="0">
+          <a:bodyPr xmlns:a="http://schemas.openxmlformats.org/drawingml/2006/main" lIns="0" tIns="0" rIns="0" bIns="0" anchor="ctr">
+            <a:noAutofit/>
+          </a:bodyPr>
+          <a:lstStyle xmlns:a="http://schemas.openxmlformats.org/drawingml/2006/main"/>
+          <a:p xmlns:a="http://schemas.openxmlformats.org/drawingml/2006/main">
+            <a:pPr algn="l">
+              <a:buNone/>
+              <a:defRPr sz="2625" b="0">
                 <a:solidFill>
                   <a:srgbClr val="152B3A"/>
                 </a:solidFill>
-              </a:defRPr>
-            </a:pPr>
-            <a:r>
-              <a:rPr sz="2550" b="0">
+                <a:latin typeface="Calibri"/>
+                <a:ea typeface="Calibri"/>
+                <a:cs typeface="Calibri"/>
+              </a:defRPr>
+            </a:pPr>
+            <a:r>
+              <a:rPr sz="2625" b="0">
                 <a:solidFill>
                   <a:srgbClr val="152B3A"/>
                 </a:solidFill>
+                <a:latin typeface="Calibri"/>
+                <a:ea typeface="Calibri"/>
+                <a:cs typeface="Calibri"/>
               </a:rPr>
               <a:t>Near the light direction: check the new-Moon view.</a:t>
             </a:r>
@@ -5678,8 +7381,8 @@
         </p:nvSpPr>
         <p:spPr>
           <a:xfrm xmlns:a="http://schemas.openxmlformats.org/drawingml/2006/main">
-            <a:off x="609600" y="3476625"/>
-            <a:ext cx="10972800" cy="781050"/>
+            <a:off x="1000125" y="3467100"/>
+            <a:ext cx="10382250" cy="1076325"/>
           </a:xfrm>
           <a:prstGeom xmlns:a="http://schemas.openxmlformats.org/drawingml/2006/main" prst="rect">
             <a:avLst/>
@@ -5691,21 +7394,30 @@
           </a:ln>
         </p:spPr>
         <p:txBody>
-          <a:bodyPr xmlns:a="http://schemas.openxmlformats.org/drawingml/2006/main" lIns="0" tIns="0" rIns="0" bIns="0" anchor="ctr"/>
-          <a:lstStyle xmlns:a="http://schemas.openxmlformats.org/drawingml/2006/main"/>
-          <a:p xmlns:a="http://schemas.openxmlformats.org/drawingml/2006/main">
-            <a:pPr>
-              <a:defRPr sz="2550" b="0">
+          <a:bodyPr xmlns:a="http://schemas.openxmlformats.org/drawingml/2006/main" lIns="0" tIns="0" rIns="0" bIns="0" anchor="ctr">
+            <a:noAutofit/>
+          </a:bodyPr>
+          <a:lstStyle xmlns:a="http://schemas.openxmlformats.org/drawingml/2006/main"/>
+          <a:p xmlns:a="http://schemas.openxmlformats.org/drawingml/2006/main">
+            <a:pPr algn="l">
+              <a:buNone/>
+              <a:defRPr sz="2625" b="0">
                 <a:solidFill>
                   <a:srgbClr val="152B3A"/>
                 </a:solidFill>
-              </a:defRPr>
-            </a:pPr>
-            <a:r>
-              <a:rPr sz="2550" b="0">
+                <a:latin typeface="Calibri"/>
+                <a:ea typeface="Calibri"/>
+                <a:cs typeface="Calibri"/>
+              </a:defRPr>
+            </a:pPr>
+            <a:r>
+              <a:rPr sz="2625" b="0">
                 <a:solidFill>
                   <a:srgbClr val="152B3A"/>
                 </a:solidFill>
+                <a:latin typeface="Calibri"/>
+                <a:ea typeface="Calibri"/>
+                <a:cs typeface="Calibri"/>
               </a:rPr>
               <a:t>To the side: check a half-Moon view.</a:t>
             </a:r>
@@ -5728,8 +7440,8 @@
         </p:nvSpPr>
         <p:spPr>
           <a:xfrm xmlns:a="http://schemas.openxmlformats.org/drawingml/2006/main">
-            <a:off x="609600" y="4333875"/>
-            <a:ext cx="10972800" cy="781050"/>
+            <a:off x="1000125" y="4600575"/>
+            <a:ext cx="10382250" cy="1076325"/>
           </a:xfrm>
           <a:prstGeom xmlns:a="http://schemas.openxmlformats.org/drawingml/2006/main" prst="rect">
             <a:avLst/>
@@ -5741,23 +7453,263 @@
           </a:ln>
         </p:spPr>
         <p:txBody>
-          <a:bodyPr xmlns:a="http://schemas.openxmlformats.org/drawingml/2006/main" lIns="0" tIns="0" rIns="0" bIns="0" anchor="ctr"/>
-          <a:lstStyle xmlns:a="http://schemas.openxmlformats.org/drawingml/2006/main"/>
-          <a:p xmlns:a="http://schemas.openxmlformats.org/drawingml/2006/main">
-            <a:pPr>
-              <a:defRPr sz="2550" b="0">
+          <a:bodyPr xmlns:a="http://schemas.openxmlformats.org/drawingml/2006/main" lIns="0" tIns="0" rIns="0" bIns="0" anchor="ctr">
+            <a:noAutofit/>
+          </a:bodyPr>
+          <a:lstStyle xmlns:a="http://schemas.openxmlformats.org/drawingml/2006/main"/>
+          <a:p xmlns:a="http://schemas.openxmlformats.org/drawingml/2006/main">
+            <a:pPr algn="l">
+              <a:buNone/>
+              <a:defRPr sz="2625" b="0">
                 <a:solidFill>
                   <a:srgbClr val="152B3A"/>
                 </a:solidFill>
-              </a:defRPr>
-            </a:pPr>
-            <a:r>
-              <a:rPr sz="2550" b="0">
+                <a:latin typeface="Calibri"/>
+                <a:ea typeface="Calibri"/>
+                <a:cs typeface="Calibri"/>
+              </a:defRPr>
+            </a:pPr>
+            <a:r>
+              <a:rPr sz="2625" b="0">
                 <a:solidFill>
                   <a:srgbClr val="152B3A"/>
                 </a:solidFill>
+                <a:latin typeface="Calibri"/>
+                <a:ea typeface="Calibri"/>
+                <a:cs typeface="Calibri"/>
               </a:rPr>
               <a:t>Opposite the light: check the full-Moon view.</a:t>
+            </a:r>
+          </a:p>
+        </p:txBody>
+      </p:sp>
+      <p:sp>
+        <p:nvSpPr>
+          <p:cNvPr id="11" name="cue-0">
+            <a:extLst xmlns:a="http://schemas.openxmlformats.org/drawingml/2006/main">
+              <a:ext uri="{FF2B5EF4-FFF2-40B4-BE49-F238E27FC236}">
+                <a16:creationId xmlns:a16="http://schemas.microsoft.com/office/drawing/2014/main" id="{D09530B0-93F6-4844-AD94-6EA40F849CF0}"/>
+              </a:ext>
+            </a:extLst>
+          </p:cNvPr>
+          <p:cNvSpPr>
+            <a:spLocks xmlns:a="http://schemas.openxmlformats.org/drawingml/2006/main" noGrp="1"/>
+          </p:cNvSpPr>
+          <p:nvPr/>
+        </p:nvSpPr>
+        <p:spPr>
+          <a:xfrm xmlns:a="http://schemas.openxmlformats.org/drawingml/2006/main">
+            <a:off x="609600" y="2362200"/>
+            <a:ext cx="323850" cy="323850"/>
+          </a:xfrm>
+          <a:prstGeom xmlns:a="http://schemas.openxmlformats.org/drawingml/2006/main" prst="rect">
+            <a:avLst/>
+          </a:prstGeom>
+          <a:noFill xmlns:a="http://schemas.openxmlformats.org/drawingml/2006/main"/>
+          <a:ln xmlns:a="http://schemas.openxmlformats.org/drawingml/2006/main" w="0">
+            <a:noFill/>
+          </a:ln>
+        </p:spPr>
+        <p:txBody>
+          <a:bodyPr xmlns:a="http://schemas.openxmlformats.org/drawingml/2006/main" lIns="0" tIns="0" rIns="0" bIns="0" anchor="ctr">
+            <a:noAutofit/>
+          </a:bodyPr>
+          <a:lstStyle xmlns:a="http://schemas.openxmlformats.org/drawingml/2006/main"/>
+          <a:p xmlns:a="http://schemas.openxmlformats.org/drawingml/2006/main">
+            <a:pPr algn="l">
+              <a:defRPr sz="1350" b="1">
+                <a:solidFill>
+                  <a:srgbClr val="28685E"/>
+                </a:solidFill>
+                <a:latin typeface="Calibri"/>
+                <a:ea typeface="Calibri"/>
+                <a:cs typeface="Calibri"/>
+              </a:defRPr>
+            </a:pPr>
+            <a:r>
+              <a:rPr sz="1350" b="1">
+                <a:solidFill>
+                  <a:srgbClr val="28685E"/>
+                </a:solidFill>
+                <a:latin typeface="Calibri"/>
+                <a:ea typeface="Calibri"/>
+                <a:cs typeface="Calibri"/>
+              </a:rPr>
+              <a:t>01</a:t>
+            </a:r>
+          </a:p>
+        </p:txBody>
+      </p:sp>
+      <p:sp>
+        <p:nvSpPr>
+          <p:cNvPr id="12" name="row-rule-0">
+            <a:extLst xmlns:a="http://schemas.openxmlformats.org/drawingml/2006/main">
+              <a:ext uri="{FF2B5EF4-FFF2-40B4-BE49-F238E27FC236}">
+                <a16:creationId xmlns:a16="http://schemas.microsoft.com/office/drawing/2014/main" id="{D2055CDA-1A3A-4A7D-9EB8-505CEC496B25}"/>
+              </a:ext>
+            </a:extLst>
+          </p:cNvPr>
+          <p:cNvSpPr>
+            <a:spLocks xmlns:a="http://schemas.openxmlformats.org/drawingml/2006/main" noGrp="1"/>
+          </p:cNvSpPr>
+          <p:nvPr/>
+        </p:nvSpPr>
+        <p:spPr>
+          <a:xfrm xmlns:a="http://schemas.openxmlformats.org/drawingml/2006/main">
+            <a:off x="1000125" y="3419475"/>
+            <a:ext cx="10334625" cy="0"/>
+          </a:xfrm>
+          <a:prstGeom xmlns:a="http://schemas.openxmlformats.org/drawingml/2006/main" prst="line">
+            <a:avLst/>
+          </a:prstGeom>
+          <a:noFill xmlns:a="http://schemas.openxmlformats.org/drawingml/2006/main"/>
+          <a:ln xmlns:a="http://schemas.openxmlformats.org/drawingml/2006/main" w="9525">
+            <a:solidFill>
+              <a:srgbClr val="CEDBD3"/>
+            </a:solidFill>
+          </a:ln>
+        </p:spPr>
+      </p:sp>
+      <p:sp>
+        <p:nvSpPr>
+          <p:cNvPr id="13" name="cue-1">
+            <a:extLst xmlns:a="http://schemas.openxmlformats.org/drawingml/2006/main">
+              <a:ext uri="{FF2B5EF4-FFF2-40B4-BE49-F238E27FC236}">
+                <a16:creationId xmlns:a16="http://schemas.microsoft.com/office/drawing/2014/main" id="{17B2EF4F-AC74-4E60-9DB5-9DDC8B57A3AB}"/>
+              </a:ext>
+            </a:extLst>
+          </p:cNvPr>
+          <p:cNvSpPr>
+            <a:spLocks xmlns:a="http://schemas.openxmlformats.org/drawingml/2006/main" noGrp="1"/>
+          </p:cNvSpPr>
+          <p:nvPr/>
+        </p:nvSpPr>
+        <p:spPr>
+          <a:xfrm xmlns:a="http://schemas.openxmlformats.org/drawingml/2006/main">
+            <a:off x="609600" y="3495675"/>
+            <a:ext cx="323850" cy="323850"/>
+          </a:xfrm>
+          <a:prstGeom xmlns:a="http://schemas.openxmlformats.org/drawingml/2006/main" prst="rect">
+            <a:avLst/>
+          </a:prstGeom>
+          <a:noFill xmlns:a="http://schemas.openxmlformats.org/drawingml/2006/main"/>
+          <a:ln xmlns:a="http://schemas.openxmlformats.org/drawingml/2006/main" w="0">
+            <a:noFill/>
+          </a:ln>
+        </p:spPr>
+        <p:txBody>
+          <a:bodyPr xmlns:a="http://schemas.openxmlformats.org/drawingml/2006/main" lIns="0" tIns="0" rIns="0" bIns="0" anchor="ctr">
+            <a:noAutofit/>
+          </a:bodyPr>
+          <a:lstStyle xmlns:a="http://schemas.openxmlformats.org/drawingml/2006/main"/>
+          <a:p xmlns:a="http://schemas.openxmlformats.org/drawingml/2006/main">
+            <a:pPr algn="l">
+              <a:defRPr sz="1350" b="1">
+                <a:solidFill>
+                  <a:srgbClr val="28685E"/>
+                </a:solidFill>
+                <a:latin typeface="Calibri"/>
+                <a:ea typeface="Calibri"/>
+                <a:cs typeface="Calibri"/>
+              </a:defRPr>
+            </a:pPr>
+            <a:r>
+              <a:rPr sz="1350" b="1">
+                <a:solidFill>
+                  <a:srgbClr val="28685E"/>
+                </a:solidFill>
+                <a:latin typeface="Calibri"/>
+                <a:ea typeface="Calibri"/>
+                <a:cs typeface="Calibri"/>
+              </a:rPr>
+              <a:t>02</a:t>
+            </a:r>
+          </a:p>
+        </p:txBody>
+      </p:sp>
+      <p:sp>
+        <p:nvSpPr>
+          <p:cNvPr id="14" name="row-rule-1">
+            <a:extLst xmlns:a="http://schemas.openxmlformats.org/drawingml/2006/main">
+              <a:ext uri="{FF2B5EF4-FFF2-40B4-BE49-F238E27FC236}">
+                <a16:creationId xmlns:a16="http://schemas.microsoft.com/office/drawing/2014/main" id="{72EA2B75-C89C-4ABD-82DE-BCCE3DFA96F8}"/>
+              </a:ext>
+            </a:extLst>
+          </p:cNvPr>
+          <p:cNvSpPr>
+            <a:spLocks xmlns:a="http://schemas.openxmlformats.org/drawingml/2006/main" noGrp="1"/>
+          </p:cNvSpPr>
+          <p:nvPr/>
+        </p:nvSpPr>
+        <p:spPr>
+          <a:xfrm xmlns:a="http://schemas.openxmlformats.org/drawingml/2006/main">
+            <a:off x="1000125" y="4552950"/>
+            <a:ext cx="10334625" cy="0"/>
+          </a:xfrm>
+          <a:prstGeom xmlns:a="http://schemas.openxmlformats.org/drawingml/2006/main" prst="line">
+            <a:avLst/>
+          </a:prstGeom>
+          <a:noFill xmlns:a="http://schemas.openxmlformats.org/drawingml/2006/main"/>
+          <a:ln xmlns:a="http://schemas.openxmlformats.org/drawingml/2006/main" w="9525">
+            <a:solidFill>
+              <a:srgbClr val="CEDBD3"/>
+            </a:solidFill>
+          </a:ln>
+        </p:spPr>
+      </p:sp>
+      <p:sp>
+        <p:nvSpPr>
+          <p:cNvPr id="15" name="cue-2">
+            <a:extLst xmlns:a="http://schemas.openxmlformats.org/drawingml/2006/main">
+              <a:ext uri="{FF2B5EF4-FFF2-40B4-BE49-F238E27FC236}">
+                <a16:creationId xmlns:a16="http://schemas.microsoft.com/office/drawing/2014/main" id="{B99025C0-1B4F-4EDF-8D5C-FAA59C1E9D07}"/>
+              </a:ext>
+            </a:extLst>
+          </p:cNvPr>
+          <p:cNvSpPr>
+            <a:spLocks xmlns:a="http://schemas.openxmlformats.org/drawingml/2006/main" noGrp="1"/>
+          </p:cNvSpPr>
+          <p:nvPr/>
+        </p:nvSpPr>
+        <p:spPr>
+          <a:xfrm xmlns:a="http://schemas.openxmlformats.org/drawingml/2006/main">
+            <a:off x="609600" y="4629150"/>
+            <a:ext cx="323850" cy="323850"/>
+          </a:xfrm>
+          <a:prstGeom xmlns:a="http://schemas.openxmlformats.org/drawingml/2006/main" prst="rect">
+            <a:avLst/>
+          </a:prstGeom>
+          <a:noFill xmlns:a="http://schemas.openxmlformats.org/drawingml/2006/main"/>
+          <a:ln xmlns:a="http://schemas.openxmlformats.org/drawingml/2006/main" w="0">
+            <a:noFill/>
+          </a:ln>
+        </p:spPr>
+        <p:txBody>
+          <a:bodyPr xmlns:a="http://schemas.openxmlformats.org/drawingml/2006/main" lIns="0" tIns="0" rIns="0" bIns="0" anchor="ctr">
+            <a:noAutofit/>
+          </a:bodyPr>
+          <a:lstStyle xmlns:a="http://schemas.openxmlformats.org/drawingml/2006/main"/>
+          <a:p xmlns:a="http://schemas.openxmlformats.org/drawingml/2006/main">
+            <a:pPr algn="l">
+              <a:defRPr sz="1350" b="1">
+                <a:solidFill>
+                  <a:srgbClr val="28685E"/>
+                </a:solidFill>
+                <a:latin typeface="Calibri"/>
+                <a:ea typeface="Calibri"/>
+                <a:cs typeface="Calibri"/>
+              </a:defRPr>
+            </a:pPr>
+            <a:r>
+              <a:rPr sz="1350" b="1">
+                <a:solidFill>
+                  <a:srgbClr val="28685E"/>
+                </a:solidFill>
+                <a:latin typeface="Calibri"/>
+                <a:ea typeface="Calibri"/>
+                <a:cs typeface="Calibri"/>
+              </a:rPr>
+              <a:t>03</a:t>
             </a:r>
           </a:p>
         </p:txBody>
@@ -5778,7 +7730,7 @@
     <p:bg>
       <p:bgPr>
         <a:solidFill xmlns:a="http://schemas.openxmlformats.org/drawingml/2006/main">
-          <a:srgbClr val="F5F1E8"/>
+          <a:srgbClr val="FAF9F5"/>
         </a:solidFill>
       </p:bgPr>
     </p:bg>
@@ -5807,8 +7759,8 @@
         </p:nvSpPr>
         <p:spPr>
           <a:xfrm xmlns:a="http://schemas.openxmlformats.org/drawingml/2006/main">
-            <a:off x="609600" y="552450"/>
-            <a:ext cx="781050" cy="57150"/>
+            <a:off x="609600" y="733425"/>
+            <a:ext cx="781050" cy="38100"/>
           </a:xfrm>
           <a:prstGeom xmlns:a="http://schemas.openxmlformats.org/drawingml/2006/main" prst="rect">
             <a:avLst/>
@@ -5838,8 +7790,8 @@
         </p:nvSpPr>
         <p:spPr>
           <a:xfrm xmlns:a="http://schemas.openxmlformats.org/drawingml/2006/main">
-            <a:off x="609600" y="762000"/>
-            <a:ext cx="8572500" cy="285750"/>
+            <a:off x="609600" y="342900"/>
+            <a:ext cx="9334500" cy="304800"/>
           </a:xfrm>
           <a:prstGeom xmlns:a="http://schemas.openxmlformats.org/drawingml/2006/main" prst="rect">
             <a:avLst/>
@@ -5851,21 +7803,30 @@
           </a:ln>
         </p:spPr>
         <p:txBody>
-          <a:bodyPr xmlns:a="http://schemas.openxmlformats.org/drawingml/2006/main" lIns="0" tIns="0" rIns="0" bIns="0" anchor="ctr"/>
-          <a:lstStyle xmlns:a="http://schemas.openxmlformats.org/drawingml/2006/main"/>
-          <a:p xmlns:a="http://schemas.openxmlformats.org/drawingml/2006/main">
-            <a:pPr>
-              <a:defRPr sz="1500" b="1">
-                <a:solidFill>
-                  <a:srgbClr val="28685E"/>
-                </a:solidFill>
-              </a:defRPr>
-            </a:pPr>
-            <a:r>
-              <a:rPr sz="1500" b="1">
-                <a:solidFill>
-                  <a:srgbClr val="28685E"/>
-                </a:solidFill>
+          <a:bodyPr xmlns:a="http://schemas.openxmlformats.org/drawingml/2006/main" lIns="0" tIns="0" rIns="0" bIns="0" anchor="ctr">
+            <a:noAutofit/>
+          </a:bodyPr>
+          <a:lstStyle xmlns:a="http://schemas.openxmlformats.org/drawingml/2006/main"/>
+          <a:p xmlns:a="http://schemas.openxmlformats.org/drawingml/2006/main">
+            <a:pPr algn="l">
+              <a:buNone/>
+              <a:defRPr sz="1350" b="1">
+                <a:solidFill>
+                  <a:srgbClr val="28685E"/>
+                </a:solidFill>
+                <a:latin typeface="Calibri"/>
+                <a:ea typeface="Calibri"/>
+                <a:cs typeface="Calibri"/>
+              </a:defRPr>
+            </a:pPr>
+            <a:r>
+              <a:rPr sz="1350" b="1">
+                <a:solidFill>
+                  <a:srgbClr val="28685E"/>
+                </a:solidFill>
+                <a:latin typeface="Calibri"/>
+                <a:ea typeface="Calibri"/>
+                <a:cs typeface="Calibri"/>
               </a:rPr>
               <a:t>MADE BY MATT  /  GROW SCIENCE</a:t>
             </a:r>
@@ -5888,8 +7849,8 @@
         </p:nvSpPr>
         <p:spPr>
           <a:xfrm xmlns:a="http://schemas.openxmlformats.org/drawingml/2006/main">
-            <a:off x="609600" y="1352550"/>
-            <a:ext cx="10972800" cy="952500"/>
+            <a:off x="609600" y="990600"/>
+            <a:ext cx="10972800" cy="1000125"/>
           </a:xfrm>
           <a:prstGeom xmlns:a="http://schemas.openxmlformats.org/drawingml/2006/main" prst="rect">
             <a:avLst/>
@@ -5901,21 +7862,30 @@
           </a:ln>
         </p:spPr>
         <p:txBody>
-          <a:bodyPr xmlns:a="http://schemas.openxmlformats.org/drawingml/2006/main" lIns="0" tIns="0" rIns="0" bIns="0" anchor="ctr"/>
-          <a:lstStyle xmlns:a="http://schemas.openxmlformats.org/drawingml/2006/main"/>
-          <a:p xmlns:a="http://schemas.openxmlformats.org/drawingml/2006/main">
-            <a:pPr>
-              <a:defRPr sz="3750" b="1">
+          <a:bodyPr xmlns:a="http://schemas.openxmlformats.org/drawingml/2006/main" lIns="0" tIns="0" rIns="0" bIns="0" anchor="ctr">
+            <a:noAutofit/>
+          </a:bodyPr>
+          <a:lstStyle xmlns:a="http://schemas.openxmlformats.org/drawingml/2006/main"/>
+          <a:p xmlns:a="http://schemas.openxmlformats.org/drawingml/2006/main">
+            <a:pPr algn="l">
+              <a:buNone/>
+              <a:defRPr sz="3675" b="1">
                 <a:solidFill>
                   <a:srgbClr val="152B3A"/>
                 </a:solidFill>
-              </a:defRPr>
-            </a:pPr>
-            <a:r>
-              <a:rPr sz="3750" b="1">
+                <a:latin typeface="Calibri"/>
+                <a:ea typeface="Calibri"/>
+                <a:cs typeface="Calibri"/>
+              </a:defRPr>
+            </a:pPr>
+            <a:r>
+              <a:rPr sz="3675" b="1">
                 <a:solidFill>
                   <a:srgbClr val="152B3A"/>
                 </a:solidFill>
+                <a:latin typeface="Calibri"/>
+                <a:ea typeface="Calibri"/>
+                <a:cs typeface="Calibri"/>
               </a:rPr>
               <a:t>Make your three-view strip</a:t>
             </a:r>
@@ -5938,14 +7908,14 @@
         </p:nvSpPr>
         <p:spPr>
           <a:xfrm xmlns:a="http://schemas.openxmlformats.org/drawingml/2006/main">
-            <a:off x="609600" y="6219825"/>
+            <a:off x="609600" y="6191250"/>
             <a:ext cx="10972800" cy="9525"/>
           </a:xfrm>
           <a:prstGeom xmlns:a="http://schemas.openxmlformats.org/drawingml/2006/main" prst="rect">
             <a:avLst/>
           </a:prstGeom>
           <a:solidFill xmlns:a="http://schemas.openxmlformats.org/drawingml/2006/main">
-            <a:srgbClr val="DCE7DD"/>
+            <a:srgbClr val="CEDBD3"/>
           </a:solidFill>
           <a:ln xmlns:a="http://schemas.openxmlformats.org/drawingml/2006/main" w="0">
             <a:noFill/>
@@ -5969,8 +7939,8 @@
         </p:nvSpPr>
         <p:spPr>
           <a:xfrm xmlns:a="http://schemas.openxmlformats.org/drawingml/2006/main">
-            <a:off x="609600" y="6381750"/>
-            <a:ext cx="9906000" cy="228600"/>
+            <a:off x="609600" y="6419850"/>
+            <a:ext cx="9525000" cy="219075"/>
           </a:xfrm>
           <a:prstGeom xmlns:a="http://schemas.openxmlformats.org/drawingml/2006/main" prst="rect">
             <a:avLst/>
@@ -5982,21 +7952,30 @@
           </a:ln>
         </p:spPr>
         <p:txBody>
-          <a:bodyPr xmlns:a="http://schemas.openxmlformats.org/drawingml/2006/main" lIns="0" tIns="0" rIns="0" bIns="0" anchor="ctr"/>
-          <a:lstStyle xmlns:a="http://schemas.openxmlformats.org/drawingml/2006/main"/>
-          <a:p xmlns:a="http://schemas.openxmlformats.org/drawingml/2006/main">
-            <a:pPr>
-              <a:defRPr sz="1275" b="0">
+          <a:bodyPr xmlns:a="http://schemas.openxmlformats.org/drawingml/2006/main" lIns="0" tIns="0" rIns="0" bIns="0" anchor="ctr">
+            <a:noAutofit/>
+          </a:bodyPr>
+          <a:lstStyle xmlns:a="http://schemas.openxmlformats.org/drawingml/2006/main"/>
+          <a:p xmlns:a="http://schemas.openxmlformats.org/drawingml/2006/main">
+            <a:pPr algn="l">
+              <a:buNone/>
+              <a:defRPr sz="1200" b="0">
                 <a:solidFill>
                   <a:srgbClr val="50616B"/>
                 </a:solidFill>
-              </a:defRPr>
-            </a:pPr>
-            <a:r>
-              <a:rPr sz="1275" b="0">
+                <a:latin typeface="Calibri"/>
+                <a:ea typeface="Calibri"/>
+                <a:cs typeface="Calibri"/>
+              </a:defRPr>
+            </a:pPr>
+            <a:r>
+              <a:rPr sz="1200" b="0">
                 <a:solidFill>
                   <a:srgbClr val="50616B"/>
                 </a:solidFill>
+                <a:latin typeface="Calibri"/>
+                <a:ea typeface="Calibri"/>
+                <a:cs typeface="Calibri"/>
               </a:rPr>
               <a:t>AUTUMN 1  ·  WEEK 7  ·  LESSON B</a:t>
             </a:r>
@@ -6019,8 +7998,8 @@
         </p:nvSpPr>
         <p:spPr>
           <a:xfrm xmlns:a="http://schemas.openxmlformats.org/drawingml/2006/main">
-            <a:off x="11106150" y="6362700"/>
-            <a:ext cx="476250" cy="238125"/>
+            <a:off x="11106150" y="6400800"/>
+            <a:ext cx="476250" cy="247650"/>
           </a:xfrm>
           <a:prstGeom xmlns:a="http://schemas.openxmlformats.org/drawingml/2006/main" prst="rect">
             <a:avLst/>
@@ -6032,14 +8011,20 @@
           </a:ln>
         </p:spPr>
         <p:txBody>
-          <a:bodyPr xmlns:a="http://schemas.openxmlformats.org/drawingml/2006/main" lIns="0" tIns="0" rIns="0" bIns="0" anchor="ctr"/>
-          <a:lstStyle xmlns:a="http://schemas.openxmlformats.org/drawingml/2006/main"/>
-          <a:p xmlns:a="http://schemas.openxmlformats.org/drawingml/2006/main">
-            <a:pPr>
+          <a:bodyPr xmlns:a="http://schemas.openxmlformats.org/drawingml/2006/main" lIns="0" tIns="0" rIns="0" bIns="0" anchor="ctr">
+            <a:noAutofit/>
+          </a:bodyPr>
+          <a:lstStyle xmlns:a="http://schemas.openxmlformats.org/drawingml/2006/main"/>
+          <a:p xmlns:a="http://schemas.openxmlformats.org/drawingml/2006/main">
+            <a:pPr algn="l">
+              <a:buNone/>
               <a:defRPr sz="1350" b="1">
                 <a:solidFill>
                   <a:srgbClr val="28685E"/>
                 </a:solidFill>
+                <a:latin typeface="Calibri"/>
+                <a:ea typeface="Calibri"/>
+                <a:cs typeface="Calibri"/>
               </a:defRPr>
             </a:pPr>
             <a:r>
@@ -6047,6 +8032,9 @@
                 <a:solidFill>
                   <a:srgbClr val="28685E"/>
                 </a:solidFill>
+                <a:latin typeface="Calibri"/>
+                <a:ea typeface="Calibri"/>
+                <a:cs typeface="Calibri"/>
               </a:rPr>
               <a:t>05</a:t>
             </a:r>
@@ -6069,8 +8057,8 @@
         </p:nvSpPr>
         <p:spPr>
           <a:xfrm xmlns:a="http://schemas.openxmlformats.org/drawingml/2006/main">
-            <a:off x="609600" y="2619375"/>
-            <a:ext cx="10972800" cy="781050"/>
+            <a:off x="1000125" y="2333625"/>
+            <a:ext cx="10382250" cy="1076325"/>
           </a:xfrm>
           <a:prstGeom xmlns:a="http://schemas.openxmlformats.org/drawingml/2006/main" prst="rect">
             <a:avLst/>
@@ -6082,21 +8070,30 @@
           </a:ln>
         </p:spPr>
         <p:txBody>
-          <a:bodyPr xmlns:a="http://schemas.openxmlformats.org/drawingml/2006/main" lIns="0" tIns="0" rIns="0" bIns="0" anchor="ctr"/>
-          <a:lstStyle xmlns:a="http://schemas.openxmlformats.org/drawingml/2006/main"/>
-          <a:p xmlns:a="http://schemas.openxmlformats.org/drawingml/2006/main">
-            <a:pPr>
-              <a:defRPr sz="2550" b="0">
+          <a:bodyPr xmlns:a="http://schemas.openxmlformats.org/drawingml/2006/main" lIns="0" tIns="0" rIns="0" bIns="0" anchor="ctr">
+            <a:noAutofit/>
+          </a:bodyPr>
+          <a:lstStyle xmlns:a="http://schemas.openxmlformats.org/drawingml/2006/main"/>
+          <a:p xmlns:a="http://schemas.openxmlformats.org/drawingml/2006/main">
+            <a:pPr algn="l">
+              <a:buNone/>
+              <a:defRPr sz="2625" b="0">
                 <a:solidFill>
                   <a:srgbClr val="152B3A"/>
                 </a:solidFill>
-              </a:defRPr>
-            </a:pPr>
-            <a:r>
-              <a:rPr sz="2550" b="0">
+                <a:latin typeface="Calibri"/>
+                <a:ea typeface="Calibri"/>
+                <a:cs typeface="Calibri"/>
+              </a:defRPr>
+            </a:pPr>
+            <a:r>
+              <a:rPr sz="2625" b="0">
                 <a:solidFill>
                   <a:srgbClr val="152B3A"/>
                 </a:solidFill>
+                <a:latin typeface="Calibri"/>
+                <a:ea typeface="Calibri"/>
+                <a:cs typeface="Calibri"/>
               </a:rPr>
               <a:t>Draw three equal circles or arrange pre-cut examples.</a:t>
             </a:r>
@@ -6119,8 +8116,8 @@
         </p:nvSpPr>
         <p:spPr>
           <a:xfrm xmlns:a="http://schemas.openxmlformats.org/drawingml/2006/main">
-            <a:off x="609600" y="3476625"/>
-            <a:ext cx="10972800" cy="781050"/>
+            <a:off x="1000125" y="3467100"/>
+            <a:ext cx="10382250" cy="1076325"/>
           </a:xfrm>
           <a:prstGeom xmlns:a="http://schemas.openxmlformats.org/drawingml/2006/main" prst="rect">
             <a:avLst/>
@@ -6132,21 +8129,30 @@
           </a:ln>
         </p:spPr>
         <p:txBody>
-          <a:bodyPr xmlns:a="http://schemas.openxmlformats.org/drawingml/2006/main" lIns="0" tIns="0" rIns="0" bIns="0" anchor="ctr"/>
-          <a:lstStyle xmlns:a="http://schemas.openxmlformats.org/drawingml/2006/main"/>
-          <a:p xmlns:a="http://schemas.openxmlformats.org/drawingml/2006/main">
-            <a:pPr>
-              <a:defRPr sz="2550" b="0">
+          <a:bodyPr xmlns:a="http://schemas.openxmlformats.org/drawingml/2006/main" lIns="0" tIns="0" rIns="0" bIns="0" anchor="ctr">
+            <a:noAutofit/>
+          </a:bodyPr>
+          <a:lstStyle xmlns:a="http://schemas.openxmlformats.org/drawingml/2006/main"/>
+          <a:p xmlns:a="http://schemas.openxmlformats.org/drawingml/2006/main">
+            <a:pPr algn="l">
+              <a:buNone/>
+              <a:defRPr sz="2625" b="0">
                 <a:solidFill>
                   <a:srgbClr val="152B3A"/>
                 </a:solidFill>
-              </a:defRPr>
-            </a:pPr>
-            <a:r>
-              <a:rPr sz="2550" b="0">
+                <a:latin typeface="Calibri"/>
+                <a:ea typeface="Calibri"/>
+                <a:cs typeface="Calibri"/>
+              </a:defRPr>
+            </a:pPr>
+            <a:r>
+              <a:rPr sz="2625" b="0">
                 <a:solidFill>
                   <a:srgbClr val="152B3A"/>
                 </a:solidFill>
+                <a:latin typeface="Calibri"/>
+                <a:ea typeface="Calibri"/>
+                <a:cs typeface="Calibri"/>
               </a:rPr>
               <a:t>Shade the part not seen lit; label new, half and full.</a:t>
             </a:r>
@@ -6169,8 +8175,8 @@
         </p:nvSpPr>
         <p:spPr>
           <a:xfrm xmlns:a="http://schemas.openxmlformats.org/drawingml/2006/main">
-            <a:off x="609600" y="4333875"/>
-            <a:ext cx="10972800" cy="781050"/>
+            <a:off x="1000125" y="4600575"/>
+            <a:ext cx="10382250" cy="1076325"/>
           </a:xfrm>
           <a:prstGeom xmlns:a="http://schemas.openxmlformats.org/drawingml/2006/main" prst="rect">
             <a:avLst/>
@@ -6182,23 +8188,263 @@
           </a:ln>
         </p:spPr>
         <p:txBody>
-          <a:bodyPr xmlns:a="http://schemas.openxmlformats.org/drawingml/2006/main" lIns="0" tIns="0" rIns="0" bIns="0" anchor="ctr"/>
-          <a:lstStyle xmlns:a="http://schemas.openxmlformats.org/drawingml/2006/main"/>
-          <a:p xmlns:a="http://schemas.openxmlformats.org/drawingml/2006/main">
-            <a:pPr>
-              <a:defRPr sz="2550" b="0">
+          <a:bodyPr xmlns:a="http://schemas.openxmlformats.org/drawingml/2006/main" lIns="0" tIns="0" rIns="0" bIns="0" anchor="ctr">
+            <a:noAutofit/>
+          </a:bodyPr>
+          <a:lstStyle xmlns:a="http://schemas.openxmlformats.org/drawingml/2006/main"/>
+          <a:p xmlns:a="http://schemas.openxmlformats.org/drawingml/2006/main">
+            <a:pPr algn="l">
+              <a:buNone/>
+              <a:defRPr sz="2625" b="0">
                 <a:solidFill>
                   <a:srgbClr val="152B3A"/>
                 </a:solidFill>
-              </a:defRPr>
-            </a:pPr>
-            <a:r>
-              <a:rPr sz="2550" b="0">
+                <a:latin typeface="Calibri"/>
+                <a:ea typeface="Calibri"/>
+                <a:cs typeface="Calibri"/>
+              </a:defRPr>
+            </a:pPr>
+            <a:r>
+              <a:rPr sz="2625" b="0">
                 <a:solidFill>
                   <a:srgbClr val="152B3A"/>
                 </a:solidFill>
+                <a:latin typeface="Calibri"/>
+                <a:ea typeface="Calibri"/>
+                <a:cs typeface="Calibri"/>
               </a:rPr>
               <a:t>Keep every circle the same round shape.</a:t>
+            </a:r>
+          </a:p>
+        </p:txBody>
+      </p:sp>
+      <p:sp>
+        <p:nvSpPr>
+          <p:cNvPr id="11" name="cue-0">
+            <a:extLst xmlns:a="http://schemas.openxmlformats.org/drawingml/2006/main">
+              <a:ext uri="{FF2B5EF4-FFF2-40B4-BE49-F238E27FC236}">
+                <a16:creationId xmlns:a16="http://schemas.microsoft.com/office/drawing/2014/main" id="{44CAED8F-BA87-43D4-85B3-4F94C3DB7B97}"/>
+              </a:ext>
+            </a:extLst>
+          </p:cNvPr>
+          <p:cNvSpPr>
+            <a:spLocks xmlns:a="http://schemas.openxmlformats.org/drawingml/2006/main" noGrp="1"/>
+          </p:cNvSpPr>
+          <p:nvPr/>
+        </p:nvSpPr>
+        <p:spPr>
+          <a:xfrm xmlns:a="http://schemas.openxmlformats.org/drawingml/2006/main">
+            <a:off x="609600" y="2362200"/>
+            <a:ext cx="323850" cy="323850"/>
+          </a:xfrm>
+          <a:prstGeom xmlns:a="http://schemas.openxmlformats.org/drawingml/2006/main" prst="rect">
+            <a:avLst/>
+          </a:prstGeom>
+          <a:noFill xmlns:a="http://schemas.openxmlformats.org/drawingml/2006/main"/>
+          <a:ln xmlns:a="http://schemas.openxmlformats.org/drawingml/2006/main" w="0">
+            <a:noFill/>
+          </a:ln>
+        </p:spPr>
+        <p:txBody>
+          <a:bodyPr xmlns:a="http://schemas.openxmlformats.org/drawingml/2006/main" lIns="0" tIns="0" rIns="0" bIns="0" anchor="ctr">
+            <a:noAutofit/>
+          </a:bodyPr>
+          <a:lstStyle xmlns:a="http://schemas.openxmlformats.org/drawingml/2006/main"/>
+          <a:p xmlns:a="http://schemas.openxmlformats.org/drawingml/2006/main">
+            <a:pPr algn="l">
+              <a:defRPr sz="1350" b="1">
+                <a:solidFill>
+                  <a:srgbClr val="28685E"/>
+                </a:solidFill>
+                <a:latin typeface="Calibri"/>
+                <a:ea typeface="Calibri"/>
+                <a:cs typeface="Calibri"/>
+              </a:defRPr>
+            </a:pPr>
+            <a:r>
+              <a:rPr sz="1350" b="1">
+                <a:solidFill>
+                  <a:srgbClr val="28685E"/>
+                </a:solidFill>
+                <a:latin typeface="Calibri"/>
+                <a:ea typeface="Calibri"/>
+                <a:cs typeface="Calibri"/>
+              </a:rPr>
+              <a:t>01</a:t>
+            </a:r>
+          </a:p>
+        </p:txBody>
+      </p:sp>
+      <p:sp>
+        <p:nvSpPr>
+          <p:cNvPr id="12" name="row-rule-0">
+            <a:extLst xmlns:a="http://schemas.openxmlformats.org/drawingml/2006/main">
+              <a:ext uri="{FF2B5EF4-FFF2-40B4-BE49-F238E27FC236}">
+                <a16:creationId xmlns:a16="http://schemas.microsoft.com/office/drawing/2014/main" id="{4FCC6167-25B3-435F-BB78-1E0D642FE2D2}"/>
+              </a:ext>
+            </a:extLst>
+          </p:cNvPr>
+          <p:cNvSpPr>
+            <a:spLocks xmlns:a="http://schemas.openxmlformats.org/drawingml/2006/main" noGrp="1"/>
+          </p:cNvSpPr>
+          <p:nvPr/>
+        </p:nvSpPr>
+        <p:spPr>
+          <a:xfrm xmlns:a="http://schemas.openxmlformats.org/drawingml/2006/main">
+            <a:off x="1000125" y="3419475"/>
+            <a:ext cx="10334625" cy="0"/>
+          </a:xfrm>
+          <a:prstGeom xmlns:a="http://schemas.openxmlformats.org/drawingml/2006/main" prst="line">
+            <a:avLst/>
+          </a:prstGeom>
+          <a:noFill xmlns:a="http://schemas.openxmlformats.org/drawingml/2006/main"/>
+          <a:ln xmlns:a="http://schemas.openxmlformats.org/drawingml/2006/main" w="9525">
+            <a:solidFill>
+              <a:srgbClr val="CEDBD3"/>
+            </a:solidFill>
+          </a:ln>
+        </p:spPr>
+      </p:sp>
+      <p:sp>
+        <p:nvSpPr>
+          <p:cNvPr id="13" name="cue-1">
+            <a:extLst xmlns:a="http://schemas.openxmlformats.org/drawingml/2006/main">
+              <a:ext uri="{FF2B5EF4-FFF2-40B4-BE49-F238E27FC236}">
+                <a16:creationId xmlns:a16="http://schemas.microsoft.com/office/drawing/2014/main" id="{1830CD43-2BE6-4453-867F-76619891590D}"/>
+              </a:ext>
+            </a:extLst>
+          </p:cNvPr>
+          <p:cNvSpPr>
+            <a:spLocks xmlns:a="http://schemas.openxmlformats.org/drawingml/2006/main" noGrp="1"/>
+          </p:cNvSpPr>
+          <p:nvPr/>
+        </p:nvSpPr>
+        <p:spPr>
+          <a:xfrm xmlns:a="http://schemas.openxmlformats.org/drawingml/2006/main">
+            <a:off x="609600" y="3495675"/>
+            <a:ext cx="323850" cy="323850"/>
+          </a:xfrm>
+          <a:prstGeom xmlns:a="http://schemas.openxmlformats.org/drawingml/2006/main" prst="rect">
+            <a:avLst/>
+          </a:prstGeom>
+          <a:noFill xmlns:a="http://schemas.openxmlformats.org/drawingml/2006/main"/>
+          <a:ln xmlns:a="http://schemas.openxmlformats.org/drawingml/2006/main" w="0">
+            <a:noFill/>
+          </a:ln>
+        </p:spPr>
+        <p:txBody>
+          <a:bodyPr xmlns:a="http://schemas.openxmlformats.org/drawingml/2006/main" lIns="0" tIns="0" rIns="0" bIns="0" anchor="ctr">
+            <a:noAutofit/>
+          </a:bodyPr>
+          <a:lstStyle xmlns:a="http://schemas.openxmlformats.org/drawingml/2006/main"/>
+          <a:p xmlns:a="http://schemas.openxmlformats.org/drawingml/2006/main">
+            <a:pPr algn="l">
+              <a:defRPr sz="1350" b="1">
+                <a:solidFill>
+                  <a:srgbClr val="28685E"/>
+                </a:solidFill>
+                <a:latin typeface="Calibri"/>
+                <a:ea typeface="Calibri"/>
+                <a:cs typeface="Calibri"/>
+              </a:defRPr>
+            </a:pPr>
+            <a:r>
+              <a:rPr sz="1350" b="1">
+                <a:solidFill>
+                  <a:srgbClr val="28685E"/>
+                </a:solidFill>
+                <a:latin typeface="Calibri"/>
+                <a:ea typeface="Calibri"/>
+                <a:cs typeface="Calibri"/>
+              </a:rPr>
+              <a:t>02</a:t>
+            </a:r>
+          </a:p>
+        </p:txBody>
+      </p:sp>
+      <p:sp>
+        <p:nvSpPr>
+          <p:cNvPr id="14" name="row-rule-1">
+            <a:extLst xmlns:a="http://schemas.openxmlformats.org/drawingml/2006/main">
+              <a:ext uri="{FF2B5EF4-FFF2-40B4-BE49-F238E27FC236}">
+                <a16:creationId xmlns:a16="http://schemas.microsoft.com/office/drawing/2014/main" id="{D92C9837-15F9-41F8-B11B-F0920385397D}"/>
+              </a:ext>
+            </a:extLst>
+          </p:cNvPr>
+          <p:cNvSpPr>
+            <a:spLocks xmlns:a="http://schemas.openxmlformats.org/drawingml/2006/main" noGrp="1"/>
+          </p:cNvSpPr>
+          <p:nvPr/>
+        </p:nvSpPr>
+        <p:spPr>
+          <a:xfrm xmlns:a="http://schemas.openxmlformats.org/drawingml/2006/main">
+            <a:off x="1000125" y="4552950"/>
+            <a:ext cx="10334625" cy="0"/>
+          </a:xfrm>
+          <a:prstGeom xmlns:a="http://schemas.openxmlformats.org/drawingml/2006/main" prst="line">
+            <a:avLst/>
+          </a:prstGeom>
+          <a:noFill xmlns:a="http://schemas.openxmlformats.org/drawingml/2006/main"/>
+          <a:ln xmlns:a="http://schemas.openxmlformats.org/drawingml/2006/main" w="9525">
+            <a:solidFill>
+              <a:srgbClr val="CEDBD3"/>
+            </a:solidFill>
+          </a:ln>
+        </p:spPr>
+      </p:sp>
+      <p:sp>
+        <p:nvSpPr>
+          <p:cNvPr id="15" name="cue-2">
+            <a:extLst xmlns:a="http://schemas.openxmlformats.org/drawingml/2006/main">
+              <a:ext uri="{FF2B5EF4-FFF2-40B4-BE49-F238E27FC236}">
+                <a16:creationId xmlns:a16="http://schemas.microsoft.com/office/drawing/2014/main" id="{9120D0AF-46F2-4FE2-A3B9-DF1CD54938B7}"/>
+              </a:ext>
+            </a:extLst>
+          </p:cNvPr>
+          <p:cNvSpPr>
+            <a:spLocks xmlns:a="http://schemas.openxmlformats.org/drawingml/2006/main" noGrp="1"/>
+          </p:cNvSpPr>
+          <p:nvPr/>
+        </p:nvSpPr>
+        <p:spPr>
+          <a:xfrm xmlns:a="http://schemas.openxmlformats.org/drawingml/2006/main">
+            <a:off x="609600" y="4629150"/>
+            <a:ext cx="323850" cy="323850"/>
+          </a:xfrm>
+          <a:prstGeom xmlns:a="http://schemas.openxmlformats.org/drawingml/2006/main" prst="rect">
+            <a:avLst/>
+          </a:prstGeom>
+          <a:noFill xmlns:a="http://schemas.openxmlformats.org/drawingml/2006/main"/>
+          <a:ln xmlns:a="http://schemas.openxmlformats.org/drawingml/2006/main" w="0">
+            <a:noFill/>
+          </a:ln>
+        </p:spPr>
+        <p:txBody>
+          <a:bodyPr xmlns:a="http://schemas.openxmlformats.org/drawingml/2006/main" lIns="0" tIns="0" rIns="0" bIns="0" anchor="ctr">
+            <a:noAutofit/>
+          </a:bodyPr>
+          <a:lstStyle xmlns:a="http://schemas.openxmlformats.org/drawingml/2006/main"/>
+          <a:p xmlns:a="http://schemas.openxmlformats.org/drawingml/2006/main">
+            <a:pPr algn="l">
+              <a:defRPr sz="1350" b="1">
+                <a:solidFill>
+                  <a:srgbClr val="28685E"/>
+                </a:solidFill>
+                <a:latin typeface="Calibri"/>
+                <a:ea typeface="Calibri"/>
+                <a:cs typeface="Calibri"/>
+              </a:defRPr>
+            </a:pPr>
+            <a:r>
+              <a:rPr sz="1350" b="1">
+                <a:solidFill>
+                  <a:srgbClr val="28685E"/>
+                </a:solidFill>
+                <a:latin typeface="Calibri"/>
+                <a:ea typeface="Calibri"/>
+                <a:cs typeface="Calibri"/>
+              </a:rPr>
+              <a:t>03</a:t>
             </a:r>
           </a:p>
         </p:txBody>
@@ -6219,7 +8465,7 @@
     <p:bg>
       <p:bgPr>
         <a:solidFill xmlns:a="http://schemas.openxmlformats.org/drawingml/2006/main">
-          <a:srgbClr val="F5F1E8"/>
+          <a:srgbClr val="FAF9F5"/>
         </a:solidFill>
       </p:bgPr>
     </p:bg>
@@ -6248,8 +8494,8 @@
         </p:nvSpPr>
         <p:spPr>
           <a:xfrm xmlns:a="http://schemas.openxmlformats.org/drawingml/2006/main">
-            <a:off x="609600" y="552450"/>
-            <a:ext cx="781050" cy="57150"/>
+            <a:off x="609600" y="733425"/>
+            <a:ext cx="781050" cy="38100"/>
           </a:xfrm>
           <a:prstGeom xmlns:a="http://schemas.openxmlformats.org/drawingml/2006/main" prst="rect">
             <a:avLst/>
@@ -6279,8 +8525,8 @@
         </p:nvSpPr>
         <p:spPr>
           <a:xfrm xmlns:a="http://schemas.openxmlformats.org/drawingml/2006/main">
-            <a:off x="609600" y="762000"/>
-            <a:ext cx="8572500" cy="285750"/>
+            <a:off x="609600" y="342900"/>
+            <a:ext cx="9334500" cy="304800"/>
           </a:xfrm>
           <a:prstGeom xmlns:a="http://schemas.openxmlformats.org/drawingml/2006/main" prst="rect">
             <a:avLst/>
@@ -6292,21 +8538,30 @@
           </a:ln>
         </p:spPr>
         <p:txBody>
-          <a:bodyPr xmlns:a="http://schemas.openxmlformats.org/drawingml/2006/main" lIns="0" tIns="0" rIns="0" bIns="0" anchor="ctr"/>
-          <a:lstStyle xmlns:a="http://schemas.openxmlformats.org/drawingml/2006/main"/>
-          <a:p xmlns:a="http://schemas.openxmlformats.org/drawingml/2006/main">
-            <a:pPr>
-              <a:defRPr sz="1500" b="1">
-                <a:solidFill>
-                  <a:srgbClr val="28685E"/>
-                </a:solidFill>
-              </a:defRPr>
-            </a:pPr>
-            <a:r>
-              <a:rPr sz="1500" b="1">
-                <a:solidFill>
-                  <a:srgbClr val="28685E"/>
-                </a:solidFill>
+          <a:bodyPr xmlns:a="http://schemas.openxmlformats.org/drawingml/2006/main" lIns="0" tIns="0" rIns="0" bIns="0" anchor="ctr">
+            <a:noAutofit/>
+          </a:bodyPr>
+          <a:lstStyle xmlns:a="http://schemas.openxmlformats.org/drawingml/2006/main"/>
+          <a:p xmlns:a="http://schemas.openxmlformats.org/drawingml/2006/main">
+            <a:pPr algn="l">
+              <a:buNone/>
+              <a:defRPr sz="1350" b="1">
+                <a:solidFill>
+                  <a:srgbClr val="28685E"/>
+                </a:solidFill>
+                <a:latin typeface="Calibri"/>
+                <a:ea typeface="Calibri"/>
+                <a:cs typeface="Calibri"/>
+              </a:defRPr>
+            </a:pPr>
+            <a:r>
+              <a:rPr sz="1350" b="1">
+                <a:solidFill>
+                  <a:srgbClr val="28685E"/>
+                </a:solidFill>
+                <a:latin typeface="Calibri"/>
+                <a:ea typeface="Calibri"/>
+                <a:cs typeface="Calibri"/>
               </a:rPr>
               <a:t>MADE BY MATT  /  GROW SCIENCE</a:t>
             </a:r>
@@ -6329,8 +8584,8 @@
         </p:nvSpPr>
         <p:spPr>
           <a:xfrm xmlns:a="http://schemas.openxmlformats.org/drawingml/2006/main">
-            <a:off x="609600" y="1352550"/>
-            <a:ext cx="10972800" cy="952500"/>
+            <a:off x="609600" y="990600"/>
+            <a:ext cx="10972800" cy="1000125"/>
           </a:xfrm>
           <a:prstGeom xmlns:a="http://schemas.openxmlformats.org/drawingml/2006/main" prst="rect">
             <a:avLst/>
@@ -6342,21 +8597,30 @@
           </a:ln>
         </p:spPr>
         <p:txBody>
-          <a:bodyPr xmlns:a="http://schemas.openxmlformats.org/drawingml/2006/main" lIns="0" tIns="0" rIns="0" bIns="0" anchor="ctr"/>
-          <a:lstStyle xmlns:a="http://schemas.openxmlformats.org/drawingml/2006/main"/>
-          <a:p xmlns:a="http://schemas.openxmlformats.org/drawingml/2006/main">
-            <a:pPr>
-              <a:defRPr sz="3750" b="1">
+          <a:bodyPr xmlns:a="http://schemas.openxmlformats.org/drawingml/2006/main" lIns="0" tIns="0" rIns="0" bIns="0" anchor="ctr">
+            <a:noAutofit/>
+          </a:bodyPr>
+          <a:lstStyle xmlns:a="http://schemas.openxmlformats.org/drawingml/2006/main"/>
+          <a:p xmlns:a="http://schemas.openxmlformats.org/drawingml/2006/main">
+            <a:pPr algn="l">
+              <a:buNone/>
+              <a:defRPr sz="3675" b="1">
                 <a:solidFill>
                   <a:srgbClr val="152B3A"/>
                 </a:solidFill>
-              </a:defRPr>
-            </a:pPr>
-            <a:r>
-              <a:rPr sz="3750" b="1">
+                <a:latin typeface="Calibri"/>
+                <a:ea typeface="Calibri"/>
+                <a:cs typeface="Calibri"/>
+              </a:defRPr>
+            </a:pPr>
+            <a:r>
+              <a:rPr sz="3675" b="1">
                 <a:solidFill>
                   <a:srgbClr val="152B3A"/>
                 </a:solidFill>
+                <a:latin typeface="Calibri"/>
+                <a:ea typeface="Calibri"/>
+                <a:cs typeface="Calibri"/>
               </a:rPr>
               <a:t>Explain what changed</a:t>
             </a:r>
@@ -6379,14 +8643,14 @@
         </p:nvSpPr>
         <p:spPr>
           <a:xfrm xmlns:a="http://schemas.openxmlformats.org/drawingml/2006/main">
-            <a:off x="609600" y="6219825"/>
+            <a:off x="609600" y="6191250"/>
             <a:ext cx="10972800" cy="9525"/>
           </a:xfrm>
           <a:prstGeom xmlns:a="http://schemas.openxmlformats.org/drawingml/2006/main" prst="rect">
             <a:avLst/>
           </a:prstGeom>
           <a:solidFill xmlns:a="http://schemas.openxmlformats.org/drawingml/2006/main">
-            <a:srgbClr val="DCE7DD"/>
+            <a:srgbClr val="CEDBD3"/>
           </a:solidFill>
           <a:ln xmlns:a="http://schemas.openxmlformats.org/drawingml/2006/main" w="0">
             <a:noFill/>
@@ -6410,8 +8674,8 @@
         </p:nvSpPr>
         <p:spPr>
           <a:xfrm xmlns:a="http://schemas.openxmlformats.org/drawingml/2006/main">
-            <a:off x="609600" y="6381750"/>
-            <a:ext cx="9906000" cy="228600"/>
+            <a:off x="609600" y="6419850"/>
+            <a:ext cx="9525000" cy="219075"/>
           </a:xfrm>
           <a:prstGeom xmlns:a="http://schemas.openxmlformats.org/drawingml/2006/main" prst="rect">
             <a:avLst/>
@@ -6423,21 +8687,30 @@
           </a:ln>
         </p:spPr>
         <p:txBody>
-          <a:bodyPr xmlns:a="http://schemas.openxmlformats.org/drawingml/2006/main" lIns="0" tIns="0" rIns="0" bIns="0" anchor="ctr"/>
-          <a:lstStyle xmlns:a="http://schemas.openxmlformats.org/drawingml/2006/main"/>
-          <a:p xmlns:a="http://schemas.openxmlformats.org/drawingml/2006/main">
-            <a:pPr>
-              <a:defRPr sz="1275" b="0">
+          <a:bodyPr xmlns:a="http://schemas.openxmlformats.org/drawingml/2006/main" lIns="0" tIns="0" rIns="0" bIns="0" anchor="ctr">
+            <a:noAutofit/>
+          </a:bodyPr>
+          <a:lstStyle xmlns:a="http://schemas.openxmlformats.org/drawingml/2006/main"/>
+          <a:p xmlns:a="http://schemas.openxmlformats.org/drawingml/2006/main">
+            <a:pPr algn="l">
+              <a:buNone/>
+              <a:defRPr sz="1200" b="0">
                 <a:solidFill>
                   <a:srgbClr val="50616B"/>
                 </a:solidFill>
-              </a:defRPr>
-            </a:pPr>
-            <a:r>
-              <a:rPr sz="1275" b="0">
+                <a:latin typeface="Calibri"/>
+                <a:ea typeface="Calibri"/>
+                <a:cs typeface="Calibri"/>
+              </a:defRPr>
+            </a:pPr>
+            <a:r>
+              <a:rPr sz="1200" b="0">
                 <a:solidFill>
                   <a:srgbClr val="50616B"/>
                 </a:solidFill>
+                <a:latin typeface="Calibri"/>
+                <a:ea typeface="Calibri"/>
+                <a:cs typeface="Calibri"/>
               </a:rPr>
               <a:t>AUTUMN 1  ·  WEEK 7  ·  LESSON B</a:t>
             </a:r>
@@ -6460,8 +8733,8 @@
         </p:nvSpPr>
         <p:spPr>
           <a:xfrm xmlns:a="http://schemas.openxmlformats.org/drawingml/2006/main">
-            <a:off x="11106150" y="6362700"/>
-            <a:ext cx="476250" cy="238125"/>
+            <a:off x="11106150" y="6400800"/>
+            <a:ext cx="476250" cy="247650"/>
           </a:xfrm>
           <a:prstGeom xmlns:a="http://schemas.openxmlformats.org/drawingml/2006/main" prst="rect">
             <a:avLst/>
@@ -6473,14 +8746,20 @@
           </a:ln>
         </p:spPr>
         <p:txBody>
-          <a:bodyPr xmlns:a="http://schemas.openxmlformats.org/drawingml/2006/main" lIns="0" tIns="0" rIns="0" bIns="0" anchor="ctr"/>
-          <a:lstStyle xmlns:a="http://schemas.openxmlformats.org/drawingml/2006/main"/>
-          <a:p xmlns:a="http://schemas.openxmlformats.org/drawingml/2006/main">
-            <a:pPr>
+          <a:bodyPr xmlns:a="http://schemas.openxmlformats.org/drawingml/2006/main" lIns="0" tIns="0" rIns="0" bIns="0" anchor="ctr">
+            <a:noAutofit/>
+          </a:bodyPr>
+          <a:lstStyle xmlns:a="http://schemas.openxmlformats.org/drawingml/2006/main"/>
+          <a:p xmlns:a="http://schemas.openxmlformats.org/drawingml/2006/main">
+            <a:pPr algn="l">
+              <a:buNone/>
               <a:defRPr sz="1350" b="1">
                 <a:solidFill>
                   <a:srgbClr val="28685E"/>
                 </a:solidFill>
+                <a:latin typeface="Calibri"/>
+                <a:ea typeface="Calibri"/>
+                <a:cs typeface="Calibri"/>
               </a:defRPr>
             </a:pPr>
             <a:r>
@@ -6488,6 +8767,9 @@
                 <a:solidFill>
                   <a:srgbClr val="28685E"/>
                 </a:solidFill>
+                <a:latin typeface="Calibri"/>
+                <a:ea typeface="Calibri"/>
+                <a:cs typeface="Calibri"/>
               </a:rPr>
               <a:t>06</a:t>
             </a:r>
@@ -6510,36 +8792,95 @@
         </p:nvSpPr>
         <p:spPr>
           <a:xfrm xmlns:a="http://schemas.openxmlformats.org/drawingml/2006/main">
-            <a:off x="609600" y="2686050"/>
-            <a:ext cx="10858500" cy="1524000"/>
-          </a:xfrm>
-          <a:prstGeom xmlns:a="http://schemas.openxmlformats.org/drawingml/2006/main" prst="rect">
-            <a:avLst/>
-          </a:prstGeom>
-          <a:noFill xmlns:a="http://schemas.openxmlformats.org/drawingml/2006/main"/>
+            <a:off x="457200" y="2181225"/>
+            <a:ext cx="5734050" cy="2409825"/>
+          </a:xfrm>
+          <a:prstGeom xmlns:a="http://schemas.openxmlformats.org/drawingml/2006/main" prst="rect">
+            <a:avLst/>
+          </a:prstGeom>
+          <a:solidFill xmlns:a="http://schemas.openxmlformats.org/drawingml/2006/main">
+            <a:srgbClr val="E7EFE9"/>
+          </a:solidFill>
           <a:ln xmlns:a="http://schemas.openxmlformats.org/drawingml/2006/main" w="0">
             <a:noFill/>
             <a:prstDash val="solid"/>
           </a:ln>
         </p:spPr>
         <p:txBody>
-          <a:bodyPr xmlns:a="http://schemas.openxmlformats.org/drawingml/2006/main" lIns="0" tIns="0" rIns="0" bIns="0" anchor="ctr"/>
-          <a:lstStyle xmlns:a="http://schemas.openxmlformats.org/drawingml/2006/main"/>
-          <a:p xmlns:a="http://schemas.openxmlformats.org/drawingml/2006/main">
-            <a:pPr>
-              <a:defRPr sz="2925" b="1">
-                <a:solidFill>
-                  <a:srgbClr val="28685E"/>
-                </a:solidFill>
-              </a:defRPr>
-            </a:pPr>
-            <a:r>
-              <a:rPr sz="2925" b="1">
-                <a:solidFill>
-                  <a:srgbClr val="28685E"/>
-                </a:solidFill>
-              </a:rPr>
-              <a:t>The visible lit part changed because our view of the Moon's sunlit half changed.</a:t>
+          <a:bodyPr xmlns:a="http://schemas.openxmlformats.org/drawingml/2006/main" lIns="152400" tIns="114300" rIns="152400" bIns="114300" anchor="ctr">
+            <a:noAutofit/>
+          </a:bodyPr>
+          <a:lstStyle xmlns:a="http://schemas.openxmlformats.org/drawingml/2006/main"/>
+          <a:p xmlns:a="http://schemas.openxmlformats.org/drawingml/2006/main">
+            <a:pPr algn="l">
+              <a:buNone/>
+              <a:defRPr sz="2775" b="1">
+                <a:solidFill>
+                  <a:srgbClr val="28685E"/>
+                </a:solidFill>
+                <a:latin typeface="Calibri"/>
+                <a:ea typeface="Calibri"/>
+                <a:cs typeface="Calibri"/>
+              </a:defRPr>
+            </a:pPr>
+            <a:r>
+              <a:rPr sz="2775" b="1">
+                <a:solidFill>
+                  <a:srgbClr val="28685E"/>
+                </a:solidFill>
+                <a:latin typeface="Calibri"/>
+                <a:ea typeface="Calibri"/>
+                <a:cs typeface="Calibri"/>
+              </a:rPr>
+              <a:t>The visible lit part changed</a:t>
+            </a:r>
+          </a:p>
+          <a:p xmlns:a="http://schemas.openxmlformats.org/drawingml/2006/main">
+            <a:pPr algn="l">
+              <a:buNone/>
+              <a:defRPr sz="2775" b="1">
+                <a:solidFill>
+                  <a:srgbClr val="28685E"/>
+                </a:solidFill>
+                <a:latin typeface="Calibri"/>
+                <a:ea typeface="Calibri"/>
+                <a:cs typeface="Calibri"/>
+              </a:defRPr>
+            </a:pPr>
+            <a:r>
+              <a:rPr sz="2775" b="1">
+                <a:solidFill>
+                  <a:srgbClr val="28685E"/>
+                </a:solidFill>
+                <a:latin typeface="Calibri"/>
+                <a:ea typeface="Calibri"/>
+                <a:cs typeface="Calibri"/>
+              </a:rPr>
+              <a:t>because our view of the</a:t>
+            </a:r>
+          </a:p>
+          <a:p xmlns:a="http://schemas.openxmlformats.org/drawingml/2006/main">
+            <a:pPr algn="l">
+              <a:buNone/>
+              <a:defRPr sz="2775" b="1">
+                <a:solidFill>
+                  <a:srgbClr val="28685E"/>
+                </a:solidFill>
+                <a:latin typeface="Calibri"/>
+                <a:ea typeface="Calibri"/>
+                <a:cs typeface="Calibri"/>
+              </a:defRPr>
+            </a:pPr>
+            <a:r>
+              <a:rPr sz="2775" b="1">
+                <a:solidFill>
+                  <a:srgbClr val="28685E"/>
+                </a:solidFill>
+                <a:latin typeface="Calibri"/>
+                <a:ea typeface="Calibri"/>
+                <a:cs typeface="Calibri"/>
+              </a:rPr>
+              <a:t>Moon's sunlit half changed.</a:t>
             </a:r>
           </a:p>
         </p:txBody>
@@ -6560,8 +8901,8 @@
         </p:nvSpPr>
         <p:spPr>
           <a:xfrm xmlns:a="http://schemas.openxmlformats.org/drawingml/2006/main">
-            <a:off x="609600" y="4552950"/>
-            <a:ext cx="10858500" cy="1285875"/>
+            <a:off x="609600" y="4533900"/>
+            <a:ext cx="5429250" cy="1409700"/>
           </a:xfrm>
           <a:prstGeom xmlns:a="http://schemas.openxmlformats.org/drawingml/2006/main" prst="rect">
             <a:avLst/>
@@ -6573,23 +8914,389 @@
           </a:ln>
         </p:spPr>
         <p:txBody>
-          <a:bodyPr xmlns:a="http://schemas.openxmlformats.org/drawingml/2006/main" lIns="0" tIns="0" rIns="0" bIns="0" anchor="ctr"/>
-          <a:lstStyle xmlns:a="http://schemas.openxmlformats.org/drawingml/2006/main"/>
-          <a:p xmlns:a="http://schemas.openxmlformats.org/drawingml/2006/main">
-            <a:pPr>
-              <a:defRPr sz="2700" b="0">
+          <a:bodyPr xmlns:a="http://schemas.openxmlformats.org/drawingml/2006/main" lIns="0" tIns="0" rIns="0" bIns="0" anchor="ctr">
+            <a:noAutofit/>
+          </a:bodyPr>
+          <a:lstStyle xmlns:a="http://schemas.openxmlformats.org/drawingml/2006/main"/>
+          <a:p xmlns:a="http://schemas.openxmlformats.org/drawingml/2006/main">
+            <a:pPr algn="l">
+              <a:buNone/>
+              <a:defRPr sz="2250" b="0">
                 <a:solidFill>
                   <a:srgbClr val="152B3A"/>
                 </a:solidFill>
-              </a:defRPr>
-            </a:pPr>
-            <a:r>
-              <a:rPr sz="2700" b="0">
+                <a:latin typeface="Calibri"/>
+                <a:ea typeface="Calibri"/>
+                <a:cs typeface="Calibri"/>
+              </a:defRPr>
+            </a:pPr>
+            <a:r>
+              <a:rPr sz="2250" b="0">
                 <a:solidFill>
                   <a:srgbClr val="152B3A"/>
                 </a:solidFill>
+                <a:latin typeface="Calibri"/>
+                <a:ea typeface="Calibri"/>
+                <a:cs typeface="Calibri"/>
               </a:rPr>
               <a:t>The ball did not change shape.</a:t>
+            </a:r>
+          </a:p>
+        </p:txBody>
+      </p:sp>
+      <p:sp>
+        <p:nvSpPr>
+          <p:cNvPr id="11" name="phase-disc-0">
+            <a:extLst xmlns:a="http://schemas.openxmlformats.org/drawingml/2006/main">
+              <a:ext uri="{FF2B5EF4-FFF2-40B4-BE49-F238E27FC236}">
+                <a16:creationId xmlns:a16="http://schemas.microsoft.com/office/drawing/2014/main" id="{0F626981-B339-497D-AA09-D93BC87D3A52}"/>
+              </a:ext>
+            </a:extLst>
+          </p:cNvPr>
+          <p:cNvSpPr>
+            <a:spLocks xmlns:a="http://schemas.openxmlformats.org/drawingml/2006/main" noGrp="1"/>
+          </p:cNvSpPr>
+          <p:nvPr/>
+        </p:nvSpPr>
+        <p:spPr>
+          <a:xfrm xmlns:a="http://schemas.openxmlformats.org/drawingml/2006/main">
+            <a:off x="6762750" y="3095625"/>
+            <a:ext cx="952500" cy="952500"/>
+          </a:xfrm>
+          <a:prstGeom xmlns:a="http://schemas.openxmlformats.org/drawingml/2006/main" prst="ellipse">
+            <a:avLst/>
+          </a:prstGeom>
+          <a:solidFill xmlns:a="http://schemas.openxmlformats.org/drawingml/2006/main">
+            <a:srgbClr val="152B3A"/>
+          </a:solidFill>
+          <a:ln xmlns:a="http://schemas.openxmlformats.org/drawingml/2006/main" w="9525">
+            <a:solidFill>
+              <a:srgbClr val="50616B"/>
+            </a:solidFill>
+          </a:ln>
+        </p:spPr>
+      </p:sp>
+      <p:sp>
+        <p:nvSpPr>
+          <p:cNvPr id="12" name="phase-label-0">
+            <a:extLst xmlns:a="http://schemas.openxmlformats.org/drawingml/2006/main">
+              <a:ext uri="{FF2B5EF4-FFF2-40B4-BE49-F238E27FC236}">
+                <a16:creationId xmlns:a16="http://schemas.microsoft.com/office/drawing/2014/main" id="{E1393DF1-2814-407A-A63A-518663074033}"/>
+              </a:ext>
+            </a:extLst>
+          </p:cNvPr>
+          <p:cNvSpPr>
+            <a:spLocks xmlns:a="http://schemas.openxmlformats.org/drawingml/2006/main" noGrp="1"/>
+          </p:cNvSpPr>
+          <p:nvPr/>
+        </p:nvSpPr>
+        <p:spPr>
+          <a:xfrm xmlns:a="http://schemas.openxmlformats.org/drawingml/2006/main">
+            <a:off x="6667500" y="4238625"/>
+            <a:ext cx="1143000" cy="381000"/>
+          </a:xfrm>
+          <a:prstGeom xmlns:a="http://schemas.openxmlformats.org/drawingml/2006/main" prst="rect">
+            <a:avLst/>
+          </a:prstGeom>
+          <a:noFill xmlns:a="http://schemas.openxmlformats.org/drawingml/2006/main"/>
+          <a:ln xmlns:a="http://schemas.openxmlformats.org/drawingml/2006/main" w="0">
+            <a:noFill/>
+          </a:ln>
+        </p:spPr>
+        <p:txBody>
+          <a:bodyPr xmlns:a="http://schemas.openxmlformats.org/drawingml/2006/main" lIns="0" tIns="0" rIns="0" bIns="0" anchor="ctr">
+            <a:noAutofit/>
+          </a:bodyPr>
+          <a:lstStyle xmlns:a="http://schemas.openxmlformats.org/drawingml/2006/main"/>
+          <a:p xmlns:a="http://schemas.openxmlformats.org/drawingml/2006/main">
+            <a:pPr algn="ctr">
+              <a:defRPr sz="1950" b="1">
+                <a:solidFill>
+                  <a:srgbClr val="28685E"/>
+                </a:solidFill>
+                <a:latin typeface="Calibri"/>
+                <a:ea typeface="Calibri"/>
+                <a:cs typeface="Calibri"/>
+              </a:defRPr>
+            </a:pPr>
+            <a:r>
+              <a:rPr sz="1950" b="1">
+                <a:solidFill>
+                  <a:srgbClr val="28685E"/>
+                </a:solidFill>
+                <a:latin typeface="Calibri"/>
+                <a:ea typeface="Calibri"/>
+                <a:cs typeface="Calibri"/>
+              </a:rPr>
+              <a:t>New</a:t>
+            </a:r>
+          </a:p>
+        </p:txBody>
+      </p:sp>
+      <p:sp>
+        <p:nvSpPr>
+          <p:cNvPr id="13" name="phase-disc-1">
+            <a:extLst xmlns:a="http://schemas.openxmlformats.org/drawingml/2006/main">
+              <a:ext uri="{FF2B5EF4-FFF2-40B4-BE49-F238E27FC236}">
+                <a16:creationId xmlns:a16="http://schemas.microsoft.com/office/drawing/2014/main" id="{77A72AFD-D98D-4AC8-87AD-3E7CE5B01BF3}"/>
+              </a:ext>
+            </a:extLst>
+          </p:cNvPr>
+          <p:cNvSpPr>
+            <a:spLocks xmlns:a="http://schemas.openxmlformats.org/drawingml/2006/main" noGrp="1"/>
+          </p:cNvSpPr>
+          <p:nvPr/>
+        </p:nvSpPr>
+        <p:spPr>
+          <a:xfrm xmlns:a="http://schemas.openxmlformats.org/drawingml/2006/main">
+            <a:off x="8477250" y="3095625"/>
+            <a:ext cx="952500" cy="952500"/>
+          </a:xfrm>
+          <a:prstGeom xmlns:a="http://schemas.openxmlformats.org/drawingml/2006/main" prst="ellipse">
+            <a:avLst/>
+          </a:prstGeom>
+          <a:solidFill xmlns:a="http://schemas.openxmlformats.org/drawingml/2006/main">
+            <a:srgbClr val="152B3A"/>
+          </a:solidFill>
+          <a:ln xmlns:a="http://schemas.openxmlformats.org/drawingml/2006/main" w="9525">
+            <a:solidFill>
+              <a:srgbClr val="50616B"/>
+            </a:solidFill>
+          </a:ln>
+        </p:spPr>
+      </p:sp>
+      <p:sp>
+        <p:nvSpPr>
+          <p:cNvPr id="14" name="half-lit">
+            <a:extLst xmlns:a="http://schemas.openxmlformats.org/drawingml/2006/main">
+              <a:ext uri="{FF2B5EF4-FFF2-40B4-BE49-F238E27FC236}">
+                <a16:creationId xmlns:a16="http://schemas.microsoft.com/office/drawing/2014/main" id="{098C4256-490D-43B6-A569-7121C6379DBE}"/>
+              </a:ext>
+            </a:extLst>
+          </p:cNvPr>
+          <p:cNvSpPr>
+            <a:spLocks xmlns:a="http://schemas.openxmlformats.org/drawingml/2006/main" noGrp="1"/>
+          </p:cNvSpPr>
+          <p:nvPr/>
+        </p:nvSpPr>
+        <p:spPr>
+          <a:xfrm xmlns:a="http://schemas.openxmlformats.org/drawingml/2006/main">
+            <a:off x="8477250" y="3095625"/>
+            <a:ext cx="952500" cy="952500"/>
+          </a:xfrm>
+          <a:prstGeom xmlns:a="http://schemas.openxmlformats.org/drawingml/2006/main" prst="pie">
+            <a:avLst>
+              <a:gd name="adj1" fmla="val 16200000"/>
+              <a:gd name="adj2" fmla="val 5400000"/>
+            </a:avLst>
+          </a:prstGeom>
+          <a:solidFill xmlns:a="http://schemas.openxmlformats.org/drawingml/2006/main">
+            <a:srgbClr val="DCE3E1"/>
+          </a:solidFill>
+          <a:ln xmlns:a="http://schemas.openxmlformats.org/drawingml/2006/main" w="0">
+            <a:noFill/>
+          </a:ln>
+        </p:spPr>
+      </p:sp>
+      <p:sp>
+        <p:nvSpPr>
+          <p:cNvPr id="15" name="phase-label-1">
+            <a:extLst xmlns:a="http://schemas.openxmlformats.org/drawingml/2006/main">
+              <a:ext uri="{FF2B5EF4-FFF2-40B4-BE49-F238E27FC236}">
+                <a16:creationId xmlns:a16="http://schemas.microsoft.com/office/drawing/2014/main" id="{31F70DAD-4E8A-47D8-94C5-2FE14A9F6C1E}"/>
+              </a:ext>
+            </a:extLst>
+          </p:cNvPr>
+          <p:cNvSpPr>
+            <a:spLocks xmlns:a="http://schemas.openxmlformats.org/drawingml/2006/main" noGrp="1"/>
+          </p:cNvSpPr>
+          <p:nvPr/>
+        </p:nvSpPr>
+        <p:spPr>
+          <a:xfrm xmlns:a="http://schemas.openxmlformats.org/drawingml/2006/main">
+            <a:off x="8382000" y="4238625"/>
+            <a:ext cx="1143000" cy="381000"/>
+          </a:xfrm>
+          <a:prstGeom xmlns:a="http://schemas.openxmlformats.org/drawingml/2006/main" prst="rect">
+            <a:avLst/>
+          </a:prstGeom>
+          <a:noFill xmlns:a="http://schemas.openxmlformats.org/drawingml/2006/main"/>
+          <a:ln xmlns:a="http://schemas.openxmlformats.org/drawingml/2006/main" w="0">
+            <a:noFill/>
+          </a:ln>
+        </p:spPr>
+        <p:txBody>
+          <a:bodyPr xmlns:a="http://schemas.openxmlformats.org/drawingml/2006/main" lIns="0" tIns="0" rIns="0" bIns="0" anchor="ctr">
+            <a:noAutofit/>
+          </a:bodyPr>
+          <a:lstStyle xmlns:a="http://schemas.openxmlformats.org/drawingml/2006/main"/>
+          <a:p xmlns:a="http://schemas.openxmlformats.org/drawingml/2006/main">
+            <a:pPr algn="ctr">
+              <a:defRPr sz="1950" b="1">
+                <a:solidFill>
+                  <a:srgbClr val="28685E"/>
+                </a:solidFill>
+                <a:latin typeface="Calibri"/>
+                <a:ea typeface="Calibri"/>
+                <a:cs typeface="Calibri"/>
+              </a:defRPr>
+            </a:pPr>
+            <a:r>
+              <a:rPr sz="1950" b="1">
+                <a:solidFill>
+                  <a:srgbClr val="28685E"/>
+                </a:solidFill>
+                <a:latin typeface="Calibri"/>
+                <a:ea typeface="Calibri"/>
+                <a:cs typeface="Calibri"/>
+              </a:rPr>
+              <a:t>Half</a:t>
+            </a:r>
+          </a:p>
+        </p:txBody>
+      </p:sp>
+      <p:sp>
+        <p:nvSpPr>
+          <p:cNvPr id="16" name="phase-disc-2">
+            <a:extLst xmlns:a="http://schemas.openxmlformats.org/drawingml/2006/main">
+              <a:ext uri="{FF2B5EF4-FFF2-40B4-BE49-F238E27FC236}">
+                <a16:creationId xmlns:a16="http://schemas.microsoft.com/office/drawing/2014/main" id="{7DB36434-B234-4F5A-9EA9-DA2F9E655426}"/>
+              </a:ext>
+            </a:extLst>
+          </p:cNvPr>
+          <p:cNvSpPr>
+            <a:spLocks xmlns:a="http://schemas.openxmlformats.org/drawingml/2006/main" noGrp="1"/>
+          </p:cNvSpPr>
+          <p:nvPr/>
+        </p:nvSpPr>
+        <p:spPr>
+          <a:xfrm xmlns:a="http://schemas.openxmlformats.org/drawingml/2006/main">
+            <a:off x="10191750" y="3095625"/>
+            <a:ext cx="952500" cy="952500"/>
+          </a:xfrm>
+          <a:prstGeom xmlns:a="http://schemas.openxmlformats.org/drawingml/2006/main" prst="ellipse">
+            <a:avLst/>
+          </a:prstGeom>
+          <a:solidFill xmlns:a="http://schemas.openxmlformats.org/drawingml/2006/main">
+            <a:srgbClr val="DCE3E1"/>
+          </a:solidFill>
+          <a:ln xmlns:a="http://schemas.openxmlformats.org/drawingml/2006/main" w="9525">
+            <a:solidFill>
+              <a:srgbClr val="50616B"/>
+            </a:solidFill>
+          </a:ln>
+        </p:spPr>
+      </p:sp>
+      <p:sp>
+        <p:nvSpPr>
+          <p:cNvPr id="17" name="phase-label-2">
+            <a:extLst xmlns:a="http://schemas.openxmlformats.org/drawingml/2006/main">
+              <a:ext uri="{FF2B5EF4-FFF2-40B4-BE49-F238E27FC236}">
+                <a16:creationId xmlns:a16="http://schemas.microsoft.com/office/drawing/2014/main" id="{66F4F3A7-E8DE-49C7-ACF3-922D5E1BBD39}"/>
+              </a:ext>
+            </a:extLst>
+          </p:cNvPr>
+          <p:cNvSpPr>
+            <a:spLocks xmlns:a="http://schemas.openxmlformats.org/drawingml/2006/main" noGrp="1"/>
+          </p:cNvSpPr>
+          <p:nvPr/>
+        </p:nvSpPr>
+        <p:spPr>
+          <a:xfrm xmlns:a="http://schemas.openxmlformats.org/drawingml/2006/main">
+            <a:off x="10096500" y="4238625"/>
+            <a:ext cx="1143000" cy="381000"/>
+          </a:xfrm>
+          <a:prstGeom xmlns:a="http://schemas.openxmlformats.org/drawingml/2006/main" prst="rect">
+            <a:avLst/>
+          </a:prstGeom>
+          <a:noFill xmlns:a="http://schemas.openxmlformats.org/drawingml/2006/main"/>
+          <a:ln xmlns:a="http://schemas.openxmlformats.org/drawingml/2006/main" w="0">
+            <a:noFill/>
+          </a:ln>
+        </p:spPr>
+        <p:txBody>
+          <a:bodyPr xmlns:a="http://schemas.openxmlformats.org/drawingml/2006/main" lIns="0" tIns="0" rIns="0" bIns="0" anchor="ctr">
+            <a:noAutofit/>
+          </a:bodyPr>
+          <a:lstStyle xmlns:a="http://schemas.openxmlformats.org/drawingml/2006/main"/>
+          <a:p xmlns:a="http://schemas.openxmlformats.org/drawingml/2006/main">
+            <a:pPr algn="ctr">
+              <a:defRPr sz="1950" b="1">
+                <a:solidFill>
+                  <a:srgbClr val="28685E"/>
+                </a:solidFill>
+                <a:latin typeface="Calibri"/>
+                <a:ea typeface="Calibri"/>
+                <a:cs typeface="Calibri"/>
+              </a:defRPr>
+            </a:pPr>
+            <a:r>
+              <a:rPr sz="1950" b="1">
+                <a:solidFill>
+                  <a:srgbClr val="28685E"/>
+                </a:solidFill>
+                <a:latin typeface="Calibri"/>
+                <a:ea typeface="Calibri"/>
+                <a:cs typeface="Calibri"/>
+              </a:rPr>
+              <a:t>Full</a:t>
+            </a:r>
+          </a:p>
+        </p:txBody>
+      </p:sp>
+      <p:sp>
+        <p:nvSpPr>
+          <p:cNvPr id="18" name="phase-note">
+            <a:extLst xmlns:a="http://schemas.openxmlformats.org/drawingml/2006/main">
+              <a:ext uri="{FF2B5EF4-FFF2-40B4-BE49-F238E27FC236}">
+                <a16:creationId xmlns:a16="http://schemas.microsoft.com/office/drawing/2014/main" id="{DE5AF972-71A1-4471-9612-A97D71C06B92}"/>
+              </a:ext>
+            </a:extLst>
+          </p:cNvPr>
+          <p:cNvSpPr>
+            <a:spLocks xmlns:a="http://schemas.openxmlformats.org/drawingml/2006/main" noGrp="1"/>
+          </p:cNvSpPr>
+          <p:nvPr/>
+        </p:nvSpPr>
+        <p:spPr>
+          <a:xfrm xmlns:a="http://schemas.openxmlformats.org/drawingml/2006/main">
+            <a:off x="6762750" y="4953000"/>
+            <a:ext cx="4381500" cy="400050"/>
+          </a:xfrm>
+          <a:prstGeom xmlns:a="http://schemas.openxmlformats.org/drawingml/2006/main" prst="rect">
+            <a:avLst/>
+          </a:prstGeom>
+          <a:noFill xmlns:a="http://schemas.openxmlformats.org/drawingml/2006/main"/>
+          <a:ln xmlns:a="http://schemas.openxmlformats.org/drawingml/2006/main" w="0">
+            <a:noFill/>
+          </a:ln>
+        </p:spPr>
+        <p:txBody>
+          <a:bodyPr xmlns:a="http://schemas.openxmlformats.org/drawingml/2006/main" lIns="0" tIns="0" rIns="0" bIns="0" anchor="ctr">
+            <a:noAutofit/>
+          </a:bodyPr>
+          <a:lstStyle xmlns:a="http://schemas.openxmlformats.org/drawingml/2006/main"/>
+          <a:p xmlns:a="http://schemas.openxmlformats.org/drawingml/2006/main">
+            <a:pPr algn="ctr">
+              <a:defRPr sz="1650" b="0">
+                <a:solidFill>
+                  <a:srgbClr val="50616B"/>
+                </a:solidFill>
+                <a:latin typeface="Calibri"/>
+                <a:ea typeface="Calibri"/>
+                <a:cs typeface="Calibri"/>
+              </a:defRPr>
+            </a:pPr>
+            <a:r>
+              <a:rPr sz="1650" b="0">
+                <a:solidFill>
+                  <a:srgbClr val="50616B"/>
+                </a:solidFill>
+                <a:latin typeface="Calibri"/>
+                <a:ea typeface="Calibri"/>
+                <a:cs typeface="Calibri"/>
+              </a:rPr>
+              <a:t>View from Earth • schematic</a:t>
             </a:r>
           </a:p>
         </p:txBody>
@@ -6610,7 +9317,7 @@
     <p:bg>
       <p:bgPr>
         <a:solidFill xmlns:a="http://schemas.openxmlformats.org/drawingml/2006/main">
-          <a:srgbClr val="F5F1E8"/>
+          <a:srgbClr val="FAF9F5"/>
         </a:solidFill>
       </p:bgPr>
     </p:bg>
@@ -6639,8 +9346,8 @@
         </p:nvSpPr>
         <p:spPr>
           <a:xfrm xmlns:a="http://schemas.openxmlformats.org/drawingml/2006/main">
-            <a:off x="609600" y="552450"/>
-            <a:ext cx="781050" cy="57150"/>
+            <a:off x="609600" y="733425"/>
+            <a:ext cx="781050" cy="38100"/>
           </a:xfrm>
           <a:prstGeom xmlns:a="http://schemas.openxmlformats.org/drawingml/2006/main" prst="rect">
             <a:avLst/>
@@ -6670,8 +9377,8 @@
         </p:nvSpPr>
         <p:spPr>
           <a:xfrm xmlns:a="http://schemas.openxmlformats.org/drawingml/2006/main">
-            <a:off x="609600" y="762000"/>
-            <a:ext cx="8572500" cy="285750"/>
+            <a:off x="609600" y="342900"/>
+            <a:ext cx="9334500" cy="304800"/>
           </a:xfrm>
           <a:prstGeom xmlns:a="http://schemas.openxmlformats.org/drawingml/2006/main" prst="rect">
             <a:avLst/>
@@ -6683,21 +9390,30 @@
           </a:ln>
         </p:spPr>
         <p:txBody>
-          <a:bodyPr xmlns:a="http://schemas.openxmlformats.org/drawingml/2006/main" lIns="0" tIns="0" rIns="0" bIns="0" anchor="ctr"/>
-          <a:lstStyle xmlns:a="http://schemas.openxmlformats.org/drawingml/2006/main"/>
-          <a:p xmlns:a="http://schemas.openxmlformats.org/drawingml/2006/main">
-            <a:pPr>
-              <a:defRPr sz="1500" b="1">
-                <a:solidFill>
-                  <a:srgbClr val="28685E"/>
-                </a:solidFill>
-              </a:defRPr>
-            </a:pPr>
-            <a:r>
-              <a:rPr sz="1500" b="1">
-                <a:solidFill>
-                  <a:srgbClr val="28685E"/>
-                </a:solidFill>
+          <a:bodyPr xmlns:a="http://schemas.openxmlformats.org/drawingml/2006/main" lIns="0" tIns="0" rIns="0" bIns="0" anchor="ctr">
+            <a:noAutofit/>
+          </a:bodyPr>
+          <a:lstStyle xmlns:a="http://schemas.openxmlformats.org/drawingml/2006/main"/>
+          <a:p xmlns:a="http://schemas.openxmlformats.org/drawingml/2006/main">
+            <a:pPr algn="l">
+              <a:buNone/>
+              <a:defRPr sz="1350" b="1">
+                <a:solidFill>
+                  <a:srgbClr val="28685E"/>
+                </a:solidFill>
+                <a:latin typeface="Calibri"/>
+                <a:ea typeface="Calibri"/>
+                <a:cs typeface="Calibri"/>
+              </a:defRPr>
+            </a:pPr>
+            <a:r>
+              <a:rPr sz="1350" b="1">
+                <a:solidFill>
+                  <a:srgbClr val="28685E"/>
+                </a:solidFill>
+                <a:latin typeface="Calibri"/>
+                <a:ea typeface="Calibri"/>
+                <a:cs typeface="Calibri"/>
               </a:rPr>
               <a:t>MADE BY MATT  /  GROW SCIENCE</a:t>
             </a:r>
@@ -6720,8 +9436,8 @@
         </p:nvSpPr>
         <p:spPr>
           <a:xfrm xmlns:a="http://schemas.openxmlformats.org/drawingml/2006/main">
-            <a:off x="609600" y="1352550"/>
-            <a:ext cx="10972800" cy="952500"/>
+            <a:off x="609600" y="990600"/>
+            <a:ext cx="10972800" cy="1000125"/>
           </a:xfrm>
           <a:prstGeom xmlns:a="http://schemas.openxmlformats.org/drawingml/2006/main" prst="rect">
             <a:avLst/>
@@ -6733,21 +9449,30 @@
           </a:ln>
         </p:spPr>
         <p:txBody>
-          <a:bodyPr xmlns:a="http://schemas.openxmlformats.org/drawingml/2006/main" lIns="0" tIns="0" rIns="0" bIns="0" anchor="ctr"/>
-          <a:lstStyle xmlns:a="http://schemas.openxmlformats.org/drawingml/2006/main"/>
-          <a:p xmlns:a="http://schemas.openxmlformats.org/drawingml/2006/main">
-            <a:pPr>
-              <a:defRPr sz="3750" b="1">
+          <a:bodyPr xmlns:a="http://schemas.openxmlformats.org/drawingml/2006/main" lIns="0" tIns="0" rIns="0" bIns="0" anchor="ctr">
+            <a:noAutofit/>
+          </a:bodyPr>
+          <a:lstStyle xmlns:a="http://schemas.openxmlformats.org/drawingml/2006/main"/>
+          <a:p xmlns:a="http://schemas.openxmlformats.org/drawingml/2006/main">
+            <a:pPr algn="l">
+              <a:buNone/>
+              <a:defRPr sz="3675" b="1">
                 <a:solidFill>
                   <a:srgbClr val="152B3A"/>
                 </a:solidFill>
-              </a:defRPr>
-            </a:pPr>
-            <a:r>
-              <a:rPr sz="3750" b="1">
+                <a:latin typeface="Calibri"/>
+                <a:ea typeface="Calibri"/>
+                <a:cs typeface="Calibri"/>
+              </a:defRPr>
+            </a:pPr>
+            <a:r>
+              <a:rPr sz="3675" b="1">
                 <a:solidFill>
                   <a:srgbClr val="152B3A"/>
                 </a:solidFill>
+                <a:latin typeface="Calibri"/>
+                <a:ea typeface="Calibri"/>
+                <a:cs typeface="Calibri"/>
               </a:rPr>
               <a:t>Pause for a shared check</a:t>
             </a:r>
@@ -6770,14 +9495,14 @@
         </p:nvSpPr>
         <p:spPr>
           <a:xfrm xmlns:a="http://schemas.openxmlformats.org/drawingml/2006/main">
-            <a:off x="609600" y="6219825"/>
+            <a:off x="609600" y="6191250"/>
             <a:ext cx="10972800" cy="9525"/>
           </a:xfrm>
           <a:prstGeom xmlns:a="http://schemas.openxmlformats.org/drawingml/2006/main" prst="rect">
             <a:avLst/>
           </a:prstGeom>
           <a:solidFill xmlns:a="http://schemas.openxmlformats.org/drawingml/2006/main">
-            <a:srgbClr val="DCE7DD"/>
+            <a:srgbClr val="CEDBD3"/>
           </a:solidFill>
           <a:ln xmlns:a="http://schemas.openxmlformats.org/drawingml/2006/main" w="0">
             <a:noFill/>
@@ -6801,8 +9526,8 @@
         </p:nvSpPr>
         <p:spPr>
           <a:xfrm xmlns:a="http://schemas.openxmlformats.org/drawingml/2006/main">
-            <a:off x="609600" y="6381750"/>
-            <a:ext cx="9906000" cy="228600"/>
+            <a:off x="609600" y="6419850"/>
+            <a:ext cx="9525000" cy="219075"/>
           </a:xfrm>
           <a:prstGeom xmlns:a="http://schemas.openxmlformats.org/drawingml/2006/main" prst="rect">
             <a:avLst/>
@@ -6814,21 +9539,30 @@
           </a:ln>
         </p:spPr>
         <p:txBody>
-          <a:bodyPr xmlns:a="http://schemas.openxmlformats.org/drawingml/2006/main" lIns="0" tIns="0" rIns="0" bIns="0" anchor="ctr"/>
-          <a:lstStyle xmlns:a="http://schemas.openxmlformats.org/drawingml/2006/main"/>
-          <a:p xmlns:a="http://schemas.openxmlformats.org/drawingml/2006/main">
-            <a:pPr>
-              <a:defRPr sz="1275" b="0">
+          <a:bodyPr xmlns:a="http://schemas.openxmlformats.org/drawingml/2006/main" lIns="0" tIns="0" rIns="0" bIns="0" anchor="ctr">
+            <a:noAutofit/>
+          </a:bodyPr>
+          <a:lstStyle xmlns:a="http://schemas.openxmlformats.org/drawingml/2006/main"/>
+          <a:p xmlns:a="http://schemas.openxmlformats.org/drawingml/2006/main">
+            <a:pPr algn="l">
+              <a:buNone/>
+              <a:defRPr sz="1200" b="0">
                 <a:solidFill>
                   <a:srgbClr val="50616B"/>
                 </a:solidFill>
-              </a:defRPr>
-            </a:pPr>
-            <a:r>
-              <a:rPr sz="1275" b="0">
+                <a:latin typeface="Calibri"/>
+                <a:ea typeface="Calibri"/>
+                <a:cs typeface="Calibri"/>
+              </a:defRPr>
+            </a:pPr>
+            <a:r>
+              <a:rPr sz="1200" b="0">
                 <a:solidFill>
                   <a:srgbClr val="50616B"/>
                 </a:solidFill>
+                <a:latin typeface="Calibri"/>
+                <a:ea typeface="Calibri"/>
+                <a:cs typeface="Calibri"/>
               </a:rPr>
               <a:t>AUTUMN 1  ·  WEEK 7  ·  LESSON B</a:t>
             </a:r>
@@ -6851,8 +9585,8 @@
         </p:nvSpPr>
         <p:spPr>
           <a:xfrm xmlns:a="http://schemas.openxmlformats.org/drawingml/2006/main">
-            <a:off x="11106150" y="6362700"/>
-            <a:ext cx="476250" cy="238125"/>
+            <a:off x="11106150" y="6400800"/>
+            <a:ext cx="476250" cy="247650"/>
           </a:xfrm>
           <a:prstGeom xmlns:a="http://schemas.openxmlformats.org/drawingml/2006/main" prst="rect">
             <a:avLst/>
@@ -6864,14 +9598,20 @@
           </a:ln>
         </p:spPr>
         <p:txBody>
-          <a:bodyPr xmlns:a="http://schemas.openxmlformats.org/drawingml/2006/main" lIns="0" tIns="0" rIns="0" bIns="0" anchor="ctr"/>
-          <a:lstStyle xmlns:a="http://schemas.openxmlformats.org/drawingml/2006/main"/>
-          <a:p xmlns:a="http://schemas.openxmlformats.org/drawingml/2006/main">
-            <a:pPr>
+          <a:bodyPr xmlns:a="http://schemas.openxmlformats.org/drawingml/2006/main" lIns="0" tIns="0" rIns="0" bIns="0" anchor="ctr">
+            <a:noAutofit/>
+          </a:bodyPr>
+          <a:lstStyle xmlns:a="http://schemas.openxmlformats.org/drawingml/2006/main"/>
+          <a:p xmlns:a="http://schemas.openxmlformats.org/drawingml/2006/main">
+            <a:pPr algn="l">
+              <a:buNone/>
               <a:defRPr sz="1350" b="1">
                 <a:solidFill>
                   <a:srgbClr val="28685E"/>
                 </a:solidFill>
+                <a:latin typeface="Calibri"/>
+                <a:ea typeface="Calibri"/>
+                <a:cs typeface="Calibri"/>
               </a:defRPr>
             </a:pPr>
             <a:r>
@@ -6879,6 +9619,9 @@
                 <a:solidFill>
                   <a:srgbClr val="28685E"/>
                 </a:solidFill>
+                <a:latin typeface="Calibri"/>
+                <a:ea typeface="Calibri"/>
+                <a:cs typeface="Calibri"/>
               </a:rPr>
               <a:t>07</a:t>
             </a:r>
@@ -6901,8 +9644,8 @@
         </p:nvSpPr>
         <p:spPr>
           <a:xfrm xmlns:a="http://schemas.openxmlformats.org/drawingml/2006/main">
-            <a:off x="609600" y="2619375"/>
-            <a:ext cx="10972800" cy="781050"/>
+            <a:off x="1000125" y="2333625"/>
+            <a:ext cx="10382250" cy="1076325"/>
           </a:xfrm>
           <a:prstGeom xmlns:a="http://schemas.openxmlformats.org/drawingml/2006/main" prst="rect">
             <a:avLst/>
@@ -6914,21 +9657,30 @@
           </a:ln>
         </p:spPr>
         <p:txBody>
-          <a:bodyPr xmlns:a="http://schemas.openxmlformats.org/drawingml/2006/main" lIns="0" tIns="0" rIns="0" bIns="0" anchor="ctr"/>
-          <a:lstStyle xmlns:a="http://schemas.openxmlformats.org/drawingml/2006/main"/>
-          <a:p xmlns:a="http://schemas.openxmlformats.org/drawingml/2006/main">
-            <a:pPr>
-              <a:defRPr sz="2550" b="0">
+          <a:bodyPr xmlns:a="http://schemas.openxmlformats.org/drawingml/2006/main" lIns="0" tIns="0" rIns="0" bIns="0" anchor="ctr">
+            <a:noAutofit/>
+          </a:bodyPr>
+          <a:lstStyle xmlns:a="http://schemas.openxmlformats.org/drawingml/2006/main"/>
+          <a:p xmlns:a="http://schemas.openxmlformats.org/drawingml/2006/main">
+            <a:pPr algn="l">
+              <a:buNone/>
+              <a:defRPr sz="2625" b="0">
                 <a:solidFill>
                   <a:srgbClr val="152B3A"/>
                 </a:solidFill>
-              </a:defRPr>
-            </a:pPr>
-            <a:r>
-              <a:rPr sz="2550" b="0">
+                <a:latin typeface="Calibri"/>
+                <a:ea typeface="Calibri"/>
+                <a:cs typeface="Calibri"/>
+              </a:defRPr>
+            </a:pPr>
+            <a:r>
+              <a:rPr sz="2625" b="0">
                 <a:solidFill>
                   <a:srgbClr val="152B3A"/>
                 </a:solidFill>
+                <a:latin typeface="Calibri"/>
+                <a:ea typeface="Calibri"/>
+                <a:cs typeface="Calibri"/>
               </a:rPr>
               <a:t>Ask an adult or chosen partner to use the same viewpoint.</a:t>
             </a:r>
@@ -6951,8 +9703,8 @@
         </p:nvSpPr>
         <p:spPr>
           <a:xfrm xmlns:a="http://schemas.openxmlformats.org/drawingml/2006/main">
-            <a:off x="609600" y="3476625"/>
-            <a:ext cx="10972800" cy="781050"/>
+            <a:off x="1000125" y="3467100"/>
+            <a:ext cx="10382250" cy="1076325"/>
           </a:xfrm>
           <a:prstGeom xmlns:a="http://schemas.openxmlformats.org/drawingml/2006/main" prst="rect">
             <a:avLst/>
@@ -6964,21 +9716,30 @@
           </a:ln>
         </p:spPr>
         <p:txBody>
-          <a:bodyPr xmlns:a="http://schemas.openxmlformats.org/drawingml/2006/main" lIns="0" tIns="0" rIns="0" bIns="0" anchor="ctr"/>
-          <a:lstStyle xmlns:a="http://schemas.openxmlformats.org/drawingml/2006/main"/>
-          <a:p xmlns:a="http://schemas.openxmlformats.org/drawingml/2006/main">
-            <a:pPr>
-              <a:defRPr sz="2550" b="0">
+          <a:bodyPr xmlns:a="http://schemas.openxmlformats.org/drawingml/2006/main" lIns="0" tIns="0" rIns="0" bIns="0" anchor="ctr">
+            <a:noAutofit/>
+          </a:bodyPr>
+          <a:lstStyle xmlns:a="http://schemas.openxmlformats.org/drawingml/2006/main"/>
+          <a:p xmlns:a="http://schemas.openxmlformats.org/drawingml/2006/main">
+            <a:pPr algn="l">
+              <a:buNone/>
+              <a:defRPr sz="2625" b="0">
                 <a:solidFill>
                   <a:srgbClr val="152B3A"/>
                 </a:solidFill>
-              </a:defRPr>
-            </a:pPr>
-            <a:r>
-              <a:rPr sz="2550" b="0">
+                <a:latin typeface="Calibri"/>
+                <a:ea typeface="Calibri"/>
+                <a:cs typeface="Calibri"/>
+              </a:defRPr>
+            </a:pPr>
+            <a:r>
+              <a:rPr sz="2625" b="0">
                 <a:solidFill>
                   <a:srgbClr val="152B3A"/>
                 </a:solidFill>
+                <a:latin typeface="Calibri"/>
+                <a:ea typeface="Calibri"/>
+                <a:cs typeface="Calibri"/>
               </a:rPr>
               <a:t>Check one view against its label.</a:t>
             </a:r>
@@ -7001,8 +9762,8 @@
         </p:nvSpPr>
         <p:spPr>
           <a:xfrm xmlns:a="http://schemas.openxmlformats.org/drawingml/2006/main">
-            <a:off x="609600" y="4333875"/>
-            <a:ext cx="10972800" cy="781050"/>
+            <a:off x="1000125" y="4600575"/>
+            <a:ext cx="10382250" cy="1076325"/>
           </a:xfrm>
           <a:prstGeom xmlns:a="http://schemas.openxmlformats.org/drawingml/2006/main" prst="rect">
             <a:avLst/>
@@ -7014,23 +9775,263 @@
           </a:ln>
         </p:spPr>
         <p:txBody>
-          <a:bodyPr xmlns:a="http://schemas.openxmlformats.org/drawingml/2006/main" lIns="0" tIns="0" rIns="0" bIns="0" anchor="ctr"/>
-          <a:lstStyle xmlns:a="http://schemas.openxmlformats.org/drawingml/2006/main"/>
-          <a:p xmlns:a="http://schemas.openxmlformats.org/drawingml/2006/main">
-            <a:pPr>
-              <a:defRPr sz="2550" b="0">
+          <a:bodyPr xmlns:a="http://schemas.openxmlformats.org/drawingml/2006/main" lIns="0" tIns="0" rIns="0" bIns="0" anchor="ctr">
+            <a:noAutofit/>
+          </a:bodyPr>
+          <a:lstStyle xmlns:a="http://schemas.openxmlformats.org/drawingml/2006/main"/>
+          <a:p xmlns:a="http://schemas.openxmlformats.org/drawingml/2006/main">
+            <a:pPr algn="l">
+              <a:buNone/>
+              <a:defRPr sz="2625" b="0">
                 <a:solidFill>
                   <a:srgbClr val="152B3A"/>
                 </a:solidFill>
-              </a:defRPr>
-            </a:pPr>
-            <a:r>
-              <a:rPr sz="2550" b="0">
+                <a:latin typeface="Calibri"/>
+                <a:ea typeface="Calibri"/>
+                <a:cs typeface="Calibri"/>
+              </a:defRPr>
+            </a:pPr>
+            <a:r>
+              <a:rPr sz="2625" b="0">
                 <a:solidFill>
                   <a:srgbClr val="152B3A"/>
                 </a:solidFill>
+                <a:latin typeface="Calibri"/>
+                <a:ea typeface="Calibri"/>
+                <a:cs typeface="Calibri"/>
               </a:rPr>
               <a:t>Did the ball change shape, or the visible lit part?</a:t>
+            </a:r>
+          </a:p>
+        </p:txBody>
+      </p:sp>
+      <p:sp>
+        <p:nvSpPr>
+          <p:cNvPr id="11" name="cue-0">
+            <a:extLst xmlns:a="http://schemas.openxmlformats.org/drawingml/2006/main">
+              <a:ext uri="{FF2B5EF4-FFF2-40B4-BE49-F238E27FC236}">
+                <a16:creationId xmlns:a16="http://schemas.microsoft.com/office/drawing/2014/main" id="{C9530350-4F1E-4079-9C5A-F180DD0B256D}"/>
+              </a:ext>
+            </a:extLst>
+          </p:cNvPr>
+          <p:cNvSpPr>
+            <a:spLocks xmlns:a="http://schemas.openxmlformats.org/drawingml/2006/main" noGrp="1"/>
+          </p:cNvSpPr>
+          <p:nvPr/>
+        </p:nvSpPr>
+        <p:spPr>
+          <a:xfrm xmlns:a="http://schemas.openxmlformats.org/drawingml/2006/main">
+            <a:off x="609600" y="2362200"/>
+            <a:ext cx="323850" cy="323850"/>
+          </a:xfrm>
+          <a:prstGeom xmlns:a="http://schemas.openxmlformats.org/drawingml/2006/main" prst="rect">
+            <a:avLst/>
+          </a:prstGeom>
+          <a:noFill xmlns:a="http://schemas.openxmlformats.org/drawingml/2006/main"/>
+          <a:ln xmlns:a="http://schemas.openxmlformats.org/drawingml/2006/main" w="0">
+            <a:noFill/>
+          </a:ln>
+        </p:spPr>
+        <p:txBody>
+          <a:bodyPr xmlns:a="http://schemas.openxmlformats.org/drawingml/2006/main" lIns="0" tIns="0" rIns="0" bIns="0" anchor="ctr">
+            <a:noAutofit/>
+          </a:bodyPr>
+          <a:lstStyle xmlns:a="http://schemas.openxmlformats.org/drawingml/2006/main"/>
+          <a:p xmlns:a="http://schemas.openxmlformats.org/drawingml/2006/main">
+            <a:pPr algn="l">
+              <a:defRPr sz="1350" b="1">
+                <a:solidFill>
+                  <a:srgbClr val="28685E"/>
+                </a:solidFill>
+                <a:latin typeface="Calibri"/>
+                <a:ea typeface="Calibri"/>
+                <a:cs typeface="Calibri"/>
+              </a:defRPr>
+            </a:pPr>
+            <a:r>
+              <a:rPr sz="1350" b="1">
+                <a:solidFill>
+                  <a:srgbClr val="28685E"/>
+                </a:solidFill>
+                <a:latin typeface="Calibri"/>
+                <a:ea typeface="Calibri"/>
+                <a:cs typeface="Calibri"/>
+              </a:rPr>
+              <a:t>01</a:t>
+            </a:r>
+          </a:p>
+        </p:txBody>
+      </p:sp>
+      <p:sp>
+        <p:nvSpPr>
+          <p:cNvPr id="12" name="row-rule-0">
+            <a:extLst xmlns:a="http://schemas.openxmlformats.org/drawingml/2006/main">
+              <a:ext uri="{FF2B5EF4-FFF2-40B4-BE49-F238E27FC236}">
+                <a16:creationId xmlns:a16="http://schemas.microsoft.com/office/drawing/2014/main" id="{446DF5CF-3B7C-4292-BA2A-5E4E6AEB1034}"/>
+              </a:ext>
+            </a:extLst>
+          </p:cNvPr>
+          <p:cNvSpPr>
+            <a:spLocks xmlns:a="http://schemas.openxmlformats.org/drawingml/2006/main" noGrp="1"/>
+          </p:cNvSpPr>
+          <p:nvPr/>
+        </p:nvSpPr>
+        <p:spPr>
+          <a:xfrm xmlns:a="http://schemas.openxmlformats.org/drawingml/2006/main">
+            <a:off x="1000125" y="3419475"/>
+            <a:ext cx="10334625" cy="0"/>
+          </a:xfrm>
+          <a:prstGeom xmlns:a="http://schemas.openxmlformats.org/drawingml/2006/main" prst="line">
+            <a:avLst/>
+          </a:prstGeom>
+          <a:noFill xmlns:a="http://schemas.openxmlformats.org/drawingml/2006/main"/>
+          <a:ln xmlns:a="http://schemas.openxmlformats.org/drawingml/2006/main" w="9525">
+            <a:solidFill>
+              <a:srgbClr val="CEDBD3"/>
+            </a:solidFill>
+          </a:ln>
+        </p:spPr>
+      </p:sp>
+      <p:sp>
+        <p:nvSpPr>
+          <p:cNvPr id="13" name="cue-1">
+            <a:extLst xmlns:a="http://schemas.openxmlformats.org/drawingml/2006/main">
+              <a:ext uri="{FF2B5EF4-FFF2-40B4-BE49-F238E27FC236}">
+                <a16:creationId xmlns:a16="http://schemas.microsoft.com/office/drawing/2014/main" id="{1367B181-F551-48CA-BFE3-BA2C17197DB6}"/>
+              </a:ext>
+            </a:extLst>
+          </p:cNvPr>
+          <p:cNvSpPr>
+            <a:spLocks xmlns:a="http://schemas.openxmlformats.org/drawingml/2006/main" noGrp="1"/>
+          </p:cNvSpPr>
+          <p:nvPr/>
+        </p:nvSpPr>
+        <p:spPr>
+          <a:xfrm xmlns:a="http://schemas.openxmlformats.org/drawingml/2006/main">
+            <a:off x="609600" y="3495675"/>
+            <a:ext cx="323850" cy="323850"/>
+          </a:xfrm>
+          <a:prstGeom xmlns:a="http://schemas.openxmlformats.org/drawingml/2006/main" prst="rect">
+            <a:avLst/>
+          </a:prstGeom>
+          <a:noFill xmlns:a="http://schemas.openxmlformats.org/drawingml/2006/main"/>
+          <a:ln xmlns:a="http://schemas.openxmlformats.org/drawingml/2006/main" w="0">
+            <a:noFill/>
+          </a:ln>
+        </p:spPr>
+        <p:txBody>
+          <a:bodyPr xmlns:a="http://schemas.openxmlformats.org/drawingml/2006/main" lIns="0" tIns="0" rIns="0" bIns="0" anchor="ctr">
+            <a:noAutofit/>
+          </a:bodyPr>
+          <a:lstStyle xmlns:a="http://schemas.openxmlformats.org/drawingml/2006/main"/>
+          <a:p xmlns:a="http://schemas.openxmlformats.org/drawingml/2006/main">
+            <a:pPr algn="l">
+              <a:defRPr sz="1350" b="1">
+                <a:solidFill>
+                  <a:srgbClr val="28685E"/>
+                </a:solidFill>
+                <a:latin typeface="Calibri"/>
+                <a:ea typeface="Calibri"/>
+                <a:cs typeface="Calibri"/>
+              </a:defRPr>
+            </a:pPr>
+            <a:r>
+              <a:rPr sz="1350" b="1">
+                <a:solidFill>
+                  <a:srgbClr val="28685E"/>
+                </a:solidFill>
+                <a:latin typeface="Calibri"/>
+                <a:ea typeface="Calibri"/>
+                <a:cs typeface="Calibri"/>
+              </a:rPr>
+              <a:t>02</a:t>
+            </a:r>
+          </a:p>
+        </p:txBody>
+      </p:sp>
+      <p:sp>
+        <p:nvSpPr>
+          <p:cNvPr id="14" name="row-rule-1">
+            <a:extLst xmlns:a="http://schemas.openxmlformats.org/drawingml/2006/main">
+              <a:ext uri="{FF2B5EF4-FFF2-40B4-BE49-F238E27FC236}">
+                <a16:creationId xmlns:a16="http://schemas.microsoft.com/office/drawing/2014/main" id="{A960B624-8F8F-49FC-995E-3E4EF297180D}"/>
+              </a:ext>
+            </a:extLst>
+          </p:cNvPr>
+          <p:cNvSpPr>
+            <a:spLocks xmlns:a="http://schemas.openxmlformats.org/drawingml/2006/main" noGrp="1"/>
+          </p:cNvSpPr>
+          <p:nvPr/>
+        </p:nvSpPr>
+        <p:spPr>
+          <a:xfrm xmlns:a="http://schemas.openxmlformats.org/drawingml/2006/main">
+            <a:off x="1000125" y="4552950"/>
+            <a:ext cx="10334625" cy="0"/>
+          </a:xfrm>
+          <a:prstGeom xmlns:a="http://schemas.openxmlformats.org/drawingml/2006/main" prst="line">
+            <a:avLst/>
+          </a:prstGeom>
+          <a:noFill xmlns:a="http://schemas.openxmlformats.org/drawingml/2006/main"/>
+          <a:ln xmlns:a="http://schemas.openxmlformats.org/drawingml/2006/main" w="9525">
+            <a:solidFill>
+              <a:srgbClr val="CEDBD3"/>
+            </a:solidFill>
+          </a:ln>
+        </p:spPr>
+      </p:sp>
+      <p:sp>
+        <p:nvSpPr>
+          <p:cNvPr id="15" name="cue-2">
+            <a:extLst xmlns:a="http://schemas.openxmlformats.org/drawingml/2006/main">
+              <a:ext uri="{FF2B5EF4-FFF2-40B4-BE49-F238E27FC236}">
+                <a16:creationId xmlns:a16="http://schemas.microsoft.com/office/drawing/2014/main" id="{350468BB-90A5-48DD-BF15-A4E15326704F}"/>
+              </a:ext>
+            </a:extLst>
+          </p:cNvPr>
+          <p:cNvSpPr>
+            <a:spLocks xmlns:a="http://schemas.openxmlformats.org/drawingml/2006/main" noGrp="1"/>
+          </p:cNvSpPr>
+          <p:nvPr/>
+        </p:nvSpPr>
+        <p:spPr>
+          <a:xfrm xmlns:a="http://schemas.openxmlformats.org/drawingml/2006/main">
+            <a:off x="609600" y="4629150"/>
+            <a:ext cx="323850" cy="323850"/>
+          </a:xfrm>
+          <a:prstGeom xmlns:a="http://schemas.openxmlformats.org/drawingml/2006/main" prst="rect">
+            <a:avLst/>
+          </a:prstGeom>
+          <a:noFill xmlns:a="http://schemas.openxmlformats.org/drawingml/2006/main"/>
+          <a:ln xmlns:a="http://schemas.openxmlformats.org/drawingml/2006/main" w="0">
+            <a:noFill/>
+          </a:ln>
+        </p:spPr>
+        <p:txBody>
+          <a:bodyPr xmlns:a="http://schemas.openxmlformats.org/drawingml/2006/main" lIns="0" tIns="0" rIns="0" bIns="0" anchor="ctr">
+            <a:noAutofit/>
+          </a:bodyPr>
+          <a:lstStyle xmlns:a="http://schemas.openxmlformats.org/drawingml/2006/main"/>
+          <a:p xmlns:a="http://schemas.openxmlformats.org/drawingml/2006/main">
+            <a:pPr algn="l">
+              <a:defRPr sz="1350" b="1">
+                <a:solidFill>
+                  <a:srgbClr val="28685E"/>
+                </a:solidFill>
+                <a:latin typeface="Calibri"/>
+                <a:ea typeface="Calibri"/>
+                <a:cs typeface="Calibri"/>
+              </a:defRPr>
+            </a:pPr>
+            <a:r>
+              <a:rPr sz="1350" b="1">
+                <a:solidFill>
+                  <a:srgbClr val="28685E"/>
+                </a:solidFill>
+                <a:latin typeface="Calibri"/>
+                <a:ea typeface="Calibri"/>
+                <a:cs typeface="Calibri"/>
+              </a:rPr>
+              <a:t>03</a:t>
             </a:r>
           </a:p>
         </p:txBody>
@@ -7051,7 +10052,7 @@
     <p:bg>
       <p:bgPr>
         <a:solidFill xmlns:a="http://schemas.openxmlformats.org/drawingml/2006/main">
-          <a:srgbClr val="F5F1E8"/>
+          <a:srgbClr val="FAF9F5"/>
         </a:solidFill>
       </p:bgPr>
     </p:bg>
@@ -7080,8 +10081,8 @@
         </p:nvSpPr>
         <p:spPr>
           <a:xfrm xmlns:a="http://schemas.openxmlformats.org/drawingml/2006/main">
-            <a:off x="609600" y="552450"/>
-            <a:ext cx="781050" cy="57150"/>
+            <a:off x="609600" y="733425"/>
+            <a:ext cx="781050" cy="38100"/>
           </a:xfrm>
           <a:prstGeom xmlns:a="http://schemas.openxmlformats.org/drawingml/2006/main" prst="rect">
             <a:avLst/>
@@ -7111,8 +10112,8 @@
         </p:nvSpPr>
         <p:spPr>
           <a:xfrm xmlns:a="http://schemas.openxmlformats.org/drawingml/2006/main">
-            <a:off x="609600" y="762000"/>
-            <a:ext cx="8572500" cy="285750"/>
+            <a:off x="609600" y="342900"/>
+            <a:ext cx="9334500" cy="304800"/>
           </a:xfrm>
           <a:prstGeom xmlns:a="http://schemas.openxmlformats.org/drawingml/2006/main" prst="rect">
             <a:avLst/>
@@ -7124,21 +10125,30 @@
           </a:ln>
         </p:spPr>
         <p:txBody>
-          <a:bodyPr xmlns:a="http://schemas.openxmlformats.org/drawingml/2006/main" lIns="0" tIns="0" rIns="0" bIns="0" anchor="ctr"/>
-          <a:lstStyle xmlns:a="http://schemas.openxmlformats.org/drawingml/2006/main"/>
-          <a:p xmlns:a="http://schemas.openxmlformats.org/drawingml/2006/main">
-            <a:pPr>
-              <a:defRPr sz="1500" b="1">
-                <a:solidFill>
-                  <a:srgbClr val="28685E"/>
-                </a:solidFill>
-              </a:defRPr>
-            </a:pPr>
-            <a:r>
-              <a:rPr sz="1500" b="1">
-                <a:solidFill>
-                  <a:srgbClr val="28685E"/>
-                </a:solidFill>
+          <a:bodyPr xmlns:a="http://schemas.openxmlformats.org/drawingml/2006/main" lIns="0" tIns="0" rIns="0" bIns="0" anchor="ctr">
+            <a:noAutofit/>
+          </a:bodyPr>
+          <a:lstStyle xmlns:a="http://schemas.openxmlformats.org/drawingml/2006/main"/>
+          <a:p xmlns:a="http://schemas.openxmlformats.org/drawingml/2006/main">
+            <a:pPr algn="l">
+              <a:buNone/>
+              <a:defRPr sz="1350" b="1">
+                <a:solidFill>
+                  <a:srgbClr val="28685E"/>
+                </a:solidFill>
+                <a:latin typeface="Calibri"/>
+                <a:ea typeface="Calibri"/>
+                <a:cs typeface="Calibri"/>
+              </a:defRPr>
+            </a:pPr>
+            <a:r>
+              <a:rPr sz="1350" b="1">
+                <a:solidFill>
+                  <a:srgbClr val="28685E"/>
+                </a:solidFill>
+                <a:latin typeface="Calibri"/>
+                <a:ea typeface="Calibri"/>
+                <a:cs typeface="Calibri"/>
               </a:rPr>
               <a:t>MADE BY MATT  /  GROW SCIENCE</a:t>
             </a:r>
@@ -7161,8 +10171,8 @@
         </p:nvSpPr>
         <p:spPr>
           <a:xfrm xmlns:a="http://schemas.openxmlformats.org/drawingml/2006/main">
-            <a:off x="609600" y="1352550"/>
-            <a:ext cx="10972800" cy="952500"/>
+            <a:off x="609600" y="990600"/>
+            <a:ext cx="10972800" cy="1000125"/>
           </a:xfrm>
           <a:prstGeom xmlns:a="http://schemas.openxmlformats.org/drawingml/2006/main" prst="rect">
             <a:avLst/>
@@ -7174,21 +10184,30 @@
           </a:ln>
         </p:spPr>
         <p:txBody>
-          <a:bodyPr xmlns:a="http://schemas.openxmlformats.org/drawingml/2006/main" lIns="0" tIns="0" rIns="0" bIns="0" anchor="ctr"/>
-          <a:lstStyle xmlns:a="http://schemas.openxmlformats.org/drawingml/2006/main"/>
-          <a:p xmlns:a="http://schemas.openxmlformats.org/drawingml/2006/main">
-            <a:pPr>
-              <a:defRPr sz="3750" b="1">
+          <a:bodyPr xmlns:a="http://schemas.openxmlformats.org/drawingml/2006/main" lIns="0" tIns="0" rIns="0" bIns="0" anchor="ctr">
+            <a:noAutofit/>
+          </a:bodyPr>
+          <a:lstStyle xmlns:a="http://schemas.openxmlformats.org/drawingml/2006/main"/>
+          <a:p xmlns:a="http://schemas.openxmlformats.org/drawingml/2006/main">
+            <a:pPr algn="l">
+              <a:buNone/>
+              <a:defRPr sz="3675" b="1">
                 <a:solidFill>
                   <a:srgbClr val="152B3A"/>
                 </a:solidFill>
-              </a:defRPr>
-            </a:pPr>
-            <a:r>
-              <a:rPr sz="3750" b="1">
+                <a:latin typeface="Calibri"/>
+                <a:ea typeface="Calibri"/>
+                <a:cs typeface="Calibri"/>
+              </a:defRPr>
+            </a:pPr>
+            <a:r>
+              <a:rPr sz="3675" b="1">
                 <a:solidFill>
                   <a:srgbClr val="152B3A"/>
                 </a:solidFill>
+                <a:latin typeface="Calibri"/>
+                <a:ea typeface="Calibri"/>
+                <a:cs typeface="Calibri"/>
               </a:rPr>
               <a:t>Correct one label or view</a:t>
             </a:r>
@@ -7211,14 +10230,14 @@
         </p:nvSpPr>
         <p:spPr>
           <a:xfrm xmlns:a="http://schemas.openxmlformats.org/drawingml/2006/main">
-            <a:off x="609600" y="6219825"/>
+            <a:off x="609600" y="6191250"/>
             <a:ext cx="10972800" cy="9525"/>
           </a:xfrm>
           <a:prstGeom xmlns:a="http://schemas.openxmlformats.org/drawingml/2006/main" prst="rect">
             <a:avLst/>
           </a:prstGeom>
           <a:solidFill xmlns:a="http://schemas.openxmlformats.org/drawingml/2006/main">
-            <a:srgbClr val="DCE7DD"/>
+            <a:srgbClr val="CEDBD3"/>
           </a:solidFill>
           <a:ln xmlns:a="http://schemas.openxmlformats.org/drawingml/2006/main" w="0">
             <a:noFill/>
@@ -7242,8 +10261,8 @@
         </p:nvSpPr>
         <p:spPr>
           <a:xfrm xmlns:a="http://schemas.openxmlformats.org/drawingml/2006/main">
-            <a:off x="609600" y="6381750"/>
-            <a:ext cx="9906000" cy="228600"/>
+            <a:off x="609600" y="6419850"/>
+            <a:ext cx="9525000" cy="219075"/>
           </a:xfrm>
           <a:prstGeom xmlns:a="http://schemas.openxmlformats.org/drawingml/2006/main" prst="rect">
             <a:avLst/>
@@ -7255,21 +10274,30 @@
           </a:ln>
         </p:spPr>
         <p:txBody>
-          <a:bodyPr xmlns:a="http://schemas.openxmlformats.org/drawingml/2006/main" lIns="0" tIns="0" rIns="0" bIns="0" anchor="ctr"/>
-          <a:lstStyle xmlns:a="http://schemas.openxmlformats.org/drawingml/2006/main"/>
-          <a:p xmlns:a="http://schemas.openxmlformats.org/drawingml/2006/main">
-            <a:pPr>
-              <a:defRPr sz="1275" b="0">
+          <a:bodyPr xmlns:a="http://schemas.openxmlformats.org/drawingml/2006/main" lIns="0" tIns="0" rIns="0" bIns="0" anchor="ctr">
+            <a:noAutofit/>
+          </a:bodyPr>
+          <a:lstStyle xmlns:a="http://schemas.openxmlformats.org/drawingml/2006/main"/>
+          <a:p xmlns:a="http://schemas.openxmlformats.org/drawingml/2006/main">
+            <a:pPr algn="l">
+              <a:buNone/>
+              <a:defRPr sz="1200" b="0">
                 <a:solidFill>
                   <a:srgbClr val="50616B"/>
                 </a:solidFill>
-              </a:defRPr>
-            </a:pPr>
-            <a:r>
-              <a:rPr sz="1275" b="0">
+                <a:latin typeface="Calibri"/>
+                <a:ea typeface="Calibri"/>
+                <a:cs typeface="Calibri"/>
+              </a:defRPr>
+            </a:pPr>
+            <a:r>
+              <a:rPr sz="1200" b="0">
                 <a:solidFill>
                   <a:srgbClr val="50616B"/>
                 </a:solidFill>
+                <a:latin typeface="Calibri"/>
+                <a:ea typeface="Calibri"/>
+                <a:cs typeface="Calibri"/>
               </a:rPr>
               <a:t>AUTUMN 1  ·  WEEK 7  ·  LESSON B</a:t>
             </a:r>
@@ -7292,8 +10320,8 @@
         </p:nvSpPr>
         <p:spPr>
           <a:xfrm xmlns:a="http://schemas.openxmlformats.org/drawingml/2006/main">
-            <a:off x="11106150" y="6362700"/>
-            <a:ext cx="476250" cy="238125"/>
+            <a:off x="11106150" y="6400800"/>
+            <a:ext cx="476250" cy="247650"/>
           </a:xfrm>
           <a:prstGeom xmlns:a="http://schemas.openxmlformats.org/drawingml/2006/main" prst="rect">
             <a:avLst/>
@@ -7305,14 +10333,20 @@
           </a:ln>
         </p:spPr>
         <p:txBody>
-          <a:bodyPr xmlns:a="http://schemas.openxmlformats.org/drawingml/2006/main" lIns="0" tIns="0" rIns="0" bIns="0" anchor="ctr"/>
-          <a:lstStyle xmlns:a="http://schemas.openxmlformats.org/drawingml/2006/main"/>
-          <a:p xmlns:a="http://schemas.openxmlformats.org/drawingml/2006/main">
-            <a:pPr>
+          <a:bodyPr xmlns:a="http://schemas.openxmlformats.org/drawingml/2006/main" lIns="0" tIns="0" rIns="0" bIns="0" anchor="ctr">
+            <a:noAutofit/>
+          </a:bodyPr>
+          <a:lstStyle xmlns:a="http://schemas.openxmlformats.org/drawingml/2006/main"/>
+          <a:p xmlns:a="http://schemas.openxmlformats.org/drawingml/2006/main">
+            <a:pPr algn="l">
+              <a:buNone/>
               <a:defRPr sz="1350" b="1">
                 <a:solidFill>
                   <a:srgbClr val="28685E"/>
                 </a:solidFill>
+                <a:latin typeface="Calibri"/>
+                <a:ea typeface="Calibri"/>
+                <a:cs typeface="Calibri"/>
               </a:defRPr>
             </a:pPr>
             <a:r>
@@ -7320,6 +10354,9 @@
                 <a:solidFill>
                   <a:srgbClr val="28685E"/>
                 </a:solidFill>
+                <a:latin typeface="Calibri"/>
+                <a:ea typeface="Calibri"/>
+                <a:cs typeface="Calibri"/>
               </a:rPr>
               <a:t>08</a:t>
             </a:r>
@@ -7342,8 +10379,8 @@
         </p:nvSpPr>
         <p:spPr>
           <a:xfrm xmlns:a="http://schemas.openxmlformats.org/drawingml/2006/main">
-            <a:off x="609600" y="2619375"/>
-            <a:ext cx="10972800" cy="781050"/>
+            <a:off x="1000125" y="2333625"/>
+            <a:ext cx="10382250" cy="1076325"/>
           </a:xfrm>
           <a:prstGeom xmlns:a="http://schemas.openxmlformats.org/drawingml/2006/main" prst="rect">
             <a:avLst/>
@@ -7355,21 +10392,30 @@
           </a:ln>
         </p:spPr>
         <p:txBody>
-          <a:bodyPr xmlns:a="http://schemas.openxmlformats.org/drawingml/2006/main" lIns="0" tIns="0" rIns="0" bIns="0" anchor="ctr"/>
-          <a:lstStyle xmlns:a="http://schemas.openxmlformats.org/drawingml/2006/main"/>
-          <a:p xmlns:a="http://schemas.openxmlformats.org/drawingml/2006/main">
-            <a:pPr>
-              <a:defRPr sz="2550" b="0">
+          <a:bodyPr xmlns:a="http://schemas.openxmlformats.org/drawingml/2006/main" lIns="0" tIns="0" rIns="0" bIns="0" anchor="ctr">
+            <a:noAutofit/>
+          </a:bodyPr>
+          <a:lstStyle xmlns:a="http://schemas.openxmlformats.org/drawingml/2006/main"/>
+          <a:p xmlns:a="http://schemas.openxmlformats.org/drawingml/2006/main">
+            <a:pPr algn="l">
+              <a:buNone/>
+              <a:defRPr sz="2625" b="0">
                 <a:solidFill>
                   <a:srgbClr val="152B3A"/>
                 </a:solidFill>
-              </a:defRPr>
-            </a:pPr>
-            <a:r>
-              <a:rPr sz="2550" b="0">
+                <a:latin typeface="Calibri"/>
+                <a:ea typeface="Calibri"/>
+                <a:cs typeface="Calibri"/>
+              </a:defRPr>
+            </a:pPr>
+            <a:r>
+              <a:rPr sz="2625" b="0">
                 <a:solidFill>
                   <a:srgbClr val="152B3A"/>
                 </a:solidFill>
+                <a:latin typeface="Calibri"/>
+                <a:ea typeface="Calibri"/>
+                <a:cs typeface="Calibri"/>
               </a:rPr>
               <a:t>Correct one phase label or shaded circle.</a:t>
             </a:r>
@@ -7392,8 +10438,8 @@
         </p:nvSpPr>
         <p:spPr>
           <a:xfrm xmlns:a="http://schemas.openxmlformats.org/drawingml/2006/main">
-            <a:off x="609600" y="3476625"/>
-            <a:ext cx="10972800" cy="781050"/>
+            <a:off x="1000125" y="3467100"/>
+            <a:ext cx="10382250" cy="1076325"/>
           </a:xfrm>
           <a:prstGeom xmlns:a="http://schemas.openxmlformats.org/drawingml/2006/main" prst="rect">
             <a:avLst/>
@@ -7405,21 +10451,30 @@
           </a:ln>
         </p:spPr>
         <p:txBody>
-          <a:bodyPr xmlns:a="http://schemas.openxmlformats.org/drawingml/2006/main" lIns="0" tIns="0" rIns="0" bIns="0" anchor="ctr"/>
-          <a:lstStyle xmlns:a="http://schemas.openxmlformats.org/drawingml/2006/main"/>
-          <a:p xmlns:a="http://schemas.openxmlformats.org/drawingml/2006/main">
-            <a:pPr>
-              <a:defRPr sz="2550" b="0">
+          <a:bodyPr xmlns:a="http://schemas.openxmlformats.org/drawingml/2006/main" lIns="0" tIns="0" rIns="0" bIns="0" anchor="ctr">
+            <a:noAutofit/>
+          </a:bodyPr>
+          <a:lstStyle xmlns:a="http://schemas.openxmlformats.org/drawingml/2006/main"/>
+          <a:p xmlns:a="http://schemas.openxmlformats.org/drawingml/2006/main">
+            <a:pPr algn="l">
+              <a:buNone/>
+              <a:defRPr sz="2625" b="0">
                 <a:solidFill>
                   <a:srgbClr val="152B3A"/>
                 </a:solidFill>
-              </a:defRPr>
-            </a:pPr>
-            <a:r>
-              <a:rPr sz="2550" b="0">
+                <a:latin typeface="Calibri"/>
+                <a:ea typeface="Calibri"/>
+                <a:cs typeface="Calibri"/>
+              </a:defRPr>
+            </a:pPr>
+            <a:r>
+              <a:rPr sz="2625" b="0">
                 <a:solidFill>
                   <a:srgbClr val="152B3A"/>
                 </a:solidFill>
+                <a:latin typeface="Calibri"/>
+                <a:ea typeface="Calibri"/>
+                <a:cs typeface="Calibri"/>
               </a:rPr>
               <a:t>Explain what your model showed.</a:t>
             </a:r>
@@ -7442,8 +10497,8 @@
         </p:nvSpPr>
         <p:spPr>
           <a:xfrm xmlns:a="http://schemas.openxmlformats.org/drawingml/2006/main">
-            <a:off x="609600" y="4333875"/>
-            <a:ext cx="10972800" cy="781050"/>
+            <a:off x="1000125" y="4600575"/>
+            <a:ext cx="10382250" cy="1076325"/>
           </a:xfrm>
           <a:prstGeom xmlns:a="http://schemas.openxmlformats.org/drawingml/2006/main" prst="rect">
             <a:avLst/>
@@ -7455,23 +10510,263 @@
           </a:ln>
         </p:spPr>
         <p:txBody>
-          <a:bodyPr xmlns:a="http://schemas.openxmlformats.org/drawingml/2006/main" lIns="0" tIns="0" rIns="0" bIns="0" anchor="ctr"/>
-          <a:lstStyle xmlns:a="http://schemas.openxmlformats.org/drawingml/2006/main"/>
-          <a:p xmlns:a="http://schemas.openxmlformats.org/drawingml/2006/main">
-            <a:pPr>
-              <a:defRPr sz="2550" b="0">
+          <a:bodyPr xmlns:a="http://schemas.openxmlformats.org/drawingml/2006/main" lIns="0" tIns="0" rIns="0" bIns="0" anchor="ctr">
+            <a:noAutofit/>
+          </a:bodyPr>
+          <a:lstStyle xmlns:a="http://schemas.openxmlformats.org/drawingml/2006/main"/>
+          <a:p xmlns:a="http://schemas.openxmlformats.org/drawingml/2006/main">
+            <a:pPr algn="l">
+              <a:buNone/>
+              <a:defRPr sz="2625" b="0">
                 <a:solidFill>
                   <a:srgbClr val="152B3A"/>
                 </a:solidFill>
-              </a:defRPr>
-            </a:pPr>
-            <a:r>
-              <a:rPr sz="2550" b="0">
+                <a:latin typeface="Calibri"/>
+                <a:ea typeface="Calibri"/>
+                <a:cs typeface="Calibri"/>
+              </a:defRPr>
+            </a:pPr>
+            <a:r>
+              <a:rPr sz="2625" b="0">
                 <a:solidFill>
                   <a:srgbClr val="152B3A"/>
                 </a:solidFill>
+                <a:latin typeface="Calibri"/>
+                <a:ea typeface="Calibri"/>
+                <a:cs typeface="Calibri"/>
               </a:rPr>
               <a:t>Add a model limit if this is your stretch route.</a:t>
+            </a:r>
+          </a:p>
+        </p:txBody>
+      </p:sp>
+      <p:sp>
+        <p:nvSpPr>
+          <p:cNvPr id="11" name="cue-0">
+            <a:extLst xmlns:a="http://schemas.openxmlformats.org/drawingml/2006/main">
+              <a:ext uri="{FF2B5EF4-FFF2-40B4-BE49-F238E27FC236}">
+                <a16:creationId xmlns:a16="http://schemas.microsoft.com/office/drawing/2014/main" id="{0412C596-A3BB-4E6B-A8DF-BBD1D318888A}"/>
+              </a:ext>
+            </a:extLst>
+          </p:cNvPr>
+          <p:cNvSpPr>
+            <a:spLocks xmlns:a="http://schemas.openxmlformats.org/drawingml/2006/main" noGrp="1"/>
+          </p:cNvSpPr>
+          <p:nvPr/>
+        </p:nvSpPr>
+        <p:spPr>
+          <a:xfrm xmlns:a="http://schemas.openxmlformats.org/drawingml/2006/main">
+            <a:off x="609600" y="2362200"/>
+            <a:ext cx="323850" cy="323850"/>
+          </a:xfrm>
+          <a:prstGeom xmlns:a="http://schemas.openxmlformats.org/drawingml/2006/main" prst="rect">
+            <a:avLst/>
+          </a:prstGeom>
+          <a:noFill xmlns:a="http://schemas.openxmlformats.org/drawingml/2006/main"/>
+          <a:ln xmlns:a="http://schemas.openxmlformats.org/drawingml/2006/main" w="0">
+            <a:noFill/>
+          </a:ln>
+        </p:spPr>
+        <p:txBody>
+          <a:bodyPr xmlns:a="http://schemas.openxmlformats.org/drawingml/2006/main" lIns="0" tIns="0" rIns="0" bIns="0" anchor="ctr">
+            <a:noAutofit/>
+          </a:bodyPr>
+          <a:lstStyle xmlns:a="http://schemas.openxmlformats.org/drawingml/2006/main"/>
+          <a:p xmlns:a="http://schemas.openxmlformats.org/drawingml/2006/main">
+            <a:pPr algn="l">
+              <a:defRPr sz="1350" b="1">
+                <a:solidFill>
+                  <a:srgbClr val="28685E"/>
+                </a:solidFill>
+                <a:latin typeface="Calibri"/>
+                <a:ea typeface="Calibri"/>
+                <a:cs typeface="Calibri"/>
+              </a:defRPr>
+            </a:pPr>
+            <a:r>
+              <a:rPr sz="1350" b="1">
+                <a:solidFill>
+                  <a:srgbClr val="28685E"/>
+                </a:solidFill>
+                <a:latin typeface="Calibri"/>
+                <a:ea typeface="Calibri"/>
+                <a:cs typeface="Calibri"/>
+              </a:rPr>
+              <a:t>01</a:t>
+            </a:r>
+          </a:p>
+        </p:txBody>
+      </p:sp>
+      <p:sp>
+        <p:nvSpPr>
+          <p:cNvPr id="12" name="row-rule-0">
+            <a:extLst xmlns:a="http://schemas.openxmlformats.org/drawingml/2006/main">
+              <a:ext uri="{FF2B5EF4-FFF2-40B4-BE49-F238E27FC236}">
+                <a16:creationId xmlns:a16="http://schemas.microsoft.com/office/drawing/2014/main" id="{E909942B-9CED-4D88-8C90-D2C881F3F248}"/>
+              </a:ext>
+            </a:extLst>
+          </p:cNvPr>
+          <p:cNvSpPr>
+            <a:spLocks xmlns:a="http://schemas.openxmlformats.org/drawingml/2006/main" noGrp="1"/>
+          </p:cNvSpPr>
+          <p:nvPr/>
+        </p:nvSpPr>
+        <p:spPr>
+          <a:xfrm xmlns:a="http://schemas.openxmlformats.org/drawingml/2006/main">
+            <a:off x="1000125" y="3419475"/>
+            <a:ext cx="10334625" cy="0"/>
+          </a:xfrm>
+          <a:prstGeom xmlns:a="http://schemas.openxmlformats.org/drawingml/2006/main" prst="line">
+            <a:avLst/>
+          </a:prstGeom>
+          <a:noFill xmlns:a="http://schemas.openxmlformats.org/drawingml/2006/main"/>
+          <a:ln xmlns:a="http://schemas.openxmlformats.org/drawingml/2006/main" w="9525">
+            <a:solidFill>
+              <a:srgbClr val="CEDBD3"/>
+            </a:solidFill>
+          </a:ln>
+        </p:spPr>
+      </p:sp>
+      <p:sp>
+        <p:nvSpPr>
+          <p:cNvPr id="13" name="cue-1">
+            <a:extLst xmlns:a="http://schemas.openxmlformats.org/drawingml/2006/main">
+              <a:ext uri="{FF2B5EF4-FFF2-40B4-BE49-F238E27FC236}">
+                <a16:creationId xmlns:a16="http://schemas.microsoft.com/office/drawing/2014/main" id="{0BE489B7-A95E-4A2B-A6AB-706653BF2F70}"/>
+              </a:ext>
+            </a:extLst>
+          </p:cNvPr>
+          <p:cNvSpPr>
+            <a:spLocks xmlns:a="http://schemas.openxmlformats.org/drawingml/2006/main" noGrp="1"/>
+          </p:cNvSpPr>
+          <p:nvPr/>
+        </p:nvSpPr>
+        <p:spPr>
+          <a:xfrm xmlns:a="http://schemas.openxmlformats.org/drawingml/2006/main">
+            <a:off x="609600" y="3495675"/>
+            <a:ext cx="323850" cy="323850"/>
+          </a:xfrm>
+          <a:prstGeom xmlns:a="http://schemas.openxmlformats.org/drawingml/2006/main" prst="rect">
+            <a:avLst/>
+          </a:prstGeom>
+          <a:noFill xmlns:a="http://schemas.openxmlformats.org/drawingml/2006/main"/>
+          <a:ln xmlns:a="http://schemas.openxmlformats.org/drawingml/2006/main" w="0">
+            <a:noFill/>
+          </a:ln>
+        </p:spPr>
+        <p:txBody>
+          <a:bodyPr xmlns:a="http://schemas.openxmlformats.org/drawingml/2006/main" lIns="0" tIns="0" rIns="0" bIns="0" anchor="ctr">
+            <a:noAutofit/>
+          </a:bodyPr>
+          <a:lstStyle xmlns:a="http://schemas.openxmlformats.org/drawingml/2006/main"/>
+          <a:p xmlns:a="http://schemas.openxmlformats.org/drawingml/2006/main">
+            <a:pPr algn="l">
+              <a:defRPr sz="1350" b="1">
+                <a:solidFill>
+                  <a:srgbClr val="28685E"/>
+                </a:solidFill>
+                <a:latin typeface="Calibri"/>
+                <a:ea typeface="Calibri"/>
+                <a:cs typeface="Calibri"/>
+              </a:defRPr>
+            </a:pPr>
+            <a:r>
+              <a:rPr sz="1350" b="1">
+                <a:solidFill>
+                  <a:srgbClr val="28685E"/>
+                </a:solidFill>
+                <a:latin typeface="Calibri"/>
+                <a:ea typeface="Calibri"/>
+                <a:cs typeface="Calibri"/>
+              </a:rPr>
+              <a:t>02</a:t>
+            </a:r>
+          </a:p>
+        </p:txBody>
+      </p:sp>
+      <p:sp>
+        <p:nvSpPr>
+          <p:cNvPr id="14" name="row-rule-1">
+            <a:extLst xmlns:a="http://schemas.openxmlformats.org/drawingml/2006/main">
+              <a:ext uri="{FF2B5EF4-FFF2-40B4-BE49-F238E27FC236}">
+                <a16:creationId xmlns:a16="http://schemas.microsoft.com/office/drawing/2014/main" id="{59AC5273-3879-4D8F-925C-649581E1D23B}"/>
+              </a:ext>
+            </a:extLst>
+          </p:cNvPr>
+          <p:cNvSpPr>
+            <a:spLocks xmlns:a="http://schemas.openxmlformats.org/drawingml/2006/main" noGrp="1"/>
+          </p:cNvSpPr>
+          <p:nvPr/>
+        </p:nvSpPr>
+        <p:spPr>
+          <a:xfrm xmlns:a="http://schemas.openxmlformats.org/drawingml/2006/main">
+            <a:off x="1000125" y="4552950"/>
+            <a:ext cx="10334625" cy="0"/>
+          </a:xfrm>
+          <a:prstGeom xmlns:a="http://schemas.openxmlformats.org/drawingml/2006/main" prst="line">
+            <a:avLst/>
+          </a:prstGeom>
+          <a:noFill xmlns:a="http://schemas.openxmlformats.org/drawingml/2006/main"/>
+          <a:ln xmlns:a="http://schemas.openxmlformats.org/drawingml/2006/main" w="9525">
+            <a:solidFill>
+              <a:srgbClr val="CEDBD3"/>
+            </a:solidFill>
+          </a:ln>
+        </p:spPr>
+      </p:sp>
+      <p:sp>
+        <p:nvSpPr>
+          <p:cNvPr id="15" name="cue-2">
+            <a:extLst xmlns:a="http://schemas.openxmlformats.org/drawingml/2006/main">
+              <a:ext uri="{FF2B5EF4-FFF2-40B4-BE49-F238E27FC236}">
+                <a16:creationId xmlns:a16="http://schemas.microsoft.com/office/drawing/2014/main" id="{DBF78B63-096C-440E-841D-EA7F141235D2}"/>
+              </a:ext>
+            </a:extLst>
+          </p:cNvPr>
+          <p:cNvSpPr>
+            <a:spLocks xmlns:a="http://schemas.openxmlformats.org/drawingml/2006/main" noGrp="1"/>
+          </p:cNvSpPr>
+          <p:nvPr/>
+        </p:nvSpPr>
+        <p:spPr>
+          <a:xfrm xmlns:a="http://schemas.openxmlformats.org/drawingml/2006/main">
+            <a:off x="609600" y="4629150"/>
+            <a:ext cx="323850" cy="323850"/>
+          </a:xfrm>
+          <a:prstGeom xmlns:a="http://schemas.openxmlformats.org/drawingml/2006/main" prst="rect">
+            <a:avLst/>
+          </a:prstGeom>
+          <a:noFill xmlns:a="http://schemas.openxmlformats.org/drawingml/2006/main"/>
+          <a:ln xmlns:a="http://schemas.openxmlformats.org/drawingml/2006/main" w="0">
+            <a:noFill/>
+          </a:ln>
+        </p:spPr>
+        <p:txBody>
+          <a:bodyPr xmlns:a="http://schemas.openxmlformats.org/drawingml/2006/main" lIns="0" tIns="0" rIns="0" bIns="0" anchor="ctr">
+            <a:noAutofit/>
+          </a:bodyPr>
+          <a:lstStyle xmlns:a="http://schemas.openxmlformats.org/drawingml/2006/main"/>
+          <a:p xmlns:a="http://schemas.openxmlformats.org/drawingml/2006/main">
+            <a:pPr algn="l">
+              <a:defRPr sz="1350" b="1">
+                <a:solidFill>
+                  <a:srgbClr val="28685E"/>
+                </a:solidFill>
+                <a:latin typeface="Calibri"/>
+                <a:ea typeface="Calibri"/>
+                <a:cs typeface="Calibri"/>
+              </a:defRPr>
+            </a:pPr>
+            <a:r>
+              <a:rPr sz="1350" b="1">
+                <a:solidFill>
+                  <a:srgbClr val="28685E"/>
+                </a:solidFill>
+                <a:latin typeface="Calibri"/>
+                <a:ea typeface="Calibri"/>
+                <a:cs typeface="Calibri"/>
+              </a:rPr>
+              <a:t>03</a:t>
             </a:r>
           </a:p>
         </p:txBody>
@@ -7492,7 +10787,7 @@
     <p:bg>
       <p:bgPr>
         <a:solidFill xmlns:a="http://schemas.openxmlformats.org/drawingml/2006/main">
-          <a:srgbClr val="F5F1E8"/>
+          <a:srgbClr val="FAF9F5"/>
         </a:solidFill>
       </p:bgPr>
     </p:bg>
@@ -7521,8 +10816,8 @@
         </p:nvSpPr>
         <p:spPr>
           <a:xfrm xmlns:a="http://schemas.openxmlformats.org/drawingml/2006/main">
-            <a:off x="609600" y="552450"/>
-            <a:ext cx="781050" cy="57150"/>
+            <a:off x="609600" y="733425"/>
+            <a:ext cx="781050" cy="38100"/>
           </a:xfrm>
           <a:prstGeom xmlns:a="http://schemas.openxmlformats.org/drawingml/2006/main" prst="rect">
             <a:avLst/>
@@ -7552,8 +10847,8 @@
         </p:nvSpPr>
         <p:spPr>
           <a:xfrm xmlns:a="http://schemas.openxmlformats.org/drawingml/2006/main">
-            <a:off x="609600" y="762000"/>
-            <a:ext cx="8572500" cy="285750"/>
+            <a:off x="609600" y="342900"/>
+            <a:ext cx="9334500" cy="304800"/>
           </a:xfrm>
           <a:prstGeom xmlns:a="http://schemas.openxmlformats.org/drawingml/2006/main" prst="rect">
             <a:avLst/>
@@ -7565,21 +10860,30 @@
           </a:ln>
         </p:spPr>
         <p:txBody>
-          <a:bodyPr xmlns:a="http://schemas.openxmlformats.org/drawingml/2006/main" lIns="0" tIns="0" rIns="0" bIns="0" anchor="ctr"/>
-          <a:lstStyle xmlns:a="http://schemas.openxmlformats.org/drawingml/2006/main"/>
-          <a:p xmlns:a="http://schemas.openxmlformats.org/drawingml/2006/main">
-            <a:pPr>
-              <a:defRPr sz="1500" b="1">
-                <a:solidFill>
-                  <a:srgbClr val="28685E"/>
-                </a:solidFill>
-              </a:defRPr>
-            </a:pPr>
-            <a:r>
-              <a:rPr sz="1500" b="1">
-                <a:solidFill>
-                  <a:srgbClr val="28685E"/>
-                </a:solidFill>
+          <a:bodyPr xmlns:a="http://schemas.openxmlformats.org/drawingml/2006/main" lIns="0" tIns="0" rIns="0" bIns="0" anchor="ctr">
+            <a:noAutofit/>
+          </a:bodyPr>
+          <a:lstStyle xmlns:a="http://schemas.openxmlformats.org/drawingml/2006/main"/>
+          <a:p xmlns:a="http://schemas.openxmlformats.org/drawingml/2006/main">
+            <a:pPr algn="l">
+              <a:buNone/>
+              <a:defRPr sz="1350" b="1">
+                <a:solidFill>
+                  <a:srgbClr val="28685E"/>
+                </a:solidFill>
+                <a:latin typeface="Calibri"/>
+                <a:ea typeface="Calibri"/>
+                <a:cs typeface="Calibri"/>
+              </a:defRPr>
+            </a:pPr>
+            <a:r>
+              <a:rPr sz="1350" b="1">
+                <a:solidFill>
+                  <a:srgbClr val="28685E"/>
+                </a:solidFill>
+                <a:latin typeface="Calibri"/>
+                <a:ea typeface="Calibri"/>
+                <a:cs typeface="Calibri"/>
               </a:rPr>
               <a:t>MADE BY MATT  /  GROW SCIENCE</a:t>
             </a:r>
@@ -7602,8 +10906,8 @@
         </p:nvSpPr>
         <p:spPr>
           <a:xfrm xmlns:a="http://schemas.openxmlformats.org/drawingml/2006/main">
-            <a:off x="609600" y="1352550"/>
-            <a:ext cx="10972800" cy="952500"/>
+            <a:off x="609600" y="990600"/>
+            <a:ext cx="10972800" cy="1000125"/>
           </a:xfrm>
           <a:prstGeom xmlns:a="http://schemas.openxmlformats.org/drawingml/2006/main" prst="rect">
             <a:avLst/>
@@ -7615,21 +10919,30 @@
           </a:ln>
         </p:spPr>
         <p:txBody>
-          <a:bodyPr xmlns:a="http://schemas.openxmlformats.org/drawingml/2006/main" lIns="0" tIns="0" rIns="0" bIns="0" anchor="ctr"/>
-          <a:lstStyle xmlns:a="http://schemas.openxmlformats.org/drawingml/2006/main"/>
-          <a:p xmlns:a="http://schemas.openxmlformats.org/drawingml/2006/main">
-            <a:pPr>
-              <a:defRPr sz="3750" b="1">
+          <a:bodyPr xmlns:a="http://schemas.openxmlformats.org/drawingml/2006/main" lIns="0" tIns="0" rIns="0" bIns="0" anchor="ctr">
+            <a:noAutofit/>
+          </a:bodyPr>
+          <a:lstStyle xmlns:a="http://schemas.openxmlformats.org/drawingml/2006/main"/>
+          <a:p xmlns:a="http://schemas.openxmlformats.org/drawingml/2006/main">
+            <a:pPr algn="l">
+              <a:buNone/>
+              <a:defRPr sz="3675" b="1">
                 <a:solidFill>
                   <a:srgbClr val="152B3A"/>
                 </a:solidFill>
-              </a:defRPr>
-            </a:pPr>
-            <a:r>
-              <a:rPr sz="3750" b="1">
+                <a:latin typeface="Calibri"/>
+                <a:ea typeface="Calibri"/>
+                <a:cs typeface="Calibri"/>
+              </a:defRPr>
+            </a:pPr>
+            <a:r>
+              <a:rPr sz="3675" b="1">
                 <a:solidFill>
                   <a:srgbClr val="152B3A"/>
                 </a:solidFill>
+                <a:latin typeface="Calibri"/>
+                <a:ea typeface="Calibri"/>
+                <a:cs typeface="Calibri"/>
               </a:rPr>
               <a:t>Reset the room and kit</a:t>
             </a:r>
@@ -7652,14 +10965,14 @@
         </p:nvSpPr>
         <p:spPr>
           <a:xfrm xmlns:a="http://schemas.openxmlformats.org/drawingml/2006/main">
-            <a:off x="609600" y="6219825"/>
+            <a:off x="609600" y="6191250"/>
             <a:ext cx="10972800" cy="9525"/>
           </a:xfrm>
           <a:prstGeom xmlns:a="http://schemas.openxmlformats.org/drawingml/2006/main" prst="rect">
             <a:avLst/>
           </a:prstGeom>
           <a:solidFill xmlns:a="http://schemas.openxmlformats.org/drawingml/2006/main">
-            <a:srgbClr val="DCE7DD"/>
+            <a:srgbClr val="CEDBD3"/>
           </a:solidFill>
           <a:ln xmlns:a="http://schemas.openxmlformats.org/drawingml/2006/main" w="0">
             <a:noFill/>
@@ -7683,8 +10996,8 @@
         </p:nvSpPr>
         <p:spPr>
           <a:xfrm xmlns:a="http://schemas.openxmlformats.org/drawingml/2006/main">
-            <a:off x="609600" y="6381750"/>
-            <a:ext cx="9906000" cy="228600"/>
+            <a:off x="609600" y="6419850"/>
+            <a:ext cx="9525000" cy="219075"/>
           </a:xfrm>
           <a:prstGeom xmlns:a="http://schemas.openxmlformats.org/drawingml/2006/main" prst="rect">
             <a:avLst/>
@@ -7696,21 +11009,30 @@
           </a:ln>
         </p:spPr>
         <p:txBody>
-          <a:bodyPr xmlns:a="http://schemas.openxmlformats.org/drawingml/2006/main" lIns="0" tIns="0" rIns="0" bIns="0" anchor="ctr"/>
-          <a:lstStyle xmlns:a="http://schemas.openxmlformats.org/drawingml/2006/main"/>
-          <a:p xmlns:a="http://schemas.openxmlformats.org/drawingml/2006/main">
-            <a:pPr>
-              <a:defRPr sz="1275" b="0">
+          <a:bodyPr xmlns:a="http://schemas.openxmlformats.org/drawingml/2006/main" lIns="0" tIns="0" rIns="0" bIns="0" anchor="ctr">
+            <a:noAutofit/>
+          </a:bodyPr>
+          <a:lstStyle xmlns:a="http://schemas.openxmlformats.org/drawingml/2006/main"/>
+          <a:p xmlns:a="http://schemas.openxmlformats.org/drawingml/2006/main">
+            <a:pPr algn="l">
+              <a:buNone/>
+              <a:defRPr sz="1200" b="0">
                 <a:solidFill>
                   <a:srgbClr val="50616B"/>
                 </a:solidFill>
-              </a:defRPr>
-            </a:pPr>
-            <a:r>
-              <a:rPr sz="1275" b="0">
+                <a:latin typeface="Calibri"/>
+                <a:ea typeface="Calibri"/>
+                <a:cs typeface="Calibri"/>
+              </a:defRPr>
+            </a:pPr>
+            <a:r>
+              <a:rPr sz="1200" b="0">
                 <a:solidFill>
                   <a:srgbClr val="50616B"/>
                 </a:solidFill>
+                <a:latin typeface="Calibri"/>
+                <a:ea typeface="Calibri"/>
+                <a:cs typeface="Calibri"/>
               </a:rPr>
               <a:t>AUTUMN 1  ·  WEEK 7  ·  LESSON B</a:t>
             </a:r>
@@ -7733,8 +11055,8 @@
         </p:nvSpPr>
         <p:spPr>
           <a:xfrm xmlns:a="http://schemas.openxmlformats.org/drawingml/2006/main">
-            <a:off x="11106150" y="6362700"/>
-            <a:ext cx="476250" cy="238125"/>
+            <a:off x="11106150" y="6400800"/>
+            <a:ext cx="476250" cy="247650"/>
           </a:xfrm>
           <a:prstGeom xmlns:a="http://schemas.openxmlformats.org/drawingml/2006/main" prst="rect">
             <a:avLst/>
@@ -7746,14 +11068,20 @@
           </a:ln>
         </p:spPr>
         <p:txBody>
-          <a:bodyPr xmlns:a="http://schemas.openxmlformats.org/drawingml/2006/main" lIns="0" tIns="0" rIns="0" bIns="0" anchor="ctr"/>
-          <a:lstStyle xmlns:a="http://schemas.openxmlformats.org/drawingml/2006/main"/>
-          <a:p xmlns:a="http://schemas.openxmlformats.org/drawingml/2006/main">
-            <a:pPr>
+          <a:bodyPr xmlns:a="http://schemas.openxmlformats.org/drawingml/2006/main" lIns="0" tIns="0" rIns="0" bIns="0" anchor="ctr">
+            <a:noAutofit/>
+          </a:bodyPr>
+          <a:lstStyle xmlns:a="http://schemas.openxmlformats.org/drawingml/2006/main"/>
+          <a:p xmlns:a="http://schemas.openxmlformats.org/drawingml/2006/main">
+            <a:pPr algn="l">
+              <a:buNone/>
               <a:defRPr sz="1350" b="1">
                 <a:solidFill>
                   <a:srgbClr val="28685E"/>
                 </a:solidFill>
+                <a:latin typeface="Calibri"/>
+                <a:ea typeface="Calibri"/>
+                <a:cs typeface="Calibri"/>
               </a:defRPr>
             </a:pPr>
             <a:r>
@@ -7761,6 +11089,9 @@
                 <a:solidFill>
                   <a:srgbClr val="28685E"/>
                 </a:solidFill>
+                <a:latin typeface="Calibri"/>
+                <a:ea typeface="Calibri"/>
+                <a:cs typeface="Calibri"/>
               </a:rPr>
               <a:t>09</a:t>
             </a:r>
@@ -7783,8 +11114,8 @@
         </p:nvSpPr>
         <p:spPr>
           <a:xfrm xmlns:a="http://schemas.openxmlformats.org/drawingml/2006/main">
-            <a:off x="609600" y="2619375"/>
-            <a:ext cx="10972800" cy="781050"/>
+            <a:off x="1000125" y="2333625"/>
+            <a:ext cx="10382250" cy="1076325"/>
           </a:xfrm>
           <a:prstGeom xmlns:a="http://schemas.openxmlformats.org/drawingml/2006/main" prst="rect">
             <a:avLst/>
@@ -7796,21 +11127,30 @@
           </a:ln>
         </p:spPr>
         <p:txBody>
-          <a:bodyPr xmlns:a="http://schemas.openxmlformats.org/drawingml/2006/main" lIns="0" tIns="0" rIns="0" bIns="0" anchor="ctr"/>
-          <a:lstStyle xmlns:a="http://schemas.openxmlformats.org/drawingml/2006/main"/>
-          <a:p xmlns:a="http://schemas.openxmlformats.org/drawingml/2006/main">
-            <a:pPr>
-              <a:defRPr sz="2550" b="0">
+          <a:bodyPr xmlns:a="http://schemas.openxmlformats.org/drawingml/2006/main" lIns="0" tIns="0" rIns="0" bIns="0" anchor="ctr">
+            <a:noAutofit/>
+          </a:bodyPr>
+          <a:lstStyle xmlns:a="http://schemas.openxmlformats.org/drawingml/2006/main"/>
+          <a:p xmlns:a="http://schemas.openxmlformats.org/drawingml/2006/main">
+            <a:pPr algn="l">
+              <a:buNone/>
+              <a:defRPr sz="2625" b="0">
                 <a:solidFill>
                   <a:srgbClr val="152B3A"/>
                 </a:solidFill>
-              </a:defRPr>
-            </a:pPr>
-            <a:r>
-              <a:rPr sz="2550" b="0">
+                <a:latin typeface="Calibri"/>
+                <a:ea typeface="Calibri"/>
+                <a:cs typeface="Calibri"/>
+              </a:defRPr>
+            </a:pPr>
+            <a:r>
+              <a:rPr sz="2625" b="0">
                 <a:solidFill>
                   <a:srgbClr val="152B3A"/>
                 </a:solidFill>
+                <a:latin typeface="Calibri"/>
+                <a:ea typeface="Calibri"/>
+                <a:cs typeface="Calibri"/>
               </a:rPr>
               <a:t>Restore agreed room lighting.</a:t>
             </a:r>
@@ -7833,8 +11173,8 @@
         </p:nvSpPr>
         <p:spPr>
           <a:xfrm xmlns:a="http://schemas.openxmlformats.org/drawingml/2006/main">
-            <a:off x="609600" y="3476625"/>
-            <a:ext cx="10972800" cy="781050"/>
+            <a:off x="1000125" y="3467100"/>
+            <a:ext cx="10382250" cy="1076325"/>
           </a:xfrm>
           <a:prstGeom xmlns:a="http://schemas.openxmlformats.org/drawingml/2006/main" prst="rect">
             <a:avLst/>
@@ -7846,21 +11186,30 @@
           </a:ln>
         </p:spPr>
         <p:txBody>
-          <a:bodyPr xmlns:a="http://schemas.openxmlformats.org/drawingml/2006/main" lIns="0" tIns="0" rIns="0" bIns="0" anchor="ctr"/>
-          <a:lstStyle xmlns:a="http://schemas.openxmlformats.org/drawingml/2006/main"/>
-          <a:p xmlns:a="http://schemas.openxmlformats.org/drawingml/2006/main">
-            <a:pPr>
-              <a:defRPr sz="2550" b="0">
+          <a:bodyPr xmlns:a="http://schemas.openxmlformats.org/drawingml/2006/main" lIns="0" tIns="0" rIns="0" bIns="0" anchor="ctr">
+            <a:noAutofit/>
+          </a:bodyPr>
+          <a:lstStyle xmlns:a="http://schemas.openxmlformats.org/drawingml/2006/main"/>
+          <a:p xmlns:a="http://schemas.openxmlformats.org/drawingml/2006/main">
+            <a:pPr algn="l">
+              <a:buNone/>
+              <a:defRPr sz="2625" b="0">
                 <a:solidFill>
                   <a:srgbClr val="152B3A"/>
                 </a:solidFill>
-              </a:defRPr>
-            </a:pPr>
-            <a:r>
-              <a:rPr sz="2550" b="0">
+                <a:latin typeface="Calibri"/>
+                <a:ea typeface="Calibri"/>
+                <a:cs typeface="Calibri"/>
+              </a:defRPr>
+            </a:pPr>
+            <a:r>
+              <a:rPr sz="2625" b="0">
                 <a:solidFill>
                   <a:srgbClr val="152B3A"/>
                 </a:solidFill>
+                <a:latin typeface="Calibri"/>
+                <a:ea typeface="Calibri"/>
+                <a:cs typeface="Calibri"/>
               </a:rPr>
               <a:t>Return ball, torch, cards and pencils.</a:t>
             </a:r>
@@ -7883,8 +11232,8 @@
         </p:nvSpPr>
         <p:spPr>
           <a:xfrm xmlns:a="http://schemas.openxmlformats.org/drawingml/2006/main">
-            <a:off x="609600" y="4333875"/>
-            <a:ext cx="10972800" cy="781050"/>
+            <a:off x="1000125" y="4600575"/>
+            <a:ext cx="10382250" cy="1076325"/>
           </a:xfrm>
           <a:prstGeom xmlns:a="http://schemas.openxmlformats.org/drawingml/2006/main" prst="rect">
             <a:avLst/>
@@ -7896,23 +11245,263 @@
           </a:ln>
         </p:spPr>
         <p:txBody>
-          <a:bodyPr xmlns:a="http://schemas.openxmlformats.org/drawingml/2006/main" lIns="0" tIns="0" rIns="0" bIns="0" anchor="ctr"/>
-          <a:lstStyle xmlns:a="http://schemas.openxmlformats.org/drawingml/2006/main"/>
-          <a:p xmlns:a="http://schemas.openxmlformats.org/drawingml/2006/main">
-            <a:pPr>
-              <a:defRPr sz="2550" b="0">
+          <a:bodyPr xmlns:a="http://schemas.openxmlformats.org/drawingml/2006/main" lIns="0" tIns="0" rIns="0" bIns="0" anchor="ctr">
+            <a:noAutofit/>
+          </a:bodyPr>
+          <a:lstStyle xmlns:a="http://schemas.openxmlformats.org/drawingml/2006/main"/>
+          <a:p xmlns:a="http://schemas.openxmlformats.org/drawingml/2006/main">
+            <a:pPr algn="l">
+              <a:buNone/>
+              <a:defRPr sz="2625" b="0">
                 <a:solidFill>
                   <a:srgbClr val="152B3A"/>
                 </a:solidFill>
-              </a:defRPr>
-            </a:pPr>
-            <a:r>
-              <a:rPr sz="2550" b="0">
+                <a:latin typeface="Calibri"/>
+                <a:ea typeface="Calibri"/>
+                <a:cs typeface="Calibri"/>
+              </a:defRPr>
+            </a:pPr>
+            <a:r>
+              <a:rPr sz="2625" b="0">
                 <a:solidFill>
                   <a:srgbClr val="152B3A"/>
                 </a:solidFill>
+                <a:latin typeface="Calibri"/>
+                <a:ea typeface="Calibri"/>
+                <a:cs typeface="Calibri"/>
               </a:rPr>
               <a:t>Keep your labelled strip and explanation.</a:t>
+            </a:r>
+          </a:p>
+        </p:txBody>
+      </p:sp>
+      <p:sp>
+        <p:nvSpPr>
+          <p:cNvPr id="11" name="cue-0">
+            <a:extLst xmlns:a="http://schemas.openxmlformats.org/drawingml/2006/main">
+              <a:ext uri="{FF2B5EF4-FFF2-40B4-BE49-F238E27FC236}">
+                <a16:creationId xmlns:a16="http://schemas.microsoft.com/office/drawing/2014/main" id="{BAB2A671-F5B4-440D-90E9-E4011E1D02AB}"/>
+              </a:ext>
+            </a:extLst>
+          </p:cNvPr>
+          <p:cNvSpPr>
+            <a:spLocks xmlns:a="http://schemas.openxmlformats.org/drawingml/2006/main" noGrp="1"/>
+          </p:cNvSpPr>
+          <p:nvPr/>
+        </p:nvSpPr>
+        <p:spPr>
+          <a:xfrm xmlns:a="http://schemas.openxmlformats.org/drawingml/2006/main">
+            <a:off x="609600" y="2362200"/>
+            <a:ext cx="323850" cy="323850"/>
+          </a:xfrm>
+          <a:prstGeom xmlns:a="http://schemas.openxmlformats.org/drawingml/2006/main" prst="rect">
+            <a:avLst/>
+          </a:prstGeom>
+          <a:noFill xmlns:a="http://schemas.openxmlformats.org/drawingml/2006/main"/>
+          <a:ln xmlns:a="http://schemas.openxmlformats.org/drawingml/2006/main" w="0">
+            <a:noFill/>
+          </a:ln>
+        </p:spPr>
+        <p:txBody>
+          <a:bodyPr xmlns:a="http://schemas.openxmlformats.org/drawingml/2006/main" lIns="0" tIns="0" rIns="0" bIns="0" anchor="ctr">
+            <a:noAutofit/>
+          </a:bodyPr>
+          <a:lstStyle xmlns:a="http://schemas.openxmlformats.org/drawingml/2006/main"/>
+          <a:p xmlns:a="http://schemas.openxmlformats.org/drawingml/2006/main">
+            <a:pPr algn="l">
+              <a:defRPr sz="1350" b="1">
+                <a:solidFill>
+                  <a:srgbClr val="28685E"/>
+                </a:solidFill>
+                <a:latin typeface="Calibri"/>
+                <a:ea typeface="Calibri"/>
+                <a:cs typeface="Calibri"/>
+              </a:defRPr>
+            </a:pPr>
+            <a:r>
+              <a:rPr sz="1350" b="1">
+                <a:solidFill>
+                  <a:srgbClr val="28685E"/>
+                </a:solidFill>
+                <a:latin typeface="Calibri"/>
+                <a:ea typeface="Calibri"/>
+                <a:cs typeface="Calibri"/>
+              </a:rPr>
+              <a:t>01</a:t>
+            </a:r>
+          </a:p>
+        </p:txBody>
+      </p:sp>
+      <p:sp>
+        <p:nvSpPr>
+          <p:cNvPr id="12" name="row-rule-0">
+            <a:extLst xmlns:a="http://schemas.openxmlformats.org/drawingml/2006/main">
+              <a:ext uri="{FF2B5EF4-FFF2-40B4-BE49-F238E27FC236}">
+                <a16:creationId xmlns:a16="http://schemas.microsoft.com/office/drawing/2014/main" id="{D4074DC9-E745-443B-A728-D2F66568B9EC}"/>
+              </a:ext>
+            </a:extLst>
+          </p:cNvPr>
+          <p:cNvSpPr>
+            <a:spLocks xmlns:a="http://schemas.openxmlformats.org/drawingml/2006/main" noGrp="1"/>
+          </p:cNvSpPr>
+          <p:nvPr/>
+        </p:nvSpPr>
+        <p:spPr>
+          <a:xfrm xmlns:a="http://schemas.openxmlformats.org/drawingml/2006/main">
+            <a:off x="1000125" y="3419475"/>
+            <a:ext cx="10334625" cy="0"/>
+          </a:xfrm>
+          <a:prstGeom xmlns:a="http://schemas.openxmlformats.org/drawingml/2006/main" prst="line">
+            <a:avLst/>
+          </a:prstGeom>
+          <a:noFill xmlns:a="http://schemas.openxmlformats.org/drawingml/2006/main"/>
+          <a:ln xmlns:a="http://schemas.openxmlformats.org/drawingml/2006/main" w="9525">
+            <a:solidFill>
+              <a:srgbClr val="CEDBD3"/>
+            </a:solidFill>
+          </a:ln>
+        </p:spPr>
+      </p:sp>
+      <p:sp>
+        <p:nvSpPr>
+          <p:cNvPr id="13" name="cue-1">
+            <a:extLst xmlns:a="http://schemas.openxmlformats.org/drawingml/2006/main">
+              <a:ext uri="{FF2B5EF4-FFF2-40B4-BE49-F238E27FC236}">
+                <a16:creationId xmlns:a16="http://schemas.microsoft.com/office/drawing/2014/main" id="{9FF4E774-ECC9-4A17-B4F1-0B318A211820}"/>
+              </a:ext>
+            </a:extLst>
+          </p:cNvPr>
+          <p:cNvSpPr>
+            <a:spLocks xmlns:a="http://schemas.openxmlformats.org/drawingml/2006/main" noGrp="1"/>
+          </p:cNvSpPr>
+          <p:nvPr/>
+        </p:nvSpPr>
+        <p:spPr>
+          <a:xfrm xmlns:a="http://schemas.openxmlformats.org/drawingml/2006/main">
+            <a:off x="609600" y="3495675"/>
+            <a:ext cx="323850" cy="323850"/>
+          </a:xfrm>
+          <a:prstGeom xmlns:a="http://schemas.openxmlformats.org/drawingml/2006/main" prst="rect">
+            <a:avLst/>
+          </a:prstGeom>
+          <a:noFill xmlns:a="http://schemas.openxmlformats.org/drawingml/2006/main"/>
+          <a:ln xmlns:a="http://schemas.openxmlformats.org/drawingml/2006/main" w="0">
+            <a:noFill/>
+          </a:ln>
+        </p:spPr>
+        <p:txBody>
+          <a:bodyPr xmlns:a="http://schemas.openxmlformats.org/drawingml/2006/main" lIns="0" tIns="0" rIns="0" bIns="0" anchor="ctr">
+            <a:noAutofit/>
+          </a:bodyPr>
+          <a:lstStyle xmlns:a="http://schemas.openxmlformats.org/drawingml/2006/main"/>
+          <a:p xmlns:a="http://schemas.openxmlformats.org/drawingml/2006/main">
+            <a:pPr algn="l">
+              <a:defRPr sz="1350" b="1">
+                <a:solidFill>
+                  <a:srgbClr val="28685E"/>
+                </a:solidFill>
+                <a:latin typeface="Calibri"/>
+                <a:ea typeface="Calibri"/>
+                <a:cs typeface="Calibri"/>
+              </a:defRPr>
+            </a:pPr>
+            <a:r>
+              <a:rPr sz="1350" b="1">
+                <a:solidFill>
+                  <a:srgbClr val="28685E"/>
+                </a:solidFill>
+                <a:latin typeface="Calibri"/>
+                <a:ea typeface="Calibri"/>
+                <a:cs typeface="Calibri"/>
+              </a:rPr>
+              <a:t>02</a:t>
+            </a:r>
+          </a:p>
+        </p:txBody>
+      </p:sp>
+      <p:sp>
+        <p:nvSpPr>
+          <p:cNvPr id="14" name="row-rule-1">
+            <a:extLst xmlns:a="http://schemas.openxmlformats.org/drawingml/2006/main">
+              <a:ext uri="{FF2B5EF4-FFF2-40B4-BE49-F238E27FC236}">
+                <a16:creationId xmlns:a16="http://schemas.microsoft.com/office/drawing/2014/main" id="{E1157564-B52D-4F61-B859-C729511C8EED}"/>
+              </a:ext>
+            </a:extLst>
+          </p:cNvPr>
+          <p:cNvSpPr>
+            <a:spLocks xmlns:a="http://schemas.openxmlformats.org/drawingml/2006/main" noGrp="1"/>
+          </p:cNvSpPr>
+          <p:nvPr/>
+        </p:nvSpPr>
+        <p:spPr>
+          <a:xfrm xmlns:a="http://schemas.openxmlformats.org/drawingml/2006/main">
+            <a:off x="1000125" y="4552950"/>
+            <a:ext cx="10334625" cy="0"/>
+          </a:xfrm>
+          <a:prstGeom xmlns:a="http://schemas.openxmlformats.org/drawingml/2006/main" prst="line">
+            <a:avLst/>
+          </a:prstGeom>
+          <a:noFill xmlns:a="http://schemas.openxmlformats.org/drawingml/2006/main"/>
+          <a:ln xmlns:a="http://schemas.openxmlformats.org/drawingml/2006/main" w="9525">
+            <a:solidFill>
+              <a:srgbClr val="CEDBD3"/>
+            </a:solidFill>
+          </a:ln>
+        </p:spPr>
+      </p:sp>
+      <p:sp>
+        <p:nvSpPr>
+          <p:cNvPr id="15" name="cue-2">
+            <a:extLst xmlns:a="http://schemas.openxmlformats.org/drawingml/2006/main">
+              <a:ext uri="{FF2B5EF4-FFF2-40B4-BE49-F238E27FC236}">
+                <a16:creationId xmlns:a16="http://schemas.microsoft.com/office/drawing/2014/main" id="{2FA1F306-C2E7-447C-91CB-624D2AD15A3E}"/>
+              </a:ext>
+            </a:extLst>
+          </p:cNvPr>
+          <p:cNvSpPr>
+            <a:spLocks xmlns:a="http://schemas.openxmlformats.org/drawingml/2006/main" noGrp="1"/>
+          </p:cNvSpPr>
+          <p:nvPr/>
+        </p:nvSpPr>
+        <p:spPr>
+          <a:xfrm xmlns:a="http://schemas.openxmlformats.org/drawingml/2006/main">
+            <a:off x="609600" y="4629150"/>
+            <a:ext cx="323850" cy="323850"/>
+          </a:xfrm>
+          <a:prstGeom xmlns:a="http://schemas.openxmlformats.org/drawingml/2006/main" prst="rect">
+            <a:avLst/>
+          </a:prstGeom>
+          <a:noFill xmlns:a="http://schemas.openxmlformats.org/drawingml/2006/main"/>
+          <a:ln xmlns:a="http://schemas.openxmlformats.org/drawingml/2006/main" w="0">
+            <a:noFill/>
+          </a:ln>
+        </p:spPr>
+        <p:txBody>
+          <a:bodyPr xmlns:a="http://schemas.openxmlformats.org/drawingml/2006/main" lIns="0" tIns="0" rIns="0" bIns="0" anchor="ctr">
+            <a:noAutofit/>
+          </a:bodyPr>
+          <a:lstStyle xmlns:a="http://schemas.openxmlformats.org/drawingml/2006/main"/>
+          <a:p xmlns:a="http://schemas.openxmlformats.org/drawingml/2006/main">
+            <a:pPr algn="l">
+              <a:defRPr sz="1350" b="1">
+                <a:solidFill>
+                  <a:srgbClr val="28685E"/>
+                </a:solidFill>
+                <a:latin typeface="Calibri"/>
+                <a:ea typeface="Calibri"/>
+                <a:cs typeface="Calibri"/>
+              </a:defRPr>
+            </a:pPr>
+            <a:r>
+              <a:rPr sz="1350" b="1">
+                <a:solidFill>
+                  <a:srgbClr val="28685E"/>
+                </a:solidFill>
+                <a:latin typeface="Calibri"/>
+                <a:ea typeface="Calibri"/>
+                <a:cs typeface="Calibri"/>
+              </a:rPr>
+              <a:t>03</a:t>
             </a:r>
           </a:p>
         </p:txBody>
